--- a/Migration-Agent-Architecture-Options.pptx
+++ b/Migration-Agent-Architecture-Options.pptx
@@ -17,9 +17,10 @@
     <p:sldId id="265" r:id="rId11"/>
     <p:sldId id="266" r:id="rId12"/>
     <p:sldId id="267" r:id="rId13"/>
+    <p:sldId id="268" r:id="rId14"/>
   </p:sldIdLst>
   <p:notesMasterIdLst>
-    <p:notesMasterId r:id="rId14"/>
+    <p:notesMasterId r:id="rId15"/>
   </p:notesMasterIdLst>
   <p:sldSz cx="9144000" cy="5143500"/>
   <p:notesSz cx="5143500" cy="9144000"/>
@@ -801,6 +802,94 @@
             <a:fld id="{F7021451-1387-4CA6-816F-3879F97B5CBC}" type="slidenum">
               <a:rPr lang="en-US"/>
               <a:t>12</a:t>
+            </a:fld>
+            <a:endParaRPr lang="en-US"/>
+          </a:p>
+        </p:txBody>
+      </p:sp>
+    </p:spTree>
+    <p:extLst>
+      <p:ext uri="{BB962C8B-B14F-4D97-AF65-F5344CB8AC3E}">
+        <p14:creationId xmlns:p14="http://schemas.microsoft.com/office/powerpoint/2010/main" val="1024086991"/>
+      </p:ext>
+    </p:extLst>
+  </p:cSld>
+  <p:clrMapOvr>
+    <a:masterClrMapping/>
+  </p:clrMapOvr>
+</p:notes>
+</file>
+
+<file path=ppt/notesSlides/notesSlide13.xml><?xml version="1.0" encoding="utf-8"?>
+<p:notes xmlns:a="http://schemas.openxmlformats.org/drawingml/2006/main" xmlns:r="http://schemas.openxmlformats.org/officeDocument/2006/relationships" xmlns:p="http://schemas.openxmlformats.org/presentationml/2006/main">
+  <p:cSld>
+    <p:spTree>
+      <p:nvGrpSpPr>
+        <p:cNvPr id="1" name=""/>
+        <p:cNvGrpSpPr/>
+        <p:nvPr/>
+      </p:nvGrpSpPr>
+      <p:grpSpPr>
+        <a:xfrm>
+          <a:off x="0" y="0"/>
+          <a:ext cx="0" cy="0"/>
+          <a:chOff x="0" y="0"/>
+          <a:chExt cx="0" cy="0"/>
+        </a:xfrm>
+      </p:grpSpPr>
+      <p:sp>
+        <p:nvSpPr>
+          <p:cNvPr id="2" name="Slide Image Placeholder 1"/>
+          <p:cNvSpPr>
+            <a:spLocks noGrp="1" noRot="1" noChangeAspect="1"/>
+          </p:cNvSpPr>
+          <p:nvPr>
+            <p:ph type="sldImg"/>
+          </p:nvPr>
+        </p:nvSpPr>
+        <p:spPr/>
+      </p:sp>
+      <p:sp>
+        <p:nvSpPr>
+          <p:cNvPr id="3" name="Notes Placeholder 2"/>
+          <p:cNvSpPr>
+            <a:spLocks noGrp="1"/>
+          </p:cNvSpPr>
+          <p:nvPr>
+            <p:ph type="body" idx="1"/>
+          </p:nvPr>
+        </p:nvSpPr>
+        <p:spPr/>
+        <p:txBody>
+          <a:bodyPr/>
+          <a:lstStyle/>
+          <a:p>
+            <a:r>
+              <a:rPr lang="en-US" dirty="0"/>
+              <a:t/>
+            </a:r>
+            <a:endParaRPr lang="en-US" dirty="0"/>
+          </a:p>
+        </p:txBody>
+      </p:sp>
+      <p:sp>
+        <p:nvSpPr>
+          <p:cNvPr id="4" name="Slide Number Placeholder 3"/>
+          <p:cNvSpPr>
+            <a:spLocks noGrp="1"/>
+          </p:cNvSpPr>
+          <p:nvPr>
+            <p:ph type="sldNum" sz="quarter" idx="10"/>
+          </p:nvPr>
+        </p:nvSpPr>
+        <p:spPr/>
+        <p:txBody>
+          <a:bodyPr/>
+          <a:lstStyle/>
+          <a:p>
+            <a:fld id="{F7021451-1387-4CA6-816F-3879F97B5CBC}" type="slidenum">
+              <a:rPr lang="en-US"/>
+              <a:t>13</a:t>
             </a:fld>
             <a:endParaRPr lang="en-US"/>
           </a:p>
@@ -2149,24 +2238,24 @@
         </p:nvSpPr>
         <p:spPr>
           <a:xfrm>
-            <a:off x="731520" y="228600"/>
-            <a:ext cx="7680960" cy="457200"/>
-          </a:xfrm>
-          <a:prstGeom prst="rect">
-            <a:avLst/>
-          </a:prstGeom>
-          <a:noFill/>
-          <a:ln/>
-        </p:spPr>
-        <p:txBody>
-          <a:bodyPr wrap="square" lIns="0" tIns="0" rIns="0" bIns="0" rtlCol="0" anchor="ctr"/>
-          <a:lstStyle/>
-          <a:p>
-            <a:pPr indent="0" marL="0">
-              <a:buNone/>
-            </a:pPr>
-            <a:r>
-              <a:rPr lang="en-US" sz="2800" b="1" dirty="0">
+            <a:off x="457200" y="137160"/>
+            <a:ext cx="8229600" cy="347472"/>
+          </a:xfrm>
+          <a:prstGeom prst="rect">
+            <a:avLst/>
+          </a:prstGeom>
+          <a:noFill/>
+          <a:ln/>
+        </p:spPr>
+        <p:txBody>
+          <a:bodyPr wrap="square" lIns="0" tIns="0" rIns="0" bIns="0" rtlCol="0" anchor="ctr"/>
+          <a:lstStyle/>
+          <a:p>
+            <a:pPr indent="0" marL="0">
+              <a:buNone/>
+            </a:pPr>
+            <a:r>
+              <a:rPr lang="en-US" sz="2200" b="1" dirty="0">
                 <a:solidFill>
                   <a:srgbClr val="0F172A"/>
                 </a:solidFill>
@@ -2174,9 +2263,9 @@
                 <a:ea typeface="Trebuchet MS" pitchFamily="34" charset="-122"/>
                 <a:cs typeface="Trebuchet MS" pitchFamily="34" charset="-120"/>
               </a:rPr>
-              <a:t>Delivery Timeline &amp; Effort</a:t>
-            </a:r>
-            <a:endParaRPr lang="en-US" sz="2800" dirty="0"/>
+              <a:t>Azure Deployment &amp; ADO Access</a:t>
+            </a:r>
+            <a:endParaRPr lang="en-US" sz="2200" dirty="0"/>
           </a:p>
         </p:txBody>
       </p:sp>
@@ -2188,34 +2277,34 @@
         </p:nvSpPr>
         <p:spPr>
           <a:xfrm>
-            <a:off x="731520" y="868680"/>
-            <a:ext cx="3657600" cy="274320"/>
-          </a:xfrm>
-          <a:prstGeom prst="rect">
-            <a:avLst/>
-          </a:prstGeom>
-          <a:noFill/>
-          <a:ln/>
-        </p:spPr>
-        <p:txBody>
-          <a:bodyPr wrap="square" lIns="0" tIns="0" rIns="0" bIns="0" rtlCol="0" anchor="ctr"/>
-          <a:lstStyle/>
-          <a:p>
-            <a:pPr indent="0" marL="0">
-              <a:buNone/>
-            </a:pPr>
-            <a:r>
-              <a:rPr lang="en-US" sz="1200" b="1" dirty="0">
-                <a:solidFill>
-                  <a:srgbClr val="0284C7"/>
-                </a:solidFill>
-                <a:latin typeface="Trebuchet MS" pitchFamily="34" charset="0"/>
-                <a:ea typeface="Trebuchet MS" pitchFamily="34" charset="-122"/>
-                <a:cs typeface="Trebuchet MS" pitchFamily="34" charset="-120"/>
-              </a:rPr>
-              <a:t>OPTION 1: CODEX NATIVE</a:t>
-            </a:r>
-            <a:endParaRPr lang="en-US" sz="1200" dirty="0"/>
+            <a:off x="457200" y="475488"/>
+            <a:ext cx="8229600" cy="228600"/>
+          </a:xfrm>
+          <a:prstGeom prst="rect">
+            <a:avLst/>
+          </a:prstGeom>
+          <a:noFill/>
+          <a:ln/>
+        </p:spPr>
+        <p:txBody>
+          <a:bodyPr wrap="square" lIns="0" tIns="0" rIns="0" bIns="0" rtlCol="0" anchor="ctr"/>
+          <a:lstStyle/>
+          <a:p>
+            <a:pPr indent="0" marL="0">
+              <a:buNone/>
+            </a:pPr>
+            <a:r>
+              <a:rPr lang="en-US" sz="1000" dirty="0">
+                <a:solidFill>
+                  <a:srgbClr val="64748B"/>
+                </a:solidFill>
+                <a:latin typeface="Calibri" pitchFamily="34" charset="0"/>
+                <a:ea typeface="Calibri" pitchFamily="34" charset="-122"/>
+                <a:cs typeface="Calibri" pitchFamily="34" charset="-120"/>
+              </a:rPr>
+              <a:t>How each solution runs in Azure Container Apps, accesses ADO repos, and is invoked</a:t>
+            </a:r>
+            <a:endParaRPr lang="en-US" sz="1000" dirty="0"/>
           </a:p>
         </p:txBody>
       </p:sp>
@@ -2227,16 +2316,21 @@
         </p:nvSpPr>
         <p:spPr>
           <a:xfrm>
-            <a:off x="457200" y="1280160"/>
-            <a:ext cx="1005840" cy="594360"/>
+            <a:off x="137160" y="777240"/>
+            <a:ext cx="4389120" cy="4251960"/>
           </a:xfrm>
           <a:prstGeom prst="rect">
             <a:avLst/>
           </a:prstGeom>
           <a:solidFill>
-            <a:srgbClr val="0284C7"/>
+            <a:srgbClr val="FFFFFF"/>
           </a:solidFill>
-          <a:ln/>
+          <a:ln w="9525">
+            <a:solidFill>
+              <a:srgbClr val="E2E8F0"/>
+            </a:solidFill>
+            <a:prstDash val="solid"/>
+          </a:ln>
           <a:effectLst>
             <a:outerShdw sx="100000" sy="100000" kx="0" ky="0" algn="bl" rotWithShape="0" blurRad="76200" dist="25400" dir="8100000">
               <a:srgbClr val="94A3B8">
@@ -2248,14 +2342,34 @@
       </p:sp>
       <p:sp>
         <p:nvSpPr>
-          <p:cNvPr id="6" name="Text 4"/>
-          <p:cNvSpPr/>
-          <p:nvPr/>
-        </p:nvSpPr>
-        <p:spPr>
-          <a:xfrm>
-            <a:off x="530352" y="1298448"/>
-            <a:ext cx="859536" cy="292608"/>
+          <p:cNvPr id="6" name="Shape 4"/>
+          <p:cNvSpPr/>
+          <p:nvPr/>
+        </p:nvSpPr>
+        <p:spPr>
+          <a:xfrm>
+            <a:off x="137160" y="777240"/>
+            <a:ext cx="4389120" cy="274320"/>
+          </a:xfrm>
+          <a:prstGeom prst="rect">
+            <a:avLst/>
+          </a:prstGeom>
+          <a:solidFill>
+            <a:srgbClr val="0284C7"/>
+          </a:solidFill>
+          <a:ln/>
+        </p:spPr>
+      </p:sp>
+      <p:sp>
+        <p:nvSpPr>
+          <p:cNvPr id="7" name="Text 5"/>
+          <p:cNvSpPr/>
+          <p:nvPr/>
+        </p:nvSpPr>
+        <p:spPr>
+          <a:xfrm>
+            <a:off x="137160" y="777240"/>
+            <a:ext cx="4389120" cy="274320"/>
           </a:xfrm>
           <a:prstGeom prst="rect">
             <a:avLst/>
@@ -2271,30 +2385,57 @@
               <a:buNone/>
             </a:pPr>
             <a:r>
-              <a:rPr lang="en-US" sz="1000" b="1" dirty="0">
+              <a:rPr lang="en-US" sz="1100" b="1" dirty="0">
                 <a:solidFill>
                   <a:srgbClr val="FFFFFF"/>
                 </a:solidFill>
-                <a:latin typeface="Calibri" pitchFamily="34" charset="0"/>
-                <a:ea typeface="Calibri" pitchFamily="34" charset="-122"/>
-                <a:cs typeface="Calibri" pitchFamily="34" charset="-120"/>
-              </a:rPr>
-              <a:t>Setup</a:t>
-            </a:r>
-            <a:endParaRPr lang="en-US" sz="1000" dirty="0"/>
-          </a:p>
-        </p:txBody>
-      </p:sp>
-      <p:sp>
-        <p:nvSpPr>
-          <p:cNvPr id="7" name="Text 5"/>
-          <p:cNvSpPr/>
-          <p:nvPr/>
-        </p:nvSpPr>
-        <p:spPr>
-          <a:xfrm>
-            <a:off x="530352" y="1591056"/>
-            <a:ext cx="859536" cy="228600"/>
+                <a:latin typeface="Trebuchet MS" pitchFamily="34" charset="0"/>
+                <a:ea typeface="Trebuchet MS" pitchFamily="34" charset="-122"/>
+                <a:cs typeface="Trebuchet MS" pitchFamily="34" charset="-120"/>
+              </a:rPr>
+              <a:t>Option 1: Codex Harness</a:t>
+            </a:r>
+            <a:endParaRPr lang="en-US" sz="1100" dirty="0"/>
+          </a:p>
+        </p:txBody>
+      </p:sp>
+      <p:sp>
+        <p:nvSpPr>
+          <p:cNvPr id="8" name="Shape 6"/>
+          <p:cNvSpPr/>
+          <p:nvPr/>
+        </p:nvSpPr>
+        <p:spPr>
+          <a:xfrm>
+            <a:off x="274320" y="1188720"/>
+            <a:ext cx="1371600" cy="411480"/>
+          </a:xfrm>
+          <a:prstGeom prst="rect">
+            <a:avLst/>
+          </a:prstGeom>
+          <a:solidFill>
+            <a:srgbClr val="0C4A6E"/>
+          </a:solidFill>
+          <a:ln/>
+          <a:effectLst>
+            <a:outerShdw sx="100000" sy="100000" kx="0" ky="0" algn="bl" rotWithShape="0" blurRad="38100" dist="12700" dir="8100000">
+              <a:srgbClr val="94A3B8">
+                <a:alpha val="25000"/>
+              </a:srgbClr>
+            </a:outerShdw>
+          </a:effectLst>
+        </p:spPr>
+      </p:sp>
+      <p:sp>
+        <p:nvSpPr>
+          <p:cNvPr id="9" name="Text 7"/>
+          <p:cNvSpPr/>
+          <p:nvPr/>
+        </p:nvSpPr>
+        <p:spPr>
+          <a:xfrm>
+            <a:off x="274320" y="1188720"/>
+            <a:ext cx="1371600" cy="411480"/>
           </a:xfrm>
           <a:prstGeom prst="rect">
             <a:avLst/>
@@ -2307,33 +2448,553 @@
           <a:lstStyle/>
           <a:p>
             <a:pPr algn="ctr" indent="0" marL="0">
-              <a:buNone/>
-            </a:pPr>
-            <a:r>
-              <a:rPr lang="en-US" sz="900" dirty="0">
-                <a:solidFill>
-                  <a:srgbClr val="F8FAFC"/>
-                </a:solidFill>
-                <a:latin typeface="Calibri" pitchFamily="34" charset="0"/>
-                <a:ea typeface="Calibri" pitchFamily="34" charset="-122"/>
-                <a:cs typeface="Calibri" pitchFamily="34" charset="-120"/>
-              </a:rPr>
-              <a:t>W1</a:t>
-            </a:r>
-            <a:endParaRPr lang="en-US" sz="900" dirty="0"/>
-          </a:p>
-        </p:txBody>
-      </p:sp>
-      <p:sp>
-        <p:nvSpPr>
-          <p:cNvPr id="8" name="Shape 6"/>
-          <p:cNvSpPr/>
-          <p:nvPr/>
-        </p:nvSpPr>
-        <p:spPr>
-          <a:xfrm>
-            <a:off x="1600200" y="1280160"/>
-            <a:ext cx="1188720" cy="594360"/>
+              <a:lnSpc>
+                <a:spcPct val="115000"/>
+              </a:lnSpc>
+              <a:buNone/>
+            </a:pPr>
+            <a:r>
+              <a:rPr lang="en-US" sz="800" b="1" dirty="0">
+                <a:solidFill>
+                  <a:srgbClr val="FFFFFF"/>
+                </a:solidFill>
+                <a:latin typeface="Calibri" pitchFamily="34" charset="0"/>
+                <a:ea typeface="Calibri" pitchFamily="34" charset="-122"/>
+                <a:cs typeface="Calibri" pitchFamily="34" charset="-120"/>
+              </a:rPr>
+              <a:t>Azure DevOps</a:t>
+            </a:r>
+            <a:endParaRPr lang="en-US" sz="800" dirty="0"/>
+          </a:p>
+          <a:p>
+            <a:pPr algn="ctr" indent="0" marL="0">
+              <a:lnSpc>
+                <a:spcPct val="115000"/>
+              </a:lnSpc>
+              <a:buNone/>
+            </a:pPr>
+            <a:r>
+              <a:rPr lang="en-US" sz="800" b="1" dirty="0">
+                <a:solidFill>
+                  <a:srgbClr val="FFFFFF"/>
+                </a:solidFill>
+                <a:latin typeface="Calibri" pitchFamily="34" charset="0"/>
+                <a:ea typeface="Calibri" pitchFamily="34" charset="-122"/>
+                <a:cs typeface="Calibri" pitchFamily="34" charset="-120"/>
+              </a:rPr>
+              <a:t>Work Items + Repos</a:t>
+            </a:r>
+            <a:endParaRPr lang="en-US" sz="800" dirty="0"/>
+          </a:p>
+        </p:txBody>
+      </p:sp>
+      <p:sp>
+        <p:nvSpPr>
+          <p:cNvPr id="10" name="Shape 8"/>
+          <p:cNvSpPr/>
+          <p:nvPr/>
+        </p:nvSpPr>
+        <p:spPr>
+          <a:xfrm>
+            <a:off x="1645920" y="1389888"/>
+            <a:ext cx="320040" cy="0"/>
+          </a:xfrm>
+          <a:prstGeom prst="line">
+            <a:avLst/>
+          </a:prstGeom>
+          <a:noFill/>
+          <a:ln w="15875">
+            <a:solidFill>
+              <a:srgbClr val="0284C7"/>
+            </a:solidFill>
+            <a:prstDash val="solid"/>
+            <a:tailEnd type="triangle"/>
+          </a:ln>
+        </p:spPr>
+      </p:sp>
+      <p:sp>
+        <p:nvSpPr>
+          <p:cNvPr id="11" name="Text 9"/>
+          <p:cNvSpPr/>
+          <p:nvPr/>
+        </p:nvSpPr>
+        <p:spPr>
+          <a:xfrm>
+            <a:off x="1485900" y="1261872"/>
+            <a:ext cx="640080" cy="128016"/>
+          </a:xfrm>
+          <a:prstGeom prst="rect">
+            <a:avLst/>
+          </a:prstGeom>
+          <a:noFill/>
+          <a:ln/>
+        </p:spPr>
+        <p:txBody>
+          <a:bodyPr wrap="square" lIns="0" tIns="0" rIns="0" bIns="0" rtlCol="0" anchor="ctr"/>
+          <a:lstStyle/>
+          <a:p>
+            <a:pPr algn="ctr" indent="0" marL="0">
+              <a:buNone/>
+            </a:pPr>
+            <a:r>
+              <a:rPr lang="en-US" sz="600" dirty="0">
+                <a:solidFill>
+                  <a:srgbClr val="64748B"/>
+                </a:solidFill>
+                <a:latin typeface="Calibri" pitchFamily="34" charset="0"/>
+                <a:ea typeface="Calibri" pitchFamily="34" charset="-122"/>
+                <a:cs typeface="Calibri" pitchFamily="34" charset="-120"/>
+              </a:rPr>
+              <a:t>webhook</a:t>
+            </a:r>
+            <a:endParaRPr lang="en-US" sz="600" dirty="0"/>
+          </a:p>
+        </p:txBody>
+      </p:sp>
+      <p:sp>
+        <p:nvSpPr>
+          <p:cNvPr id="12" name="Shape 10"/>
+          <p:cNvSpPr/>
+          <p:nvPr/>
+        </p:nvSpPr>
+        <p:spPr>
+          <a:xfrm>
+            <a:off x="1965960" y="1188720"/>
+            <a:ext cx="1234440" cy="411480"/>
+          </a:xfrm>
+          <a:prstGeom prst="rect">
+            <a:avLst/>
+          </a:prstGeom>
+          <a:solidFill>
+            <a:srgbClr val="0284C7"/>
+          </a:solidFill>
+          <a:ln/>
+          <a:effectLst>
+            <a:outerShdw sx="100000" sy="100000" kx="0" ky="0" algn="bl" rotWithShape="0" blurRad="38100" dist="12700" dir="8100000">
+              <a:srgbClr val="94A3B8">
+                <a:alpha val="25000"/>
+              </a:srgbClr>
+            </a:outerShdw>
+          </a:effectLst>
+        </p:spPr>
+      </p:sp>
+      <p:sp>
+        <p:nvSpPr>
+          <p:cNvPr id="13" name="Text 11"/>
+          <p:cNvSpPr/>
+          <p:nvPr/>
+        </p:nvSpPr>
+        <p:spPr>
+          <a:xfrm>
+            <a:off x="1965960" y="1188720"/>
+            <a:ext cx="1234440" cy="411480"/>
+          </a:xfrm>
+          <a:prstGeom prst="rect">
+            <a:avLst/>
+          </a:prstGeom>
+          <a:noFill/>
+          <a:ln/>
+        </p:spPr>
+        <p:txBody>
+          <a:bodyPr wrap="square" lIns="0" tIns="0" rIns="0" bIns="0" rtlCol="0" anchor="ctr"/>
+          <a:lstStyle/>
+          <a:p>
+            <a:pPr algn="ctr" indent="0" marL="0">
+              <a:lnSpc>
+                <a:spcPct val="115000"/>
+              </a:lnSpc>
+              <a:buNone/>
+            </a:pPr>
+            <a:r>
+              <a:rPr lang="en-US" sz="800" b="1" dirty="0">
+                <a:solidFill>
+                  <a:srgbClr val="FFFFFF"/>
+                </a:solidFill>
+                <a:latin typeface="Calibri" pitchFamily="34" charset="0"/>
+                <a:ea typeface="Calibri" pitchFamily="34" charset="-122"/>
+                <a:cs typeface="Calibri" pitchFamily="34" charset="-120"/>
+              </a:rPr>
+              <a:t>Azure Function</a:t>
+            </a:r>
+            <a:endParaRPr lang="en-US" sz="800" dirty="0"/>
+          </a:p>
+          <a:p>
+            <a:pPr algn="ctr" indent="0" marL="0">
+              <a:lnSpc>
+                <a:spcPct val="115000"/>
+              </a:lnSpc>
+              <a:buNone/>
+            </a:pPr>
+            <a:r>
+              <a:rPr lang="en-US" sz="800" b="1" dirty="0">
+                <a:solidFill>
+                  <a:srgbClr val="FFFFFF"/>
+                </a:solidFill>
+                <a:latin typeface="Calibri" pitchFamily="34" charset="0"/>
+                <a:ea typeface="Calibri" pitchFamily="34" charset="-122"/>
+                <a:cs typeface="Calibri" pitchFamily="34" charset="-120"/>
+              </a:rPr>
+              <a:t>Webhook Trigger</a:t>
+            </a:r>
+            <a:endParaRPr lang="en-US" sz="800" dirty="0"/>
+          </a:p>
+        </p:txBody>
+      </p:sp>
+      <p:sp>
+        <p:nvSpPr>
+          <p:cNvPr id="14" name="Shape 12"/>
+          <p:cNvSpPr/>
+          <p:nvPr/>
+        </p:nvSpPr>
+        <p:spPr>
+          <a:xfrm>
+            <a:off x="2578608" y="1600200"/>
+            <a:ext cx="0" cy="228600"/>
+          </a:xfrm>
+          <a:prstGeom prst="line">
+            <a:avLst/>
+          </a:prstGeom>
+          <a:noFill/>
+          <a:ln w="15875">
+            <a:solidFill>
+              <a:srgbClr val="0284C7"/>
+            </a:solidFill>
+            <a:prstDash val="solid"/>
+            <a:tailEnd type="triangle"/>
+          </a:ln>
+        </p:spPr>
+      </p:sp>
+      <p:sp>
+        <p:nvSpPr>
+          <p:cNvPr id="15" name="Shape 13"/>
+          <p:cNvSpPr/>
+          <p:nvPr/>
+        </p:nvSpPr>
+        <p:spPr>
+          <a:xfrm>
+            <a:off x="274320" y="1828800"/>
+            <a:ext cx="4114800" cy="2423160"/>
+          </a:xfrm>
+          <a:prstGeom prst="rect">
+            <a:avLst/>
+          </a:prstGeom>
+          <a:solidFill>
+            <a:srgbClr val="F0F9FF"/>
+          </a:solidFill>
+          <a:ln w="12700">
+            <a:solidFill>
+              <a:srgbClr val="BAE6FD"/>
+            </a:solidFill>
+            <a:prstDash val="dash"/>
+          </a:ln>
+        </p:spPr>
+      </p:sp>
+      <p:sp>
+        <p:nvSpPr>
+          <p:cNvPr id="16" name="Text 14"/>
+          <p:cNvSpPr/>
+          <p:nvPr/>
+        </p:nvSpPr>
+        <p:spPr>
+          <a:xfrm>
+            <a:off x="320040" y="1847088"/>
+            <a:ext cx="1828800" cy="164592"/>
+          </a:xfrm>
+          <a:prstGeom prst="rect">
+            <a:avLst/>
+          </a:prstGeom>
+          <a:noFill/>
+          <a:ln/>
+        </p:spPr>
+        <p:txBody>
+          <a:bodyPr wrap="square" lIns="0" tIns="0" rIns="0" bIns="0" rtlCol="0" anchor="ctr"/>
+          <a:lstStyle/>
+          <a:p>
+            <a:pPr indent="0" marL="0">
+              <a:buNone/>
+            </a:pPr>
+            <a:r>
+              <a:rPr lang="en-US" sz="700" b="1" dirty="0">
+                <a:solidFill>
+                  <a:srgbClr val="0284C7"/>
+                </a:solidFill>
+                <a:latin typeface="Calibri" pitchFamily="34" charset="0"/>
+                <a:ea typeface="Calibri" pitchFamily="34" charset="-122"/>
+                <a:cs typeface="Calibri" pitchFamily="34" charset="-120"/>
+              </a:rPr>
+              <a:t>Azure Container App</a:t>
+            </a:r>
+            <a:endParaRPr lang="en-US" sz="700" dirty="0"/>
+          </a:p>
+        </p:txBody>
+      </p:sp>
+      <p:sp>
+        <p:nvSpPr>
+          <p:cNvPr id="17" name="Shape 15"/>
+          <p:cNvSpPr/>
+          <p:nvPr/>
+        </p:nvSpPr>
+        <p:spPr>
+          <a:xfrm>
+            <a:off x="411480" y="2057400"/>
+            <a:ext cx="1417320" cy="365760"/>
+          </a:xfrm>
+          <a:prstGeom prst="rect">
+            <a:avLst/>
+          </a:prstGeom>
+          <a:solidFill>
+            <a:srgbClr val="E0F2FE"/>
+          </a:solidFill>
+          <a:ln w="9525">
+            <a:solidFill>
+              <a:srgbClr val="BAE6FD"/>
+            </a:solidFill>
+            <a:prstDash val="solid"/>
+          </a:ln>
+        </p:spPr>
+      </p:sp>
+      <p:sp>
+        <p:nvSpPr>
+          <p:cNvPr id="18" name="Text 16"/>
+          <p:cNvSpPr/>
+          <p:nvPr/>
+        </p:nvSpPr>
+        <p:spPr>
+          <a:xfrm>
+            <a:off x="411480" y="2057400"/>
+            <a:ext cx="1417320" cy="365760"/>
+          </a:xfrm>
+          <a:prstGeom prst="rect">
+            <a:avLst/>
+          </a:prstGeom>
+          <a:noFill/>
+          <a:ln/>
+        </p:spPr>
+        <p:txBody>
+          <a:bodyPr wrap="square" lIns="0" tIns="0" rIns="0" bIns="0" rtlCol="0" anchor="ctr"/>
+          <a:lstStyle/>
+          <a:p>
+            <a:pPr algn="ctr" indent="0" marL="0">
+              <a:lnSpc>
+                <a:spcPct val="115000"/>
+              </a:lnSpc>
+              <a:buNone/>
+            </a:pPr>
+            <a:r>
+              <a:rPr lang="en-US" sz="750" b="1" dirty="0">
+                <a:solidFill>
+                  <a:srgbClr val="0284C7"/>
+                </a:solidFill>
+                <a:latin typeface="Calibri" pitchFamily="34" charset="0"/>
+                <a:ea typeface="Calibri" pitchFamily="34" charset="-122"/>
+                <a:cs typeface="Calibri" pitchFamily="34" charset="-120"/>
+              </a:rPr>
+              <a:t>FastAPI Orchestrator</a:t>
+            </a:r>
+            <a:endParaRPr lang="en-US" sz="750" dirty="0"/>
+          </a:p>
+          <a:p>
+            <a:pPr algn="ctr" indent="0" marL="0">
+              <a:lnSpc>
+                <a:spcPct val="115000"/>
+              </a:lnSpc>
+              <a:buNone/>
+            </a:pPr>
+            <a:r>
+              <a:rPr lang="en-US" sz="750" b="1" dirty="0">
+                <a:solidFill>
+                  <a:srgbClr val="0284C7"/>
+                </a:solidFill>
+                <a:latin typeface="Calibri" pitchFamily="34" charset="0"/>
+                <a:ea typeface="Calibri" pitchFamily="34" charset="-122"/>
+                <a:cs typeface="Calibri" pitchFamily="34" charset="-120"/>
+              </a:rPr>
+              <a:t>api.py (380 lines)</a:t>
+            </a:r>
+            <a:endParaRPr lang="en-US" sz="750" dirty="0"/>
+          </a:p>
+        </p:txBody>
+      </p:sp>
+      <p:sp>
+        <p:nvSpPr>
+          <p:cNvPr id="19" name="Shape 17"/>
+          <p:cNvSpPr/>
+          <p:nvPr/>
+        </p:nvSpPr>
+        <p:spPr>
+          <a:xfrm>
+            <a:off x="2011680" y="2057400"/>
+            <a:ext cx="2240280" cy="365760"/>
+          </a:xfrm>
+          <a:prstGeom prst="rect">
+            <a:avLst/>
+          </a:prstGeom>
+          <a:solidFill>
+            <a:srgbClr val="E0F2FE"/>
+          </a:solidFill>
+          <a:ln w="9525">
+            <a:solidFill>
+              <a:srgbClr val="BAE6FD"/>
+            </a:solidFill>
+            <a:prstDash val="solid"/>
+          </a:ln>
+        </p:spPr>
+      </p:sp>
+      <p:sp>
+        <p:nvSpPr>
+          <p:cNvPr id="20" name="Text 18"/>
+          <p:cNvSpPr/>
+          <p:nvPr/>
+        </p:nvSpPr>
+        <p:spPr>
+          <a:xfrm>
+            <a:off x="2011680" y="2057400"/>
+            <a:ext cx="2240280" cy="365760"/>
+          </a:xfrm>
+          <a:prstGeom prst="rect">
+            <a:avLst/>
+          </a:prstGeom>
+          <a:noFill/>
+          <a:ln/>
+        </p:spPr>
+        <p:txBody>
+          <a:bodyPr wrap="square" lIns="0" tIns="0" rIns="0" bIns="0" rtlCol="0" anchor="ctr"/>
+          <a:lstStyle/>
+          <a:p>
+            <a:pPr algn="ctr" indent="0" marL="0">
+              <a:lnSpc>
+                <a:spcPct val="115000"/>
+              </a:lnSpc>
+              <a:buNone/>
+            </a:pPr>
+            <a:r>
+              <a:rPr lang="en-US" sz="750" b="1" dirty="0">
+                <a:solidFill>
+                  <a:srgbClr val="0284C7"/>
+                </a:solidFill>
+                <a:latin typeface="Calibri" pitchFamily="34" charset="0"/>
+                <a:ea typeface="Calibri" pitchFamily="34" charset="-122"/>
+                <a:cs typeface="Calibri" pitchFamily="34" charset="-120"/>
+              </a:rPr>
+              <a:t>Codex CLI (subprocess)</a:t>
+            </a:r>
+            <a:endParaRPr lang="en-US" sz="750" dirty="0"/>
+          </a:p>
+          <a:p>
+            <a:pPr algn="ctr" indent="0" marL="0">
+              <a:lnSpc>
+                <a:spcPct val="115000"/>
+              </a:lnSpc>
+              <a:buNone/>
+            </a:pPr>
+            <a:r>
+              <a:rPr lang="en-US" sz="750" b="1" dirty="0">
+                <a:solidFill>
+                  <a:srgbClr val="0284C7"/>
+                </a:solidFill>
+                <a:latin typeface="Calibri" pitchFamily="34" charset="0"/>
+                <a:ea typeface="Calibri" pitchFamily="34" charset="-122"/>
+                <a:cs typeface="Calibri" pitchFamily="34" charset="-120"/>
+              </a:rPr>
+              <a:t>codex --full-auto --model o4-mini</a:t>
+            </a:r>
+            <a:endParaRPr lang="en-US" sz="750" dirty="0"/>
+          </a:p>
+        </p:txBody>
+      </p:sp>
+      <p:sp>
+        <p:nvSpPr>
+          <p:cNvPr id="21" name="Shape 19"/>
+          <p:cNvSpPr/>
+          <p:nvPr/>
+        </p:nvSpPr>
+        <p:spPr>
+          <a:xfrm>
+            <a:off x="1828800" y="2240280"/>
+            <a:ext cx="182880" cy="0"/>
+          </a:xfrm>
+          <a:prstGeom prst="line">
+            <a:avLst/>
+          </a:prstGeom>
+          <a:noFill/>
+          <a:ln w="15875">
+            <a:solidFill>
+              <a:srgbClr val="0284C7"/>
+            </a:solidFill>
+            <a:prstDash val="solid"/>
+            <a:tailEnd type="triangle"/>
+          </a:ln>
+        </p:spPr>
+      </p:sp>
+      <p:sp>
+        <p:nvSpPr>
+          <p:cNvPr id="22" name="Shape 20"/>
+          <p:cNvSpPr/>
+          <p:nvPr/>
+        </p:nvSpPr>
+        <p:spPr>
+          <a:xfrm>
+            <a:off x="411480" y="2578608"/>
+            <a:ext cx="3840480" cy="201168"/>
+          </a:xfrm>
+          <a:prstGeom prst="rect">
+            <a:avLst/>
+          </a:prstGeom>
+          <a:solidFill>
+            <a:srgbClr val="0284C7"/>
+          </a:solidFill>
+          <a:ln/>
+        </p:spPr>
+      </p:sp>
+      <p:sp>
+        <p:nvSpPr>
+          <p:cNvPr id="23" name="Text 21"/>
+          <p:cNvSpPr/>
+          <p:nvPr/>
+        </p:nvSpPr>
+        <p:spPr>
+          <a:xfrm>
+            <a:off x="411480" y="2578608"/>
+            <a:ext cx="3840480" cy="201168"/>
+          </a:xfrm>
+          <a:prstGeom prst="rect">
+            <a:avLst/>
+          </a:prstGeom>
+          <a:noFill/>
+          <a:ln/>
+        </p:spPr>
+        <p:txBody>
+          <a:bodyPr wrap="square" lIns="0" tIns="0" rIns="0" bIns="0" rtlCol="0" anchor="ctr"/>
+          <a:lstStyle/>
+          <a:p>
+            <a:pPr algn="ctr" indent="0" marL="0">
+              <a:buNone/>
+            </a:pPr>
+            <a:r>
+              <a:rPr lang="en-US" sz="700" b="1" dirty="0">
+                <a:solidFill>
+                  <a:srgbClr val="FFFFFF"/>
+                </a:solidFill>
+                <a:latin typeface="Calibri" pitchFamily="34" charset="0"/>
+                <a:ea typeface="Calibri" pitchFamily="34" charset="-122"/>
+                <a:cs typeface="Calibri" pitchFamily="34" charset="-120"/>
+              </a:rPr>
+              <a:t>Codex Sandbox Runtime — agents run INSIDE Codex, not in your container</a:t>
+            </a:r>
+            <a:endParaRPr lang="en-US" sz="700" dirty="0"/>
+          </a:p>
+        </p:txBody>
+      </p:sp>
+      <p:sp>
+        <p:nvSpPr>
+          <p:cNvPr id="24" name="Shape 22"/>
+          <p:cNvSpPr/>
+          <p:nvPr/>
+        </p:nvSpPr>
+        <p:spPr>
+          <a:xfrm>
+            <a:off x="411480" y="2852928"/>
+            <a:ext cx="886968" cy="502920"/>
           </a:xfrm>
           <a:prstGeom prst="rect">
             <a:avLst/>
@@ -2342,6 +3003,799 @@
             <a:srgbClr val="7C3AED"/>
           </a:solidFill>
           <a:ln/>
+          <a:effectLst>
+            <a:outerShdw sx="100000" sy="100000" kx="0" ky="0" algn="bl" rotWithShape="0" blurRad="38100" dist="12700" dir="8100000">
+              <a:srgbClr val="94A3B8">
+                <a:alpha val="25000"/>
+              </a:srgbClr>
+            </a:outerShdw>
+          </a:effectLst>
+        </p:spPr>
+      </p:sp>
+      <p:sp>
+        <p:nvSpPr>
+          <p:cNvPr id="25" name="Text 23"/>
+          <p:cNvSpPr/>
+          <p:nvPr/>
+        </p:nvSpPr>
+        <p:spPr>
+          <a:xfrm>
+            <a:off x="411480" y="2852928"/>
+            <a:ext cx="886968" cy="502920"/>
+          </a:xfrm>
+          <a:prstGeom prst="rect">
+            <a:avLst/>
+          </a:prstGeom>
+          <a:noFill/>
+          <a:ln/>
+        </p:spPr>
+        <p:txBody>
+          <a:bodyPr wrap="square" lIns="0" tIns="0" rIns="0" bIns="0" rtlCol="0" anchor="ctr"/>
+          <a:lstStyle/>
+          <a:p>
+            <a:pPr algn="ctr" indent="0" marL="0">
+              <a:lnSpc>
+                <a:spcPct val="115000"/>
+              </a:lnSpc>
+              <a:buNone/>
+            </a:pPr>
+            <a:r>
+              <a:rPr lang="en-US" sz="800" b="1" dirty="0">
+                <a:solidFill>
+                  <a:srgbClr val="FFFFFF"/>
+                </a:solidFill>
+                <a:latin typeface="Calibri" pitchFamily="34" charset="0"/>
+                <a:ea typeface="Calibri" pitchFamily="34" charset="-122"/>
+                <a:cs typeface="Calibri" pitchFamily="34" charset="-120"/>
+              </a:rPr>
+              <a:t>Analyzer</a:t>
+            </a:r>
+            <a:endParaRPr lang="en-US" sz="800" dirty="0"/>
+          </a:p>
+          <a:p>
+            <a:pPr algn="ctr" indent="0" marL="0">
+              <a:lnSpc>
+                <a:spcPct val="115000"/>
+              </a:lnSpc>
+              <a:buNone/>
+            </a:pPr>
+            <a:r>
+              <a:rPr lang="en-US" sz="800" b="1" dirty="0">
+                <a:solidFill>
+                  <a:srgbClr val="FFFFFF"/>
+                </a:solidFill>
+                <a:latin typeface="Calibri" pitchFamily="34" charset="0"/>
+                <a:ea typeface="Calibri" pitchFamily="34" charset="-122"/>
+                <a:cs typeface="Calibri" pitchFamily="34" charset="-120"/>
+              </a:rPr>
+              <a:t>(read-only)</a:t>
+            </a:r>
+            <a:endParaRPr lang="en-US" sz="800" dirty="0"/>
+          </a:p>
+        </p:txBody>
+      </p:sp>
+      <p:sp>
+        <p:nvSpPr>
+          <p:cNvPr id="26" name="Shape 24"/>
+          <p:cNvSpPr/>
+          <p:nvPr/>
+        </p:nvSpPr>
+        <p:spPr>
+          <a:xfrm>
+            <a:off x="1389888" y="2852928"/>
+            <a:ext cx="886968" cy="502920"/>
+          </a:xfrm>
+          <a:prstGeom prst="rect">
+            <a:avLst/>
+          </a:prstGeom>
+          <a:solidFill>
+            <a:srgbClr val="0284C7"/>
+          </a:solidFill>
+          <a:ln/>
+          <a:effectLst>
+            <a:outerShdw sx="100000" sy="100000" kx="0" ky="0" algn="bl" rotWithShape="0" blurRad="38100" dist="12700" dir="8100000">
+              <a:srgbClr val="94A3B8">
+                <a:alpha val="25000"/>
+              </a:srgbClr>
+            </a:outerShdw>
+          </a:effectLst>
+        </p:spPr>
+      </p:sp>
+      <p:sp>
+        <p:nvSpPr>
+          <p:cNvPr id="27" name="Text 25"/>
+          <p:cNvSpPr/>
+          <p:nvPr/>
+        </p:nvSpPr>
+        <p:spPr>
+          <a:xfrm>
+            <a:off x="1389888" y="2852928"/>
+            <a:ext cx="886968" cy="502920"/>
+          </a:xfrm>
+          <a:prstGeom prst="rect">
+            <a:avLst/>
+          </a:prstGeom>
+          <a:noFill/>
+          <a:ln/>
+        </p:spPr>
+        <p:txBody>
+          <a:bodyPr wrap="square" lIns="0" tIns="0" rIns="0" bIns="0" rtlCol="0" anchor="ctr"/>
+          <a:lstStyle/>
+          <a:p>
+            <a:pPr algn="ctr" indent="0" marL="0">
+              <a:lnSpc>
+                <a:spcPct val="115000"/>
+              </a:lnSpc>
+              <a:buNone/>
+            </a:pPr>
+            <a:r>
+              <a:rPr lang="en-US" sz="800" b="1" dirty="0">
+                <a:solidFill>
+                  <a:srgbClr val="FFFFFF"/>
+                </a:solidFill>
+                <a:latin typeface="Calibri" pitchFamily="34" charset="0"/>
+                <a:ea typeface="Calibri" pitchFamily="34" charset="-122"/>
+                <a:cs typeface="Calibri" pitchFamily="34" charset="-120"/>
+              </a:rPr>
+              <a:t>Coder</a:t>
+            </a:r>
+            <a:endParaRPr lang="en-US" sz="800" dirty="0"/>
+          </a:p>
+          <a:p>
+            <a:pPr algn="ctr" indent="0" marL="0">
+              <a:lnSpc>
+                <a:spcPct val="115000"/>
+              </a:lnSpc>
+              <a:buNone/>
+            </a:pPr>
+            <a:r>
+              <a:rPr lang="en-US" sz="800" b="1" dirty="0">
+                <a:solidFill>
+                  <a:srgbClr val="FFFFFF"/>
+                </a:solidFill>
+                <a:latin typeface="Calibri" pitchFamily="34" charset="0"/>
+                <a:ea typeface="Calibri" pitchFamily="34" charset="-122"/>
+                <a:cs typeface="Calibri" pitchFamily="34" charset="-120"/>
+              </a:rPr>
+              <a:t>(write)</a:t>
+            </a:r>
+            <a:endParaRPr lang="en-US" sz="800" dirty="0"/>
+          </a:p>
+        </p:txBody>
+      </p:sp>
+      <p:sp>
+        <p:nvSpPr>
+          <p:cNvPr id="28" name="Shape 26"/>
+          <p:cNvSpPr/>
+          <p:nvPr/>
+        </p:nvSpPr>
+        <p:spPr>
+          <a:xfrm>
+            <a:off x="2368296" y="2852928"/>
+            <a:ext cx="886968" cy="502920"/>
+          </a:xfrm>
+          <a:prstGeom prst="rect">
+            <a:avLst/>
+          </a:prstGeom>
+          <a:solidFill>
+            <a:srgbClr val="059669"/>
+          </a:solidFill>
+          <a:ln/>
+          <a:effectLst>
+            <a:outerShdw sx="100000" sy="100000" kx="0" ky="0" algn="bl" rotWithShape="0" blurRad="38100" dist="12700" dir="8100000">
+              <a:srgbClr val="94A3B8">
+                <a:alpha val="25000"/>
+              </a:srgbClr>
+            </a:outerShdw>
+          </a:effectLst>
+        </p:spPr>
+      </p:sp>
+      <p:sp>
+        <p:nvSpPr>
+          <p:cNvPr id="29" name="Text 27"/>
+          <p:cNvSpPr/>
+          <p:nvPr/>
+        </p:nvSpPr>
+        <p:spPr>
+          <a:xfrm>
+            <a:off x="2368296" y="2852928"/>
+            <a:ext cx="886968" cy="502920"/>
+          </a:xfrm>
+          <a:prstGeom prst="rect">
+            <a:avLst/>
+          </a:prstGeom>
+          <a:noFill/>
+          <a:ln/>
+        </p:spPr>
+        <p:txBody>
+          <a:bodyPr wrap="square" lIns="0" tIns="0" rIns="0" bIns="0" rtlCol="0" anchor="ctr"/>
+          <a:lstStyle/>
+          <a:p>
+            <a:pPr algn="ctr" indent="0" marL="0">
+              <a:lnSpc>
+                <a:spcPct val="115000"/>
+              </a:lnSpc>
+              <a:buNone/>
+            </a:pPr>
+            <a:r>
+              <a:rPr lang="en-US" sz="800" b="1" dirty="0">
+                <a:solidFill>
+                  <a:srgbClr val="FFFFFF"/>
+                </a:solidFill>
+                <a:latin typeface="Calibri" pitchFamily="34" charset="0"/>
+                <a:ea typeface="Calibri" pitchFamily="34" charset="-122"/>
+                <a:cs typeface="Calibri" pitchFamily="34" charset="-120"/>
+              </a:rPr>
+              <a:t>Tester</a:t>
+            </a:r>
+            <a:endParaRPr lang="en-US" sz="800" dirty="0"/>
+          </a:p>
+          <a:p>
+            <a:pPr algn="ctr" indent="0" marL="0">
+              <a:lnSpc>
+                <a:spcPct val="115000"/>
+              </a:lnSpc>
+              <a:buNone/>
+            </a:pPr>
+            <a:r>
+              <a:rPr lang="en-US" sz="800" b="1" dirty="0">
+                <a:solidFill>
+                  <a:srgbClr val="FFFFFF"/>
+                </a:solidFill>
+                <a:latin typeface="Calibri" pitchFamily="34" charset="0"/>
+                <a:ea typeface="Calibri" pitchFamily="34" charset="-122"/>
+                <a:cs typeface="Calibri" pitchFamily="34" charset="-120"/>
+              </a:rPr>
+              <a:t>(write)</a:t>
+            </a:r>
+            <a:endParaRPr lang="en-US" sz="800" dirty="0"/>
+          </a:p>
+        </p:txBody>
+      </p:sp>
+      <p:sp>
+        <p:nvSpPr>
+          <p:cNvPr id="30" name="Shape 28"/>
+          <p:cNvSpPr/>
+          <p:nvPr/>
+        </p:nvSpPr>
+        <p:spPr>
+          <a:xfrm>
+            <a:off x="3346704" y="2852928"/>
+            <a:ext cx="886968" cy="502920"/>
+          </a:xfrm>
+          <a:prstGeom prst="rect">
+            <a:avLst/>
+          </a:prstGeom>
+          <a:solidFill>
+            <a:srgbClr val="D97706"/>
+          </a:solidFill>
+          <a:ln/>
+          <a:effectLst>
+            <a:outerShdw sx="100000" sy="100000" kx="0" ky="0" algn="bl" rotWithShape="0" blurRad="38100" dist="12700" dir="8100000">
+              <a:srgbClr val="94A3B8">
+                <a:alpha val="25000"/>
+              </a:srgbClr>
+            </a:outerShdw>
+          </a:effectLst>
+        </p:spPr>
+      </p:sp>
+      <p:sp>
+        <p:nvSpPr>
+          <p:cNvPr id="31" name="Text 29"/>
+          <p:cNvSpPr/>
+          <p:nvPr/>
+        </p:nvSpPr>
+        <p:spPr>
+          <a:xfrm>
+            <a:off x="3346704" y="2852928"/>
+            <a:ext cx="886968" cy="502920"/>
+          </a:xfrm>
+          <a:prstGeom prst="rect">
+            <a:avLst/>
+          </a:prstGeom>
+          <a:noFill/>
+          <a:ln/>
+        </p:spPr>
+        <p:txBody>
+          <a:bodyPr wrap="square" lIns="0" tIns="0" rIns="0" bIns="0" rtlCol="0" anchor="ctr"/>
+          <a:lstStyle/>
+          <a:p>
+            <a:pPr algn="ctr" indent="0" marL="0">
+              <a:lnSpc>
+                <a:spcPct val="115000"/>
+              </a:lnSpc>
+              <a:buNone/>
+            </a:pPr>
+            <a:r>
+              <a:rPr lang="en-US" sz="800" b="1" dirty="0">
+                <a:solidFill>
+                  <a:srgbClr val="FFFFFF"/>
+                </a:solidFill>
+                <a:latin typeface="Calibri" pitchFamily="34" charset="0"/>
+                <a:ea typeface="Calibri" pitchFamily="34" charset="-122"/>
+                <a:cs typeface="Calibri" pitchFamily="34" charset="-120"/>
+              </a:rPr>
+              <a:t>Reviewer</a:t>
+            </a:r>
+            <a:endParaRPr lang="en-US" sz="800" dirty="0"/>
+          </a:p>
+          <a:p>
+            <a:pPr algn="ctr" indent="0" marL="0">
+              <a:lnSpc>
+                <a:spcPct val="115000"/>
+              </a:lnSpc>
+              <a:buNone/>
+            </a:pPr>
+            <a:r>
+              <a:rPr lang="en-US" sz="800" b="1" dirty="0">
+                <a:solidFill>
+                  <a:srgbClr val="FFFFFF"/>
+                </a:solidFill>
+                <a:latin typeface="Calibri" pitchFamily="34" charset="0"/>
+                <a:ea typeface="Calibri" pitchFamily="34" charset="-122"/>
+                <a:cs typeface="Calibri" pitchFamily="34" charset="-120"/>
+              </a:rPr>
+              <a:t>(read-only)</a:t>
+            </a:r>
+            <a:endParaRPr lang="en-US" sz="800" dirty="0"/>
+          </a:p>
+        </p:txBody>
+      </p:sp>
+      <p:sp>
+        <p:nvSpPr>
+          <p:cNvPr id="32" name="Shape 30"/>
+          <p:cNvSpPr/>
+          <p:nvPr/>
+        </p:nvSpPr>
+        <p:spPr>
+          <a:xfrm>
+            <a:off x="2240280" y="3355848"/>
+            <a:ext cx="0" cy="210312"/>
+          </a:xfrm>
+          <a:prstGeom prst="line">
+            <a:avLst/>
+          </a:prstGeom>
+          <a:noFill/>
+          <a:ln w="15875">
+            <a:solidFill>
+              <a:srgbClr val="64748B"/>
+            </a:solidFill>
+            <a:prstDash val="solid"/>
+            <a:tailEnd type="triangle"/>
+          </a:ln>
+        </p:spPr>
+      </p:sp>
+      <p:sp>
+        <p:nvSpPr>
+          <p:cNvPr id="33" name="Shape 31"/>
+          <p:cNvSpPr/>
+          <p:nvPr/>
+        </p:nvSpPr>
+        <p:spPr>
+          <a:xfrm>
+            <a:off x="685800" y="3566160"/>
+            <a:ext cx="3108960" cy="274320"/>
+          </a:xfrm>
+          <a:prstGeom prst="rect">
+            <a:avLst/>
+          </a:prstGeom>
+          <a:solidFill>
+            <a:srgbClr val="F1F5F9"/>
+          </a:solidFill>
+          <a:ln w="9525">
+            <a:solidFill>
+              <a:srgbClr val="CBD5E1"/>
+            </a:solidFill>
+            <a:prstDash val="solid"/>
+          </a:ln>
+        </p:spPr>
+      </p:sp>
+      <p:sp>
+        <p:nvSpPr>
+          <p:cNvPr id="34" name="Text 32"/>
+          <p:cNvSpPr/>
+          <p:nvPr/>
+        </p:nvSpPr>
+        <p:spPr>
+          <a:xfrm>
+            <a:off x="685800" y="3566160"/>
+            <a:ext cx="3108960" cy="274320"/>
+          </a:xfrm>
+          <a:prstGeom prst="rect">
+            <a:avLst/>
+          </a:prstGeom>
+          <a:noFill/>
+          <a:ln/>
+        </p:spPr>
+        <p:txBody>
+          <a:bodyPr wrap="square" lIns="0" tIns="0" rIns="0" bIns="0" rtlCol="0" anchor="ctr"/>
+          <a:lstStyle/>
+          <a:p>
+            <a:pPr algn="ctr" indent="0" marL="0">
+              <a:lnSpc>
+                <a:spcPct val="115000"/>
+              </a:lnSpc>
+              <a:buNone/>
+            </a:pPr>
+            <a:r>
+              <a:rPr lang="en-US" sz="750" dirty="0">
+                <a:solidFill>
+                  <a:srgbClr val="334155"/>
+                </a:solidFill>
+                <a:latin typeface="Calibri" pitchFamily="34" charset="0"/>
+                <a:ea typeface="Calibri" pitchFamily="34" charset="-122"/>
+                <a:cs typeface="Calibri" pitchFamily="34" charset="-120"/>
+              </a:rPr>
+              <a:t>git clone via ADO PAT  —  repo access inside Codex sandbox</a:t>
+            </a:r>
+            <a:endParaRPr lang="en-US" sz="750" dirty="0"/>
+          </a:p>
+        </p:txBody>
+      </p:sp>
+      <p:sp>
+        <p:nvSpPr>
+          <p:cNvPr id="35" name="Shape 33"/>
+          <p:cNvSpPr/>
+          <p:nvPr/>
+        </p:nvSpPr>
+        <p:spPr>
+          <a:xfrm>
+            <a:off x="411480" y="3950208"/>
+            <a:ext cx="1234440" cy="274320"/>
+          </a:xfrm>
+          <a:prstGeom prst="rect">
+            <a:avLst/>
+          </a:prstGeom>
+          <a:solidFill>
+            <a:srgbClr val="ECFDF5"/>
+          </a:solidFill>
+          <a:ln w="9525">
+            <a:solidFill>
+              <a:srgbClr val="A7F3D0"/>
+            </a:solidFill>
+            <a:prstDash val="solid"/>
+          </a:ln>
+        </p:spPr>
+      </p:sp>
+      <p:sp>
+        <p:nvSpPr>
+          <p:cNvPr id="36" name="Text 34"/>
+          <p:cNvSpPr/>
+          <p:nvPr/>
+        </p:nvSpPr>
+        <p:spPr>
+          <a:xfrm>
+            <a:off x="411480" y="3950208"/>
+            <a:ext cx="1234440" cy="274320"/>
+          </a:xfrm>
+          <a:prstGeom prst="rect">
+            <a:avLst/>
+          </a:prstGeom>
+          <a:noFill/>
+          <a:ln/>
+        </p:spPr>
+        <p:txBody>
+          <a:bodyPr wrap="square" lIns="0" tIns="0" rIns="0" bIns="0" rtlCol="0" anchor="ctr"/>
+          <a:lstStyle/>
+          <a:p>
+            <a:pPr algn="ctr" indent="0" marL="0">
+              <a:lnSpc>
+                <a:spcPct val="115000"/>
+              </a:lnSpc>
+              <a:buNone/>
+            </a:pPr>
+            <a:r>
+              <a:rPr lang="en-US" sz="750" dirty="0">
+                <a:solidFill>
+                  <a:srgbClr val="059669"/>
+                </a:solidFill>
+                <a:latin typeface="Calibri" pitchFamily="34" charset="0"/>
+                <a:ea typeface="Calibri" pitchFamily="34" charset="-122"/>
+                <a:cs typeface="Calibri" pitchFamily="34" charset="-120"/>
+              </a:rPr>
+              <a:t>Azure Blob Storage</a:t>
+            </a:r>
+            <a:endParaRPr lang="en-US" sz="750" dirty="0"/>
+          </a:p>
+          <a:p>
+            <a:pPr algn="ctr" indent="0" marL="0">
+              <a:lnSpc>
+                <a:spcPct val="115000"/>
+              </a:lnSpc>
+              <a:buNone/>
+            </a:pPr>
+            <a:r>
+              <a:rPr lang="en-US" sz="750" dirty="0">
+                <a:solidFill>
+                  <a:srgbClr val="059669"/>
+                </a:solidFill>
+                <a:latin typeface="Calibri" pitchFamily="34" charset="0"/>
+                <a:ea typeface="Calibri" pitchFamily="34" charset="-122"/>
+                <a:cs typeface="Calibri" pitchFamily="34" charset="-120"/>
+              </a:rPr>
+              <a:t>(state only)</a:t>
+            </a:r>
+            <a:endParaRPr lang="en-US" sz="750" dirty="0"/>
+          </a:p>
+        </p:txBody>
+      </p:sp>
+      <p:sp>
+        <p:nvSpPr>
+          <p:cNvPr id="37" name="Shape 35"/>
+          <p:cNvSpPr/>
+          <p:nvPr/>
+        </p:nvSpPr>
+        <p:spPr>
+          <a:xfrm>
+            <a:off x="1783080" y="3950208"/>
+            <a:ext cx="1508760" cy="274320"/>
+          </a:xfrm>
+          <a:prstGeom prst="rect">
+            <a:avLst/>
+          </a:prstGeom>
+          <a:solidFill>
+            <a:srgbClr val="0C4A6E"/>
+          </a:solidFill>
+          <a:ln/>
+          <a:effectLst>
+            <a:outerShdw sx="100000" sy="100000" kx="0" ky="0" algn="bl" rotWithShape="0" blurRad="38100" dist="12700" dir="8100000">
+              <a:srgbClr val="94A3B8">
+                <a:alpha val="25000"/>
+              </a:srgbClr>
+            </a:outerShdw>
+          </a:effectLst>
+        </p:spPr>
+      </p:sp>
+      <p:sp>
+        <p:nvSpPr>
+          <p:cNvPr id="38" name="Text 36"/>
+          <p:cNvSpPr/>
+          <p:nvPr/>
+        </p:nvSpPr>
+        <p:spPr>
+          <a:xfrm>
+            <a:off x="1783080" y="3950208"/>
+            <a:ext cx="1508760" cy="274320"/>
+          </a:xfrm>
+          <a:prstGeom prst="rect">
+            <a:avLst/>
+          </a:prstGeom>
+          <a:noFill/>
+          <a:ln/>
+        </p:spPr>
+        <p:txBody>
+          <a:bodyPr wrap="square" lIns="0" tIns="0" rIns="0" bIns="0" rtlCol="0" anchor="ctr"/>
+          <a:lstStyle/>
+          <a:p>
+            <a:pPr algn="ctr" indent="0" marL="0">
+              <a:lnSpc>
+                <a:spcPct val="115000"/>
+              </a:lnSpc>
+              <a:buNone/>
+            </a:pPr>
+            <a:r>
+              <a:rPr lang="en-US" sz="800" b="1" dirty="0">
+                <a:solidFill>
+                  <a:srgbClr val="FFFFFF"/>
+                </a:solidFill>
+                <a:latin typeface="Calibri" pitchFamily="34" charset="0"/>
+                <a:ea typeface="Calibri" pitchFamily="34" charset="-122"/>
+                <a:cs typeface="Calibri" pitchFamily="34" charset="-120"/>
+              </a:rPr>
+              <a:t>Azure OpenAI</a:t>
+            </a:r>
+            <a:endParaRPr lang="en-US" sz="800" dirty="0"/>
+          </a:p>
+          <a:p>
+            <a:pPr algn="ctr" indent="0" marL="0">
+              <a:lnSpc>
+                <a:spcPct val="115000"/>
+              </a:lnSpc>
+              <a:buNone/>
+            </a:pPr>
+            <a:r>
+              <a:rPr lang="en-US" sz="800" b="1" dirty="0">
+                <a:solidFill>
+                  <a:srgbClr val="FFFFFF"/>
+                </a:solidFill>
+                <a:latin typeface="Calibri" pitchFamily="34" charset="0"/>
+                <a:ea typeface="Calibri" pitchFamily="34" charset="-122"/>
+                <a:cs typeface="Calibri" pitchFamily="34" charset="-120"/>
+              </a:rPr>
+              <a:t>(o4-mini, codex-mini)</a:t>
+            </a:r>
+            <a:endParaRPr lang="en-US" sz="800" dirty="0"/>
+          </a:p>
+        </p:txBody>
+      </p:sp>
+      <p:sp>
+        <p:nvSpPr>
+          <p:cNvPr id="39" name="Shape 37"/>
+          <p:cNvSpPr/>
+          <p:nvPr/>
+        </p:nvSpPr>
+        <p:spPr>
+          <a:xfrm>
+            <a:off x="3429000" y="3950208"/>
+            <a:ext cx="868680" cy="274320"/>
+          </a:xfrm>
+          <a:prstGeom prst="rect">
+            <a:avLst/>
+          </a:prstGeom>
+          <a:solidFill>
+            <a:srgbClr val="F1F5F9"/>
+          </a:solidFill>
+          <a:ln w="9525">
+            <a:solidFill>
+              <a:srgbClr val="CBD5E1"/>
+            </a:solidFill>
+            <a:prstDash val="solid"/>
+          </a:ln>
+        </p:spPr>
+      </p:sp>
+      <p:sp>
+        <p:nvSpPr>
+          <p:cNvPr id="40" name="Text 38"/>
+          <p:cNvSpPr/>
+          <p:nvPr/>
+        </p:nvSpPr>
+        <p:spPr>
+          <a:xfrm>
+            <a:off x="3429000" y="3950208"/>
+            <a:ext cx="868680" cy="274320"/>
+          </a:xfrm>
+          <a:prstGeom prst="rect">
+            <a:avLst/>
+          </a:prstGeom>
+          <a:noFill/>
+          <a:ln/>
+        </p:spPr>
+        <p:txBody>
+          <a:bodyPr wrap="square" lIns="0" tIns="0" rIns="0" bIns="0" rtlCol="0" anchor="ctr"/>
+          <a:lstStyle/>
+          <a:p>
+            <a:pPr algn="ctr" indent="0" marL="0">
+              <a:lnSpc>
+                <a:spcPct val="115000"/>
+              </a:lnSpc>
+              <a:buNone/>
+            </a:pPr>
+            <a:r>
+              <a:rPr lang="en-US" sz="700" dirty="0">
+                <a:solidFill>
+                  <a:srgbClr val="64748B"/>
+                </a:solidFill>
+                <a:latin typeface="Calibri" pitchFamily="34" charset="0"/>
+                <a:ea typeface="Calibri" pitchFamily="34" charset="-122"/>
+                <a:cs typeface="Calibri" pitchFamily="34" charset="-120"/>
+              </a:rPr>
+              <a:t>Managed</a:t>
+            </a:r>
+            <a:endParaRPr lang="en-US" sz="700" dirty="0"/>
+          </a:p>
+          <a:p>
+            <a:pPr algn="ctr" indent="0" marL="0">
+              <a:lnSpc>
+                <a:spcPct val="115000"/>
+              </a:lnSpc>
+              <a:buNone/>
+            </a:pPr>
+            <a:r>
+              <a:rPr lang="en-US" sz="700" dirty="0">
+                <a:solidFill>
+                  <a:srgbClr val="64748B"/>
+                </a:solidFill>
+                <a:latin typeface="Calibri" pitchFamily="34" charset="0"/>
+                <a:ea typeface="Calibri" pitchFamily="34" charset="-122"/>
+                <a:cs typeface="Calibri" pitchFamily="34" charset="-120"/>
+              </a:rPr>
+              <a:t>Identity</a:t>
+            </a:r>
+            <a:endParaRPr lang="en-US" sz="700" dirty="0"/>
+          </a:p>
+        </p:txBody>
+      </p:sp>
+      <p:sp>
+        <p:nvSpPr>
+          <p:cNvPr id="41" name="Text 39"/>
+          <p:cNvSpPr/>
+          <p:nvPr/>
+        </p:nvSpPr>
+        <p:spPr>
+          <a:xfrm>
+            <a:off x="274320" y="4279392"/>
+            <a:ext cx="4114800" cy="164592"/>
+          </a:xfrm>
+          <a:prstGeom prst="rect">
+            <a:avLst/>
+          </a:prstGeom>
+          <a:noFill/>
+          <a:ln/>
+        </p:spPr>
+        <p:txBody>
+          <a:bodyPr wrap="square" lIns="0" tIns="0" rIns="0" bIns="0" rtlCol="0" anchor="ctr"/>
+          <a:lstStyle/>
+          <a:p>
+            <a:pPr algn="ctr" indent="0" marL="0">
+              <a:buNone/>
+            </a:pPr>
+            <a:r>
+              <a:rPr lang="en-US" sz="800" b="1" dirty="0">
+                <a:solidFill>
+                  <a:srgbClr val="059669"/>
+                </a:solidFill>
+                <a:latin typeface="Calibri" pitchFamily="34" charset="0"/>
+                <a:ea typeface="Calibri" pitchFamily="34" charset="-122"/>
+                <a:cs typeface="Calibri" pitchFamily="34" charset="-120"/>
+              </a:rPr>
+              <a:t>Azure dependencies: 3</a:t>
+            </a:r>
+            <a:endParaRPr lang="en-US" sz="800" dirty="0"/>
+          </a:p>
+        </p:txBody>
+      </p:sp>
+      <p:sp>
+        <p:nvSpPr>
+          <p:cNvPr id="42" name="Text 40"/>
+          <p:cNvSpPr/>
+          <p:nvPr/>
+        </p:nvSpPr>
+        <p:spPr>
+          <a:xfrm>
+            <a:off x="274320" y="4434840"/>
+            <a:ext cx="4114800" cy="137160"/>
+          </a:xfrm>
+          <a:prstGeom prst="rect">
+            <a:avLst/>
+          </a:prstGeom>
+          <a:noFill/>
+          <a:ln/>
+        </p:spPr>
+        <p:txBody>
+          <a:bodyPr wrap="square" lIns="0" tIns="0" rIns="0" bIns="0" rtlCol="0" anchor="ctr"/>
+          <a:lstStyle/>
+          <a:p>
+            <a:pPr algn="ctr" indent="0" marL="0">
+              <a:buNone/>
+            </a:pPr>
+            <a:r>
+              <a:rPr lang="en-US" sz="700" dirty="0">
+                <a:solidFill>
+                  <a:srgbClr val="64748B"/>
+                </a:solidFill>
+                <a:latin typeface="Calibri" pitchFamily="34" charset="0"/>
+                <a:ea typeface="Calibri" pitchFamily="34" charset="-122"/>
+                <a:cs typeface="Calibri" pitchFamily="34" charset="-120"/>
+              </a:rPr>
+              <a:t>Container App + Azure OpenAI + Blob Storage</a:t>
+            </a:r>
+            <a:endParaRPr lang="en-US" sz="700" dirty="0"/>
+          </a:p>
+        </p:txBody>
+      </p:sp>
+      <p:sp>
+        <p:nvSpPr>
+          <p:cNvPr id="43" name="Shape 41"/>
+          <p:cNvSpPr/>
+          <p:nvPr/>
+        </p:nvSpPr>
+        <p:spPr>
+          <a:xfrm>
+            <a:off x="4617720" y="777240"/>
+            <a:ext cx="4389120" cy="4251960"/>
+          </a:xfrm>
+          <a:prstGeom prst="rect">
+            <a:avLst/>
+          </a:prstGeom>
+          <a:solidFill>
+            <a:srgbClr val="FFFFFF"/>
+          </a:solidFill>
+          <a:ln w="9525">
+            <a:solidFill>
+              <a:srgbClr val="E2E8F0"/>
+            </a:solidFill>
+            <a:prstDash val="solid"/>
+          </a:ln>
           <a:effectLst>
             <a:outerShdw sx="100000" sy="100000" kx="0" ky="0" algn="bl" rotWithShape="0" blurRad="76200" dist="25400" dir="8100000">
               <a:srgbClr val="94A3B8">
@@ -2353,14 +3807,34 @@
       </p:sp>
       <p:sp>
         <p:nvSpPr>
-          <p:cNvPr id="9" name="Text 7"/>
-          <p:cNvSpPr/>
-          <p:nvPr/>
-        </p:nvSpPr>
-        <p:spPr>
-          <a:xfrm>
-            <a:off x="1673352" y="1298448"/>
-            <a:ext cx="1042416" cy="292608"/>
+          <p:cNvPr id="44" name="Shape 42"/>
+          <p:cNvSpPr/>
+          <p:nvPr/>
+        </p:nvSpPr>
+        <p:spPr>
+          <a:xfrm>
+            <a:off x="4617720" y="777240"/>
+            <a:ext cx="4389120" cy="274320"/>
+          </a:xfrm>
+          <a:prstGeom prst="rect">
+            <a:avLst/>
+          </a:prstGeom>
+          <a:solidFill>
+            <a:srgbClr val="D97706"/>
+          </a:solidFill>
+          <a:ln/>
+        </p:spPr>
+      </p:sp>
+      <p:sp>
+        <p:nvSpPr>
+          <p:cNvPr id="45" name="Text 43"/>
+          <p:cNvSpPr/>
+          <p:nvPr/>
+        </p:nvSpPr>
+        <p:spPr>
+          <a:xfrm>
+            <a:off x="4617720" y="777240"/>
+            <a:ext cx="4389120" cy="274320"/>
           </a:xfrm>
           <a:prstGeom prst="rect">
             <a:avLst/>
@@ -2376,30 +3850,57 @@
               <a:buNone/>
             </a:pPr>
             <a:r>
-              <a:rPr lang="en-US" sz="1000" b="1" dirty="0">
+              <a:rPr lang="en-US" sz="1100" b="1" dirty="0">
                 <a:solidFill>
                   <a:srgbClr val="FFFFFF"/>
                 </a:solidFill>
-                <a:latin typeface="Calibri" pitchFamily="34" charset="0"/>
-                <a:ea typeface="Calibri" pitchFamily="34" charset="-122"/>
-                <a:cs typeface="Calibri" pitchFamily="34" charset="-120"/>
-              </a:rPr>
-              <a:t>Agent Config</a:t>
-            </a:r>
-            <a:endParaRPr lang="en-US" sz="1000" dirty="0"/>
-          </a:p>
-        </p:txBody>
-      </p:sp>
-      <p:sp>
-        <p:nvSpPr>
-          <p:cNvPr id="10" name="Text 8"/>
-          <p:cNvSpPr/>
-          <p:nvPr/>
-        </p:nvSpPr>
-        <p:spPr>
-          <a:xfrm>
-            <a:off x="1673352" y="1591056"/>
-            <a:ext cx="1042416" cy="228600"/>
+                <a:latin typeface="Trebuchet MS" pitchFamily="34" charset="0"/>
+                <a:ea typeface="Trebuchet MS" pitchFamily="34" charset="-122"/>
+                <a:cs typeface="Trebuchet MS" pitchFamily="34" charset="-120"/>
+              </a:rPr>
+              <a:t>Option 2: MS Agent Harness</a:t>
+            </a:r>
+            <a:endParaRPr lang="en-US" sz="1100" dirty="0"/>
+          </a:p>
+        </p:txBody>
+      </p:sp>
+      <p:sp>
+        <p:nvSpPr>
+          <p:cNvPr id="46" name="Shape 44"/>
+          <p:cNvSpPr/>
+          <p:nvPr/>
+        </p:nvSpPr>
+        <p:spPr>
+          <a:xfrm>
+            <a:off x="4754880" y="1188720"/>
+            <a:ext cx="1371600" cy="411480"/>
+          </a:xfrm>
+          <a:prstGeom prst="rect">
+            <a:avLst/>
+          </a:prstGeom>
+          <a:solidFill>
+            <a:srgbClr val="92400E"/>
+          </a:solidFill>
+          <a:ln/>
+          <a:effectLst>
+            <a:outerShdw sx="100000" sy="100000" kx="0" ky="0" algn="bl" rotWithShape="0" blurRad="38100" dist="12700" dir="8100000">
+              <a:srgbClr val="94A3B8">
+                <a:alpha val="25000"/>
+              </a:srgbClr>
+            </a:outerShdw>
+          </a:effectLst>
+        </p:spPr>
+      </p:sp>
+      <p:sp>
+        <p:nvSpPr>
+          <p:cNvPr id="47" name="Text 45"/>
+          <p:cNvSpPr/>
+          <p:nvPr/>
+        </p:nvSpPr>
+        <p:spPr>
+          <a:xfrm>
+            <a:off x="4754880" y="1188720"/>
+            <a:ext cx="1371600" cy="411480"/>
           </a:xfrm>
           <a:prstGeom prst="rect">
             <a:avLst/>
@@ -2412,33 +3913,731 @@
           <a:lstStyle/>
           <a:p>
             <a:pPr algn="ctr" indent="0" marL="0">
-              <a:buNone/>
-            </a:pPr>
-            <a:r>
-              <a:rPr lang="en-US" sz="900" dirty="0">
-                <a:solidFill>
-                  <a:srgbClr val="F8FAFC"/>
-                </a:solidFill>
-                <a:latin typeface="Calibri" pitchFamily="34" charset="0"/>
-                <a:ea typeface="Calibri" pitchFamily="34" charset="-122"/>
-                <a:cs typeface="Calibri" pitchFamily="34" charset="-120"/>
-              </a:rPr>
-              <a:t>W1-2</a:t>
-            </a:r>
-            <a:endParaRPr lang="en-US" sz="900" dirty="0"/>
-          </a:p>
-        </p:txBody>
-      </p:sp>
-      <p:sp>
-        <p:nvSpPr>
-          <p:cNvPr id="11" name="Shape 9"/>
-          <p:cNvSpPr/>
-          <p:nvPr/>
-        </p:nvSpPr>
-        <p:spPr>
-          <a:xfrm>
-            <a:off x="2926080" y="1280160"/>
-            <a:ext cx="822960" cy="594360"/>
+              <a:lnSpc>
+                <a:spcPct val="115000"/>
+              </a:lnSpc>
+              <a:buNone/>
+            </a:pPr>
+            <a:r>
+              <a:rPr lang="en-US" sz="800" b="1" dirty="0">
+                <a:solidFill>
+                  <a:srgbClr val="FFFFFF"/>
+                </a:solidFill>
+                <a:latin typeface="Calibri" pitchFamily="34" charset="0"/>
+                <a:ea typeface="Calibri" pitchFamily="34" charset="-122"/>
+                <a:cs typeface="Calibri" pitchFamily="34" charset="-120"/>
+              </a:rPr>
+              <a:t>Azure DevOps</a:t>
+            </a:r>
+            <a:endParaRPr lang="en-US" sz="800" dirty="0"/>
+          </a:p>
+          <a:p>
+            <a:pPr algn="ctr" indent="0" marL="0">
+              <a:lnSpc>
+                <a:spcPct val="115000"/>
+              </a:lnSpc>
+              <a:buNone/>
+            </a:pPr>
+            <a:r>
+              <a:rPr lang="en-US" sz="800" b="1" dirty="0">
+                <a:solidFill>
+                  <a:srgbClr val="FFFFFF"/>
+                </a:solidFill>
+                <a:latin typeface="Calibri" pitchFamily="34" charset="0"/>
+                <a:ea typeface="Calibri" pitchFamily="34" charset="-122"/>
+                <a:cs typeface="Calibri" pitchFamily="34" charset="-120"/>
+              </a:rPr>
+              <a:t>Work Items + Repos</a:t>
+            </a:r>
+            <a:endParaRPr lang="en-US" sz="800" dirty="0"/>
+          </a:p>
+        </p:txBody>
+      </p:sp>
+      <p:sp>
+        <p:nvSpPr>
+          <p:cNvPr id="48" name="Shape 46"/>
+          <p:cNvSpPr/>
+          <p:nvPr/>
+        </p:nvSpPr>
+        <p:spPr>
+          <a:xfrm>
+            <a:off x="6126480" y="1389888"/>
+            <a:ext cx="320040" cy="0"/>
+          </a:xfrm>
+          <a:prstGeom prst="line">
+            <a:avLst/>
+          </a:prstGeom>
+          <a:noFill/>
+          <a:ln w="15875">
+            <a:solidFill>
+              <a:srgbClr val="D97706"/>
+            </a:solidFill>
+            <a:prstDash val="solid"/>
+            <a:tailEnd type="triangle"/>
+          </a:ln>
+        </p:spPr>
+      </p:sp>
+      <p:sp>
+        <p:nvSpPr>
+          <p:cNvPr id="49" name="Text 47"/>
+          <p:cNvSpPr/>
+          <p:nvPr/>
+        </p:nvSpPr>
+        <p:spPr>
+          <a:xfrm>
+            <a:off x="5966460" y="1261872"/>
+            <a:ext cx="640080" cy="128016"/>
+          </a:xfrm>
+          <a:prstGeom prst="rect">
+            <a:avLst/>
+          </a:prstGeom>
+          <a:noFill/>
+          <a:ln/>
+        </p:spPr>
+        <p:txBody>
+          <a:bodyPr wrap="square" lIns="0" tIns="0" rIns="0" bIns="0" rtlCol="0" anchor="ctr"/>
+          <a:lstStyle/>
+          <a:p>
+            <a:pPr algn="ctr" indent="0" marL="0">
+              <a:buNone/>
+            </a:pPr>
+            <a:r>
+              <a:rPr lang="en-US" sz="600" dirty="0">
+                <a:solidFill>
+                  <a:srgbClr val="64748B"/>
+                </a:solidFill>
+                <a:latin typeface="Calibri" pitchFamily="34" charset="0"/>
+                <a:ea typeface="Calibri" pitchFamily="34" charset="-122"/>
+                <a:cs typeface="Calibri" pitchFamily="34" charset="-120"/>
+              </a:rPr>
+              <a:t>webhook</a:t>
+            </a:r>
+            <a:endParaRPr lang="en-US" sz="600" dirty="0"/>
+          </a:p>
+        </p:txBody>
+      </p:sp>
+      <p:sp>
+        <p:nvSpPr>
+          <p:cNvPr id="50" name="Shape 48"/>
+          <p:cNvSpPr/>
+          <p:nvPr/>
+        </p:nvSpPr>
+        <p:spPr>
+          <a:xfrm>
+            <a:off x="6446520" y="1188720"/>
+            <a:ext cx="1234440" cy="411480"/>
+          </a:xfrm>
+          <a:prstGeom prst="rect">
+            <a:avLst/>
+          </a:prstGeom>
+          <a:solidFill>
+            <a:srgbClr val="D97706"/>
+          </a:solidFill>
+          <a:ln/>
+          <a:effectLst>
+            <a:outerShdw sx="100000" sy="100000" kx="0" ky="0" algn="bl" rotWithShape="0" blurRad="38100" dist="12700" dir="8100000">
+              <a:srgbClr val="94A3B8">
+                <a:alpha val="25000"/>
+              </a:srgbClr>
+            </a:outerShdw>
+          </a:effectLst>
+        </p:spPr>
+      </p:sp>
+      <p:sp>
+        <p:nvSpPr>
+          <p:cNvPr id="51" name="Text 49"/>
+          <p:cNvSpPr/>
+          <p:nvPr/>
+        </p:nvSpPr>
+        <p:spPr>
+          <a:xfrm>
+            <a:off x="6446520" y="1188720"/>
+            <a:ext cx="1234440" cy="411480"/>
+          </a:xfrm>
+          <a:prstGeom prst="rect">
+            <a:avLst/>
+          </a:prstGeom>
+          <a:noFill/>
+          <a:ln/>
+        </p:spPr>
+        <p:txBody>
+          <a:bodyPr wrap="square" lIns="0" tIns="0" rIns="0" bIns="0" rtlCol="0" anchor="ctr"/>
+          <a:lstStyle/>
+          <a:p>
+            <a:pPr algn="ctr" indent="0" marL="0">
+              <a:lnSpc>
+                <a:spcPct val="115000"/>
+              </a:lnSpc>
+              <a:buNone/>
+            </a:pPr>
+            <a:r>
+              <a:rPr lang="en-US" sz="800" b="1" dirty="0">
+                <a:solidFill>
+                  <a:srgbClr val="FFFFFF"/>
+                </a:solidFill>
+                <a:latin typeface="Calibri" pitchFamily="34" charset="0"/>
+                <a:ea typeface="Calibri" pitchFamily="34" charset="-122"/>
+                <a:cs typeface="Calibri" pitchFamily="34" charset="-120"/>
+              </a:rPr>
+              <a:t>Azure Function</a:t>
+            </a:r>
+            <a:endParaRPr lang="en-US" sz="800" dirty="0"/>
+          </a:p>
+          <a:p>
+            <a:pPr algn="ctr" indent="0" marL="0">
+              <a:lnSpc>
+                <a:spcPct val="115000"/>
+              </a:lnSpc>
+              <a:buNone/>
+            </a:pPr>
+            <a:r>
+              <a:rPr lang="en-US" sz="800" b="1" dirty="0">
+                <a:solidFill>
+                  <a:srgbClr val="FFFFFF"/>
+                </a:solidFill>
+                <a:latin typeface="Calibri" pitchFamily="34" charset="0"/>
+                <a:ea typeface="Calibri" pitchFamily="34" charset="-122"/>
+                <a:cs typeface="Calibri" pitchFamily="34" charset="-120"/>
+              </a:rPr>
+              <a:t>Webhook Trigger</a:t>
+            </a:r>
+            <a:endParaRPr lang="en-US" sz="800" dirty="0"/>
+          </a:p>
+        </p:txBody>
+      </p:sp>
+      <p:sp>
+        <p:nvSpPr>
+          <p:cNvPr id="52" name="Shape 50"/>
+          <p:cNvSpPr/>
+          <p:nvPr/>
+        </p:nvSpPr>
+        <p:spPr>
+          <a:xfrm>
+            <a:off x="7059168" y="1600200"/>
+            <a:ext cx="0" cy="228600"/>
+          </a:xfrm>
+          <a:prstGeom prst="line">
+            <a:avLst/>
+          </a:prstGeom>
+          <a:noFill/>
+          <a:ln w="15875">
+            <a:solidFill>
+              <a:srgbClr val="D97706"/>
+            </a:solidFill>
+            <a:prstDash val="solid"/>
+            <a:tailEnd type="triangle"/>
+          </a:ln>
+        </p:spPr>
+      </p:sp>
+      <p:sp>
+        <p:nvSpPr>
+          <p:cNvPr id="53" name="Shape 51"/>
+          <p:cNvSpPr/>
+          <p:nvPr/>
+        </p:nvSpPr>
+        <p:spPr>
+          <a:xfrm>
+            <a:off x="4754880" y="1828800"/>
+            <a:ext cx="4114800" cy="2423160"/>
+          </a:xfrm>
+          <a:prstGeom prst="rect">
+            <a:avLst/>
+          </a:prstGeom>
+          <a:solidFill>
+            <a:srgbClr val="FFFBEB"/>
+          </a:solidFill>
+          <a:ln w="12700">
+            <a:solidFill>
+              <a:srgbClr val="FDE68A"/>
+            </a:solidFill>
+            <a:prstDash val="dash"/>
+          </a:ln>
+        </p:spPr>
+      </p:sp>
+      <p:sp>
+        <p:nvSpPr>
+          <p:cNvPr id="54" name="Text 52"/>
+          <p:cNvSpPr/>
+          <p:nvPr/>
+        </p:nvSpPr>
+        <p:spPr>
+          <a:xfrm>
+            <a:off x="4800600" y="1847088"/>
+            <a:ext cx="1828800" cy="164592"/>
+          </a:xfrm>
+          <a:prstGeom prst="rect">
+            <a:avLst/>
+          </a:prstGeom>
+          <a:noFill/>
+          <a:ln/>
+        </p:spPr>
+        <p:txBody>
+          <a:bodyPr wrap="square" lIns="0" tIns="0" rIns="0" bIns="0" rtlCol="0" anchor="ctr"/>
+          <a:lstStyle/>
+          <a:p>
+            <a:pPr indent="0" marL="0">
+              <a:buNone/>
+            </a:pPr>
+            <a:r>
+              <a:rPr lang="en-US" sz="700" b="1" dirty="0">
+                <a:solidFill>
+                  <a:srgbClr val="D97706"/>
+                </a:solidFill>
+                <a:latin typeface="Calibri" pitchFamily="34" charset="0"/>
+                <a:ea typeface="Calibri" pitchFamily="34" charset="-122"/>
+                <a:cs typeface="Calibri" pitchFamily="34" charset="-120"/>
+              </a:rPr>
+              <a:t>Azure Container App</a:t>
+            </a:r>
+            <a:endParaRPr lang="en-US" sz="700" dirty="0"/>
+          </a:p>
+        </p:txBody>
+      </p:sp>
+      <p:sp>
+        <p:nvSpPr>
+          <p:cNvPr id="55" name="Shape 53"/>
+          <p:cNvSpPr/>
+          <p:nvPr/>
+        </p:nvSpPr>
+        <p:spPr>
+          <a:xfrm>
+            <a:off x="4892040" y="2057400"/>
+            <a:ext cx="1417320" cy="365760"/>
+          </a:xfrm>
+          <a:prstGeom prst="rect">
+            <a:avLst/>
+          </a:prstGeom>
+          <a:solidFill>
+            <a:srgbClr val="FEF3C7"/>
+          </a:solidFill>
+          <a:ln w="9525">
+            <a:solidFill>
+              <a:srgbClr val="FDE68A"/>
+            </a:solidFill>
+            <a:prstDash val="solid"/>
+          </a:ln>
+        </p:spPr>
+      </p:sp>
+      <p:sp>
+        <p:nvSpPr>
+          <p:cNvPr id="56" name="Text 54"/>
+          <p:cNvSpPr/>
+          <p:nvPr/>
+        </p:nvSpPr>
+        <p:spPr>
+          <a:xfrm>
+            <a:off x="4892040" y="2057400"/>
+            <a:ext cx="1417320" cy="365760"/>
+          </a:xfrm>
+          <a:prstGeom prst="rect">
+            <a:avLst/>
+          </a:prstGeom>
+          <a:noFill/>
+          <a:ln/>
+        </p:spPr>
+        <p:txBody>
+          <a:bodyPr wrap="square" lIns="0" tIns="0" rIns="0" bIns="0" rtlCol="0" anchor="ctr"/>
+          <a:lstStyle/>
+          <a:p>
+            <a:pPr algn="ctr" indent="0" marL="0">
+              <a:lnSpc>
+                <a:spcPct val="115000"/>
+              </a:lnSpc>
+              <a:buNone/>
+            </a:pPr>
+            <a:r>
+              <a:rPr lang="en-US" sz="750" b="1" dirty="0">
+                <a:solidFill>
+                  <a:srgbClr val="D97706"/>
+                </a:solidFill>
+                <a:latin typeface="Calibri" pitchFamily="34" charset="0"/>
+                <a:ea typeface="Calibri" pitchFamily="34" charset="-122"/>
+                <a:cs typeface="Calibri" pitchFamily="34" charset="-120"/>
+              </a:rPr>
+              <a:t>FastAPI Orchestrator</a:t>
+            </a:r>
+            <a:endParaRPr lang="en-US" sz="750" dirty="0"/>
+          </a:p>
+          <a:p>
+            <a:pPr algn="ctr" indent="0" marL="0">
+              <a:lnSpc>
+                <a:spcPct val="115000"/>
+              </a:lnSpc>
+              <a:buNone/>
+            </a:pPr>
+            <a:r>
+              <a:rPr lang="en-US" sz="750" b="1" dirty="0">
+                <a:solidFill>
+                  <a:srgbClr val="D97706"/>
+                </a:solidFill>
+                <a:latin typeface="Calibri" pitchFamily="34" charset="0"/>
+                <a:ea typeface="Calibri" pitchFamily="34" charset="-122"/>
+                <a:cs typeface="Calibri" pitchFamily="34" charset="-120"/>
+              </a:rPr>
+              <a:t>api.py (180 lines)</a:t>
+            </a:r>
+            <a:endParaRPr lang="en-US" sz="750" dirty="0"/>
+          </a:p>
+        </p:txBody>
+      </p:sp>
+      <p:sp>
+        <p:nvSpPr>
+          <p:cNvPr id="57" name="Shape 55"/>
+          <p:cNvSpPr/>
+          <p:nvPr/>
+        </p:nvSpPr>
+        <p:spPr>
+          <a:xfrm>
+            <a:off x="6492240" y="2057400"/>
+            <a:ext cx="2240280" cy="365760"/>
+          </a:xfrm>
+          <a:prstGeom prst="rect">
+            <a:avLst/>
+          </a:prstGeom>
+          <a:solidFill>
+            <a:srgbClr val="FEF3C7"/>
+          </a:solidFill>
+          <a:ln w="9525">
+            <a:solidFill>
+              <a:srgbClr val="FDE68A"/>
+            </a:solidFill>
+            <a:prstDash val="solid"/>
+          </a:ln>
+        </p:spPr>
+      </p:sp>
+      <p:sp>
+        <p:nvSpPr>
+          <p:cNvPr id="58" name="Text 56"/>
+          <p:cNvSpPr/>
+          <p:nvPr/>
+        </p:nvSpPr>
+        <p:spPr>
+          <a:xfrm>
+            <a:off x="6492240" y="2057400"/>
+            <a:ext cx="2240280" cy="365760"/>
+          </a:xfrm>
+          <a:prstGeom prst="rect">
+            <a:avLst/>
+          </a:prstGeom>
+          <a:noFill/>
+          <a:ln/>
+        </p:spPr>
+        <p:txBody>
+          <a:bodyPr wrap="square" lIns="0" tIns="0" rIns="0" bIns="0" rtlCol="0" anchor="ctr"/>
+          <a:lstStyle/>
+          <a:p>
+            <a:pPr algn="ctr" indent="0" marL="0">
+              <a:lnSpc>
+                <a:spcPct val="115000"/>
+              </a:lnSpc>
+              <a:buNone/>
+            </a:pPr>
+            <a:r>
+              <a:rPr lang="en-US" sz="750" b="1" dirty="0">
+                <a:solidFill>
+                  <a:srgbClr val="D97706"/>
+                </a:solidFill>
+                <a:latin typeface="Calibri" pitchFamily="34" charset="0"/>
+                <a:ea typeface="Calibri" pitchFamily="34" charset="-122"/>
+                <a:cs typeface="Calibri" pitchFamily="34" charset="-120"/>
+              </a:rPr>
+              <a:t>pipeline.py (248 lines)</a:t>
+            </a:r>
+            <a:endParaRPr lang="en-US" sz="750" dirty="0"/>
+          </a:p>
+          <a:p>
+            <a:pPr algn="ctr" indent="0" marL="0">
+              <a:lnSpc>
+                <a:spcPct val="115000"/>
+              </a:lnSpc>
+              <a:buNone/>
+            </a:pPr>
+            <a:r>
+              <a:rPr lang="en-US" sz="750" b="1" dirty="0">
+                <a:solidFill>
+                  <a:srgbClr val="D97706"/>
+                </a:solidFill>
+                <a:latin typeface="Calibri" pitchFamily="34" charset="0"/>
+                <a:ea typeface="Calibri" pitchFamily="34" charset="-122"/>
+                <a:cs typeface="Calibri" pitchFamily="34" charset="-120"/>
+              </a:rPr>
+              <a:t>Custom 6-gate orchestration</a:t>
+            </a:r>
+            <a:endParaRPr lang="en-US" sz="750" dirty="0"/>
+          </a:p>
+        </p:txBody>
+      </p:sp>
+      <p:sp>
+        <p:nvSpPr>
+          <p:cNvPr id="59" name="Shape 57"/>
+          <p:cNvSpPr/>
+          <p:nvPr/>
+        </p:nvSpPr>
+        <p:spPr>
+          <a:xfrm>
+            <a:off x="6309360" y="2240280"/>
+            <a:ext cx="182880" cy="0"/>
+          </a:xfrm>
+          <a:prstGeom prst="line">
+            <a:avLst/>
+          </a:prstGeom>
+          <a:noFill/>
+          <a:ln w="15875">
+            <a:solidFill>
+              <a:srgbClr val="D97706"/>
+            </a:solidFill>
+            <a:prstDash val="solid"/>
+            <a:tailEnd type="triangle"/>
+          </a:ln>
+        </p:spPr>
+      </p:sp>
+      <p:sp>
+        <p:nvSpPr>
+          <p:cNvPr id="60" name="Shape 58"/>
+          <p:cNvSpPr/>
+          <p:nvPr/>
+        </p:nvSpPr>
+        <p:spPr>
+          <a:xfrm>
+            <a:off x="4892040" y="2578608"/>
+            <a:ext cx="3840480" cy="201168"/>
+          </a:xfrm>
+          <a:prstGeom prst="rect">
+            <a:avLst/>
+          </a:prstGeom>
+          <a:solidFill>
+            <a:srgbClr val="D97706"/>
+          </a:solidFill>
+          <a:ln/>
+        </p:spPr>
+      </p:sp>
+      <p:sp>
+        <p:nvSpPr>
+          <p:cNvPr id="61" name="Text 59"/>
+          <p:cNvSpPr/>
+          <p:nvPr/>
+        </p:nvSpPr>
+        <p:spPr>
+          <a:xfrm>
+            <a:off x="4892040" y="2578608"/>
+            <a:ext cx="3840480" cy="201168"/>
+          </a:xfrm>
+          <a:prstGeom prst="rect">
+            <a:avLst/>
+          </a:prstGeom>
+          <a:noFill/>
+          <a:ln/>
+        </p:spPr>
+        <p:txBody>
+          <a:bodyPr wrap="square" lIns="0" tIns="0" rIns="0" bIns="0" rtlCol="0" anchor="ctr"/>
+          <a:lstStyle/>
+          <a:p>
+            <a:pPr algn="ctr" indent="0" marL="0">
+              <a:buNone/>
+            </a:pPr>
+            <a:r>
+              <a:rPr lang="en-US" sz="700" b="1" dirty="0">
+                <a:solidFill>
+                  <a:srgbClr val="FFFFFF"/>
+                </a:solidFill>
+                <a:latin typeface="Calibri" pitchFamily="34" charset="0"/>
+                <a:ea typeface="Calibri" pitchFamily="34" charset="-122"/>
+                <a:cs typeface="Calibri" pitchFamily="34" charset="-120"/>
+              </a:rPr>
+              <a:t>Custom Python Agents — run IN-PROCESS, no sandbox isolation</a:t>
+            </a:r>
+            <a:endParaRPr lang="en-US" sz="700" dirty="0"/>
+          </a:p>
+        </p:txBody>
+      </p:sp>
+      <p:sp>
+        <p:nvSpPr>
+          <p:cNvPr id="62" name="Shape 60"/>
+          <p:cNvSpPr/>
+          <p:nvPr/>
+        </p:nvSpPr>
+        <p:spPr>
+          <a:xfrm>
+            <a:off x="4892040" y="2852928"/>
+            <a:ext cx="886968" cy="502920"/>
+          </a:xfrm>
+          <a:prstGeom prst="rect">
+            <a:avLst/>
+          </a:prstGeom>
+          <a:solidFill>
+            <a:srgbClr val="7C3AED"/>
+          </a:solidFill>
+          <a:ln/>
+          <a:effectLst>
+            <a:outerShdw sx="100000" sy="100000" kx="0" ky="0" algn="bl" rotWithShape="0" blurRad="38100" dist="12700" dir="8100000">
+              <a:srgbClr val="94A3B8">
+                <a:alpha val="25000"/>
+              </a:srgbClr>
+            </a:outerShdw>
+          </a:effectLst>
+        </p:spPr>
+      </p:sp>
+      <p:sp>
+        <p:nvSpPr>
+          <p:cNvPr id="63" name="Text 61"/>
+          <p:cNvSpPr/>
+          <p:nvPr/>
+        </p:nvSpPr>
+        <p:spPr>
+          <a:xfrm>
+            <a:off x="4892040" y="2852928"/>
+            <a:ext cx="886968" cy="502920"/>
+          </a:xfrm>
+          <a:prstGeom prst="rect">
+            <a:avLst/>
+          </a:prstGeom>
+          <a:noFill/>
+          <a:ln/>
+        </p:spPr>
+        <p:txBody>
+          <a:bodyPr wrap="square" lIns="0" tIns="0" rIns="0" bIns="0" rtlCol="0" anchor="ctr"/>
+          <a:lstStyle/>
+          <a:p>
+            <a:pPr algn="ctr" indent="0" marL="0">
+              <a:lnSpc>
+                <a:spcPct val="115000"/>
+              </a:lnSpc>
+              <a:buNone/>
+            </a:pPr>
+            <a:r>
+              <a:rPr lang="en-US" sz="800" b="1" dirty="0">
+                <a:solidFill>
+                  <a:srgbClr val="FFFFFF"/>
+                </a:solidFill>
+                <a:latin typeface="Calibri" pitchFamily="34" charset="0"/>
+                <a:ea typeface="Calibri" pitchFamily="34" charset="-122"/>
+                <a:cs typeface="Calibri" pitchFamily="34" charset="-120"/>
+              </a:rPr>
+              <a:t>Analyzer</a:t>
+            </a:r>
+            <a:endParaRPr lang="en-US" sz="800" dirty="0"/>
+          </a:p>
+          <a:p>
+            <a:pPr algn="ctr" indent="0" marL="0">
+              <a:lnSpc>
+                <a:spcPct val="115000"/>
+              </a:lnSpc>
+              <a:buNone/>
+            </a:pPr>
+            <a:r>
+              <a:rPr lang="en-US" sz="800" b="1" dirty="0">
+                <a:solidFill>
+                  <a:srgbClr val="FFFFFF"/>
+                </a:solidFill>
+                <a:latin typeface="Calibri" pitchFamily="34" charset="0"/>
+                <a:ea typeface="Calibri" pitchFamily="34" charset="-122"/>
+                <a:cs typeface="Calibri" pitchFamily="34" charset="-120"/>
+              </a:rPr>
+              <a:t>(99 lines)</a:t>
+            </a:r>
+            <a:endParaRPr lang="en-US" sz="800" dirty="0"/>
+          </a:p>
+        </p:txBody>
+      </p:sp>
+      <p:sp>
+        <p:nvSpPr>
+          <p:cNvPr id="64" name="Shape 62"/>
+          <p:cNvSpPr/>
+          <p:nvPr/>
+        </p:nvSpPr>
+        <p:spPr>
+          <a:xfrm>
+            <a:off x="5870448" y="2852928"/>
+            <a:ext cx="886968" cy="502920"/>
+          </a:xfrm>
+          <a:prstGeom prst="rect">
+            <a:avLst/>
+          </a:prstGeom>
+          <a:solidFill>
+            <a:srgbClr val="0284C7"/>
+          </a:solidFill>
+          <a:ln/>
+          <a:effectLst>
+            <a:outerShdw sx="100000" sy="100000" kx="0" ky="0" algn="bl" rotWithShape="0" blurRad="38100" dist="12700" dir="8100000">
+              <a:srgbClr val="94A3B8">
+                <a:alpha val="25000"/>
+              </a:srgbClr>
+            </a:outerShdw>
+          </a:effectLst>
+        </p:spPr>
+      </p:sp>
+      <p:sp>
+        <p:nvSpPr>
+          <p:cNvPr id="65" name="Text 63"/>
+          <p:cNvSpPr/>
+          <p:nvPr/>
+        </p:nvSpPr>
+        <p:spPr>
+          <a:xfrm>
+            <a:off x="5870448" y="2852928"/>
+            <a:ext cx="886968" cy="502920"/>
+          </a:xfrm>
+          <a:prstGeom prst="rect">
+            <a:avLst/>
+          </a:prstGeom>
+          <a:noFill/>
+          <a:ln/>
+        </p:spPr>
+        <p:txBody>
+          <a:bodyPr wrap="square" lIns="0" tIns="0" rIns="0" bIns="0" rtlCol="0" anchor="ctr"/>
+          <a:lstStyle/>
+          <a:p>
+            <a:pPr algn="ctr" indent="0" marL="0">
+              <a:lnSpc>
+                <a:spcPct val="115000"/>
+              </a:lnSpc>
+              <a:buNone/>
+            </a:pPr>
+            <a:r>
+              <a:rPr lang="en-US" sz="800" b="1" dirty="0">
+                <a:solidFill>
+                  <a:srgbClr val="FFFFFF"/>
+                </a:solidFill>
+                <a:latin typeface="Calibri" pitchFamily="34" charset="0"/>
+                <a:ea typeface="Calibri" pitchFamily="34" charset="-122"/>
+                <a:cs typeface="Calibri" pitchFamily="34" charset="-120"/>
+              </a:rPr>
+              <a:t>Coder</a:t>
+            </a:r>
+            <a:endParaRPr lang="en-US" sz="800" dirty="0"/>
+          </a:p>
+          <a:p>
+            <a:pPr algn="ctr" indent="0" marL="0">
+              <a:lnSpc>
+                <a:spcPct val="115000"/>
+              </a:lnSpc>
+              <a:buNone/>
+            </a:pPr>
+            <a:r>
+              <a:rPr lang="en-US" sz="800" b="1" dirty="0">
+                <a:solidFill>
+                  <a:srgbClr val="FFFFFF"/>
+                </a:solidFill>
+                <a:latin typeface="Calibri" pitchFamily="34" charset="0"/>
+                <a:ea typeface="Calibri" pitchFamily="34" charset="-122"/>
+                <a:cs typeface="Calibri" pitchFamily="34" charset="-120"/>
+              </a:rPr>
+              <a:t>(184 lines)</a:t>
+            </a:r>
+            <a:endParaRPr lang="en-US" sz="800" dirty="0"/>
+          </a:p>
+        </p:txBody>
+      </p:sp>
+      <p:sp>
+        <p:nvSpPr>
+          <p:cNvPr id="66" name="Shape 64"/>
+          <p:cNvSpPr/>
+          <p:nvPr/>
+        </p:nvSpPr>
+        <p:spPr>
+          <a:xfrm>
+            <a:off x="6848856" y="2852928"/>
+            <a:ext cx="886968" cy="502920"/>
           </a:xfrm>
           <a:prstGeom prst="rect">
             <a:avLst/>
@@ -2448,9 +4647,9 @@
           </a:solidFill>
           <a:ln/>
           <a:effectLst>
-            <a:outerShdw sx="100000" sy="100000" kx="0" ky="0" algn="bl" rotWithShape="0" blurRad="76200" dist="25400" dir="8100000">
+            <a:outerShdw sx="100000" sy="100000" kx="0" ky="0" algn="bl" rotWithShape="0" blurRad="38100" dist="12700" dir="8100000">
               <a:srgbClr val="94A3B8">
-                <a:alpha val="30000"/>
+                <a:alpha val="25000"/>
               </a:srgbClr>
             </a:outerShdw>
           </a:effectLst>
@@ -2458,14 +4657,14 @@
       </p:sp>
       <p:sp>
         <p:nvSpPr>
-          <p:cNvPr id="12" name="Text 10"/>
-          <p:cNvSpPr/>
-          <p:nvPr/>
-        </p:nvSpPr>
-        <p:spPr>
-          <a:xfrm>
-            <a:off x="2999232" y="1298448"/>
-            <a:ext cx="676656" cy="292608"/>
+          <p:cNvPr id="67" name="Text 65"/>
+          <p:cNvSpPr/>
+          <p:nvPr/>
+        </p:nvSpPr>
+        <p:spPr>
+          <a:xfrm>
+            <a:off x="6848856" y="2852928"/>
+            <a:ext cx="886968" cy="502920"/>
           </a:xfrm>
           <a:prstGeom prst="rect">
             <a:avLst/>
@@ -2478,10 +4677,13 @@
           <a:lstStyle/>
           <a:p>
             <a:pPr algn="ctr" indent="0" marL="0">
-              <a:buNone/>
-            </a:pPr>
-            <a:r>
-              <a:rPr lang="en-US" sz="1000" b="1" dirty="0">
+              <a:lnSpc>
+                <a:spcPct val="115000"/>
+              </a:lnSpc>
+              <a:buNone/>
+            </a:pPr>
+            <a:r>
+              <a:rPr lang="en-US" sz="800" b="1" dirty="0">
                 <a:solidFill>
                   <a:srgbClr val="FFFFFF"/>
                 </a:solidFill>
@@ -2489,61 +4691,42 @@
                 <a:ea typeface="Calibri" pitchFamily="34" charset="-122"/>
                 <a:cs typeface="Calibri" pitchFamily="34" charset="-120"/>
               </a:rPr>
-              <a:t>Trigger</a:t>
-            </a:r>
-            <a:endParaRPr lang="en-US" sz="1000" dirty="0"/>
-          </a:p>
-        </p:txBody>
-      </p:sp>
-      <p:sp>
-        <p:nvSpPr>
-          <p:cNvPr id="13" name="Text 11"/>
-          <p:cNvSpPr/>
-          <p:nvPr/>
-        </p:nvSpPr>
-        <p:spPr>
-          <a:xfrm>
-            <a:off x="2999232" y="1591056"/>
-            <a:ext cx="676656" cy="228600"/>
-          </a:xfrm>
-          <a:prstGeom prst="rect">
-            <a:avLst/>
-          </a:prstGeom>
-          <a:noFill/>
-          <a:ln/>
-        </p:spPr>
-        <p:txBody>
-          <a:bodyPr wrap="square" lIns="0" tIns="0" rIns="0" bIns="0" rtlCol="0" anchor="ctr"/>
-          <a:lstStyle/>
+              <a:t>Tester</a:t>
+            </a:r>
+            <a:endParaRPr lang="en-US" sz="800" dirty="0"/>
+          </a:p>
           <a:p>
             <a:pPr algn="ctr" indent="0" marL="0">
-              <a:buNone/>
-            </a:pPr>
-            <a:r>
-              <a:rPr lang="en-US" sz="900" dirty="0">
-                <a:solidFill>
-                  <a:srgbClr val="F8FAFC"/>
-                </a:solidFill>
-                <a:latin typeface="Calibri" pitchFamily="34" charset="0"/>
-                <a:ea typeface="Calibri" pitchFamily="34" charset="-122"/>
-                <a:cs typeface="Calibri" pitchFamily="34" charset="-120"/>
-              </a:rPr>
-              <a:t>W2</a:t>
-            </a:r>
-            <a:endParaRPr lang="en-US" sz="900" dirty="0"/>
-          </a:p>
-        </p:txBody>
-      </p:sp>
-      <p:sp>
-        <p:nvSpPr>
-          <p:cNvPr id="14" name="Shape 12"/>
-          <p:cNvSpPr/>
-          <p:nvPr/>
-        </p:nvSpPr>
-        <p:spPr>
-          <a:xfrm>
-            <a:off x="3886200" y="1280160"/>
-            <a:ext cx="1463040" cy="594360"/>
+              <a:lnSpc>
+                <a:spcPct val="115000"/>
+              </a:lnSpc>
+              <a:buNone/>
+            </a:pPr>
+            <a:r>
+              <a:rPr lang="en-US" sz="800" b="1" dirty="0">
+                <a:solidFill>
+                  <a:srgbClr val="FFFFFF"/>
+                </a:solidFill>
+                <a:latin typeface="Calibri" pitchFamily="34" charset="0"/>
+                <a:ea typeface="Calibri" pitchFamily="34" charset="-122"/>
+                <a:cs typeface="Calibri" pitchFamily="34" charset="-120"/>
+              </a:rPr>
+              <a:t>(239 lines)</a:t>
+            </a:r>
+            <a:endParaRPr lang="en-US" sz="800" dirty="0"/>
+          </a:p>
+        </p:txBody>
+      </p:sp>
+      <p:sp>
+        <p:nvSpPr>
+          <p:cNvPr id="68" name="Shape 66"/>
+          <p:cNvSpPr/>
+          <p:nvPr/>
+        </p:nvSpPr>
+        <p:spPr>
+          <a:xfrm>
+            <a:off x="7827264" y="2852928"/>
+            <a:ext cx="886968" cy="502920"/>
           </a:xfrm>
           <a:prstGeom prst="rect">
             <a:avLst/>
@@ -2553,9 +4736,9 @@
           </a:solidFill>
           <a:ln/>
           <a:effectLst>
-            <a:outerShdw sx="100000" sy="100000" kx="0" ky="0" algn="bl" rotWithShape="0" blurRad="76200" dist="25400" dir="8100000">
+            <a:outerShdw sx="100000" sy="100000" kx="0" ky="0" algn="bl" rotWithShape="0" blurRad="38100" dist="12700" dir="8100000">
               <a:srgbClr val="94A3B8">
-                <a:alpha val="30000"/>
+                <a:alpha val="25000"/>
               </a:srgbClr>
             </a:outerShdw>
           </a:effectLst>
@@ -2563,14 +4746,14 @@
       </p:sp>
       <p:sp>
         <p:nvSpPr>
-          <p:cNvPr id="15" name="Text 13"/>
-          <p:cNvSpPr/>
-          <p:nvPr/>
-        </p:nvSpPr>
-        <p:spPr>
-          <a:xfrm>
-            <a:off x="3959352" y="1298448"/>
-            <a:ext cx="1316736" cy="292608"/>
+          <p:cNvPr id="69" name="Text 67"/>
+          <p:cNvSpPr/>
+          <p:nvPr/>
+        </p:nvSpPr>
+        <p:spPr>
+          <a:xfrm>
+            <a:off x="7827264" y="2852928"/>
+            <a:ext cx="886968" cy="502920"/>
           </a:xfrm>
           <a:prstGeom prst="rect">
             <a:avLst/>
@@ -2583,10 +4766,13 @@
           <a:lstStyle/>
           <a:p>
             <a:pPr algn="ctr" indent="0" marL="0">
-              <a:buNone/>
-            </a:pPr>
-            <a:r>
-              <a:rPr lang="en-US" sz="1000" b="1" dirty="0">
+              <a:lnSpc>
+                <a:spcPct val="115000"/>
+              </a:lnSpc>
+              <a:buNone/>
+            </a:pPr>
+            <a:r>
+              <a:rPr lang="en-US" sz="800" b="1" dirty="0">
                 <a:solidFill>
                   <a:srgbClr val="FFFFFF"/>
                 </a:solidFill>
@@ -2594,73 +4780,319 @@
                 <a:ea typeface="Calibri" pitchFamily="34" charset="-122"/>
                 <a:cs typeface="Calibri" pitchFamily="34" charset="-120"/>
               </a:rPr>
-              <a:t>Pilot</a:t>
-            </a:r>
-            <a:endParaRPr lang="en-US" sz="1000" dirty="0"/>
-          </a:p>
-        </p:txBody>
-      </p:sp>
-      <p:sp>
-        <p:nvSpPr>
-          <p:cNvPr id="16" name="Text 14"/>
-          <p:cNvSpPr/>
-          <p:nvPr/>
-        </p:nvSpPr>
-        <p:spPr>
-          <a:xfrm>
-            <a:off x="3959352" y="1591056"/>
-            <a:ext cx="1316736" cy="228600"/>
-          </a:xfrm>
-          <a:prstGeom prst="rect">
-            <a:avLst/>
-          </a:prstGeom>
-          <a:noFill/>
-          <a:ln/>
-        </p:spPr>
-        <p:txBody>
-          <a:bodyPr wrap="square" lIns="0" tIns="0" rIns="0" bIns="0" rtlCol="0" anchor="ctr"/>
-          <a:lstStyle/>
+              <a:t>Reviewer</a:t>
+            </a:r>
+            <a:endParaRPr lang="en-US" sz="800" dirty="0"/>
+          </a:p>
           <a:p>
             <a:pPr algn="ctr" indent="0" marL="0">
-              <a:buNone/>
-            </a:pPr>
-            <a:r>
-              <a:rPr lang="en-US" sz="900" dirty="0">
-                <a:solidFill>
-                  <a:srgbClr val="F8FAFC"/>
-                </a:solidFill>
-                <a:latin typeface="Calibri" pitchFamily="34" charset="0"/>
-                <a:ea typeface="Calibri" pitchFamily="34" charset="-122"/>
-                <a:cs typeface="Calibri" pitchFamily="34" charset="-120"/>
-              </a:rPr>
-              <a:t>W2-3</a:t>
-            </a:r>
-            <a:endParaRPr lang="en-US" sz="900" dirty="0"/>
-          </a:p>
-        </p:txBody>
-      </p:sp>
-      <p:sp>
-        <p:nvSpPr>
-          <p:cNvPr id="17" name="Shape 15"/>
-          <p:cNvSpPr/>
-          <p:nvPr/>
-        </p:nvSpPr>
-        <p:spPr>
-          <a:xfrm>
-            <a:off x="5486400" y="1280160"/>
-            <a:ext cx="1005840" cy="594360"/>
+              <a:lnSpc>
+                <a:spcPct val="115000"/>
+              </a:lnSpc>
+              <a:buNone/>
+            </a:pPr>
+            <a:r>
+              <a:rPr lang="en-US" sz="800" b="1" dirty="0">
+                <a:solidFill>
+                  <a:srgbClr val="FFFFFF"/>
+                </a:solidFill>
+                <a:latin typeface="Calibri" pitchFamily="34" charset="0"/>
+                <a:ea typeface="Calibri" pitchFamily="34" charset="-122"/>
+                <a:cs typeface="Calibri" pitchFamily="34" charset="-120"/>
+              </a:rPr>
+              <a:t>(173 lines)</a:t>
+            </a:r>
+            <a:endParaRPr lang="en-US" sz="800" dirty="0"/>
+          </a:p>
+        </p:txBody>
+      </p:sp>
+      <p:sp>
+        <p:nvSpPr>
+          <p:cNvPr id="70" name="Shape 68"/>
+          <p:cNvSpPr/>
+          <p:nvPr/>
+        </p:nvSpPr>
+        <p:spPr>
+          <a:xfrm>
+            <a:off x="4892040" y="3456432"/>
+            <a:ext cx="1828800" cy="256032"/>
           </a:xfrm>
           <a:prstGeom prst="rect">
             <a:avLst/>
           </a:prstGeom>
           <a:solidFill>
-            <a:srgbClr val="0284C7"/>
+            <a:srgbClr val="FEF3C7"/>
           </a:solidFill>
+          <a:ln w="9525">
+            <a:solidFill>
+              <a:srgbClr val="FDE68A"/>
+            </a:solidFill>
+            <a:prstDash val="solid"/>
+          </a:ln>
+        </p:spPr>
+      </p:sp>
+      <p:sp>
+        <p:nvSpPr>
+          <p:cNvPr id="71" name="Text 69"/>
+          <p:cNvSpPr/>
+          <p:nvPr/>
+        </p:nvSpPr>
+        <p:spPr>
+          <a:xfrm>
+            <a:off x="4892040" y="3456432"/>
+            <a:ext cx="1828800" cy="256032"/>
+          </a:xfrm>
+          <a:prstGeom prst="rect">
+            <a:avLst/>
+          </a:prstGeom>
+          <a:noFill/>
+          <a:ln/>
+        </p:spPr>
+        <p:txBody>
+          <a:bodyPr wrap="square" lIns="0" tIns="0" rIns="0" bIns="0" rtlCol="0" anchor="ctr"/>
+          <a:lstStyle/>
+          <a:p>
+            <a:pPr algn="ctr" indent="0" marL="0">
+              <a:lnSpc>
+                <a:spcPct val="115000"/>
+              </a:lnSpc>
+              <a:buNone/>
+            </a:pPr>
+            <a:r>
+              <a:rPr lang="en-US" sz="650" b="1" dirty="0">
+                <a:solidFill>
+                  <a:srgbClr val="D97706"/>
+                </a:solidFill>
+                <a:latin typeface="Calibri" pitchFamily="34" charset="0"/>
+                <a:ea typeface="Calibri" pitchFamily="34" charset="-122"/>
+                <a:cs typeface="Calibri" pitchFamily="34" charset="-120"/>
+              </a:rPr>
+              <a:t>Context Engine (419 lines)</a:t>
+            </a:r>
+            <a:endParaRPr lang="en-US" sz="650" dirty="0"/>
+          </a:p>
+          <a:p>
+            <a:pPr algn="ctr" indent="0" marL="0">
+              <a:lnSpc>
+                <a:spcPct val="115000"/>
+              </a:lnSpc>
+              <a:buNone/>
+            </a:pPr>
+            <a:r>
+              <a:rPr lang="en-US" sz="650" b="1" dirty="0">
+                <a:solidFill>
+                  <a:srgbClr val="D97706"/>
+                </a:solidFill>
+                <a:latin typeface="Calibri" pitchFamily="34" charset="0"/>
+                <a:ea typeface="Calibri" pitchFamily="34" charset="-122"/>
+                <a:cs typeface="Calibri" pitchFamily="34" charset="-120"/>
+              </a:rPr>
+              <a:t>chunker + compressor + scorer</a:t>
+            </a:r>
+            <a:endParaRPr lang="en-US" sz="650" dirty="0"/>
+          </a:p>
+        </p:txBody>
+      </p:sp>
+      <p:sp>
+        <p:nvSpPr>
+          <p:cNvPr id="72" name="Shape 70"/>
+          <p:cNvSpPr/>
+          <p:nvPr/>
+        </p:nvSpPr>
+        <p:spPr>
+          <a:xfrm>
+            <a:off x="6812280" y="3456432"/>
+            <a:ext cx="1920240" cy="256032"/>
+          </a:xfrm>
+          <a:prstGeom prst="rect">
+            <a:avLst/>
+          </a:prstGeom>
+          <a:solidFill>
+            <a:srgbClr val="FEF3C7"/>
+          </a:solidFill>
+          <a:ln w="9525">
+            <a:solidFill>
+              <a:srgbClr val="FDE68A"/>
+            </a:solidFill>
+            <a:prstDash val="solid"/>
+          </a:ln>
+        </p:spPr>
+      </p:sp>
+      <p:sp>
+        <p:nvSpPr>
+          <p:cNvPr id="73" name="Text 71"/>
+          <p:cNvSpPr/>
+          <p:nvPr/>
+        </p:nvSpPr>
+        <p:spPr>
+          <a:xfrm>
+            <a:off x="6812280" y="3456432"/>
+            <a:ext cx="1920240" cy="256032"/>
+          </a:xfrm>
+          <a:prstGeom prst="rect">
+            <a:avLst/>
+          </a:prstGeom>
+          <a:noFill/>
+          <a:ln/>
+        </p:spPr>
+        <p:txBody>
+          <a:bodyPr wrap="square" lIns="0" tIns="0" rIns="0" bIns="0" rtlCol="0" anchor="ctr"/>
+          <a:lstStyle/>
+          <a:p>
+            <a:pPr algn="ctr" indent="0" marL="0">
+              <a:lnSpc>
+                <a:spcPct val="115000"/>
+              </a:lnSpc>
+              <a:buNone/>
+            </a:pPr>
+            <a:r>
+              <a:rPr lang="en-US" sz="650" b="1" dirty="0">
+                <a:solidFill>
+                  <a:srgbClr val="D97706"/>
+                </a:solidFill>
+                <a:latin typeface="Calibri" pitchFamily="34" charset="0"/>
+                <a:ea typeface="Calibri" pitchFamily="34" charset="-122"/>
+                <a:cs typeface="Calibri" pitchFamily="34" charset="-120"/>
+              </a:rPr>
+              <a:t>Custom Tools (385 lines)</a:t>
+            </a:r>
+            <a:endParaRPr lang="en-US" sz="650" dirty="0"/>
+          </a:p>
+          <a:p>
+            <a:pPr algn="ctr" indent="0" marL="0">
+              <a:lnSpc>
+                <a:spcPct val="115000"/>
+              </a:lnSpc>
+              <a:buNone/>
+            </a:pPr>
+            <a:r>
+              <a:rPr lang="en-US" sz="650" b="1" dirty="0">
+                <a:solidFill>
+                  <a:srgbClr val="D97706"/>
+                </a:solidFill>
+                <a:latin typeface="Calibri" pitchFamily="34" charset="0"/>
+                <a:ea typeface="Calibri" pitchFamily="34" charset="-122"/>
+                <a:cs typeface="Calibri" pitchFamily="34" charset="-120"/>
+              </a:rPr>
+              <a:t>AST + file I/O + test runner</a:t>
+            </a:r>
+            <a:endParaRPr lang="en-US" sz="650" dirty="0"/>
+          </a:p>
+        </p:txBody>
+      </p:sp>
+      <p:sp>
+        <p:nvSpPr>
+          <p:cNvPr id="74" name="Shape 72"/>
+          <p:cNvSpPr/>
+          <p:nvPr/>
+        </p:nvSpPr>
+        <p:spPr>
+          <a:xfrm>
+            <a:off x="7818120" y="2423160"/>
+            <a:ext cx="777240" cy="0"/>
+          </a:xfrm>
+          <a:prstGeom prst="line">
+            <a:avLst/>
+          </a:prstGeom>
+          <a:noFill/>
+          <a:ln w="15875">
+            <a:solidFill>
+              <a:srgbClr val="64748B"/>
+            </a:solidFill>
+            <a:prstDash val="solid"/>
+            <a:tailEnd type="triangle"/>
+          </a:ln>
+        </p:spPr>
+      </p:sp>
+      <p:sp>
+        <p:nvSpPr>
+          <p:cNvPr id="75" name="Shape 73"/>
+          <p:cNvSpPr/>
+          <p:nvPr/>
+        </p:nvSpPr>
+        <p:spPr>
+          <a:xfrm>
+            <a:off x="7863840" y="2313432"/>
+            <a:ext cx="868680" cy="109728"/>
+          </a:xfrm>
+          <a:prstGeom prst="rect">
+            <a:avLst/>
+          </a:prstGeom>
+          <a:solidFill>
+            <a:srgbClr val="F1F5F9"/>
+          </a:solidFill>
+          <a:ln w="9525">
+            <a:solidFill>
+              <a:srgbClr val="CBD5E1"/>
+            </a:solidFill>
+            <a:prstDash val="solid"/>
+          </a:ln>
+        </p:spPr>
+      </p:sp>
+      <p:sp>
+        <p:nvSpPr>
+          <p:cNvPr id="76" name="Text 74"/>
+          <p:cNvSpPr/>
+          <p:nvPr/>
+        </p:nvSpPr>
+        <p:spPr>
+          <a:xfrm>
+            <a:off x="7863840" y="2313432"/>
+            <a:ext cx="868680" cy="109728"/>
+          </a:xfrm>
+          <a:prstGeom prst="rect">
+            <a:avLst/>
+          </a:prstGeom>
+          <a:noFill/>
+          <a:ln/>
+        </p:spPr>
+        <p:txBody>
+          <a:bodyPr wrap="square" lIns="0" tIns="0" rIns="0" bIns="0" rtlCol="0" anchor="ctr"/>
+          <a:lstStyle/>
+          <a:p>
+            <a:pPr algn="ctr" indent="0" marL="0">
+              <a:lnSpc>
+                <a:spcPct val="115000"/>
+              </a:lnSpc>
+              <a:buNone/>
+            </a:pPr>
+            <a:r>
+              <a:rPr lang="en-US" sz="600" dirty="0">
+                <a:solidFill>
+                  <a:srgbClr val="64748B"/>
+                </a:solidFill>
+                <a:latin typeface="Calibri" pitchFamily="34" charset="0"/>
+                <a:ea typeface="Calibri" pitchFamily="34" charset="-122"/>
+                <a:cs typeface="Calibri" pitchFamily="34" charset="-120"/>
+              </a:rPr>
+              <a:t>git clone (PAT)</a:t>
+            </a:r>
+            <a:endParaRPr lang="en-US" sz="600" dirty="0"/>
+          </a:p>
+        </p:txBody>
+      </p:sp>
+      <p:sp>
+        <p:nvSpPr>
+          <p:cNvPr id="77" name="Shape 75"/>
+          <p:cNvSpPr/>
+          <p:nvPr/>
+        </p:nvSpPr>
+        <p:spPr>
+          <a:xfrm>
+            <a:off x="4754880" y="3840480"/>
+            <a:ext cx="1005840" cy="347472"/>
+          </a:xfrm>
+          <a:prstGeom prst="rect">
+            <a:avLst/>
+          </a:prstGeom>
+          <a:solidFill>
+            <a:srgbClr val="0C4A6E"/>
+          </a:solidFill>
           <a:ln/>
           <a:effectLst>
-            <a:outerShdw sx="100000" sy="100000" kx="0" ky="0" algn="bl" rotWithShape="0" blurRad="76200" dist="25400" dir="8100000">
+            <a:outerShdw sx="100000" sy="100000" kx="0" ky="0" algn="bl" rotWithShape="0" blurRad="38100" dist="12700" dir="8100000">
               <a:srgbClr val="94A3B8">
-                <a:alpha val="30000"/>
+                <a:alpha val="25000"/>
               </a:srgbClr>
             </a:outerShdw>
           </a:effectLst>
@@ -2668,14 +5100,14 @@
       </p:sp>
       <p:sp>
         <p:nvSpPr>
-          <p:cNvPr id="18" name="Text 16"/>
-          <p:cNvSpPr/>
-          <p:nvPr/>
-        </p:nvSpPr>
-        <p:spPr>
-          <a:xfrm>
-            <a:off x="5559552" y="1298448"/>
-            <a:ext cx="859536" cy="292608"/>
+          <p:cNvPr id="78" name="Text 76"/>
+          <p:cNvSpPr/>
+          <p:nvPr/>
+        </p:nvSpPr>
+        <p:spPr>
+          <a:xfrm>
+            <a:off x="4754880" y="3840480"/>
+            <a:ext cx="1005840" cy="347472"/>
           </a:xfrm>
           <a:prstGeom prst="rect">
             <a:avLst/>
@@ -2688,10 +5120,13 @@
           <a:lstStyle/>
           <a:p>
             <a:pPr algn="ctr" indent="0" marL="0">
-              <a:buNone/>
-            </a:pPr>
-            <a:r>
-              <a:rPr lang="en-US" sz="1000" b="1" dirty="0">
+              <a:lnSpc>
+                <a:spcPct val="115000"/>
+              </a:lnSpc>
+              <a:buNone/>
+            </a:pPr>
+            <a:r>
+              <a:rPr lang="en-US" sz="800" b="1" dirty="0">
                 <a:solidFill>
                   <a:srgbClr val="FFFFFF"/>
                 </a:solidFill>
@@ -2699,210 +5134,54 @@
                 <a:ea typeface="Calibri" pitchFamily="34" charset="-122"/>
                 <a:cs typeface="Calibri" pitchFamily="34" charset="-120"/>
               </a:rPr>
-              <a:t>Refine</a:t>
-            </a:r>
-            <a:endParaRPr lang="en-US" sz="1000" dirty="0"/>
-          </a:p>
-        </p:txBody>
-      </p:sp>
-      <p:sp>
-        <p:nvSpPr>
-          <p:cNvPr id="19" name="Text 17"/>
-          <p:cNvSpPr/>
-          <p:nvPr/>
-        </p:nvSpPr>
-        <p:spPr>
-          <a:xfrm>
-            <a:off x="5559552" y="1591056"/>
-            <a:ext cx="859536" cy="228600"/>
-          </a:xfrm>
-          <a:prstGeom prst="rect">
-            <a:avLst/>
-          </a:prstGeom>
-          <a:noFill/>
-          <a:ln/>
-        </p:spPr>
-        <p:txBody>
-          <a:bodyPr wrap="square" lIns="0" tIns="0" rIns="0" bIns="0" rtlCol="0" anchor="ctr"/>
-          <a:lstStyle/>
+              <a:t>Azure OpenAI</a:t>
+            </a:r>
+            <a:endParaRPr lang="en-US" sz="800" dirty="0"/>
+          </a:p>
           <a:p>
             <a:pPr algn="ctr" indent="0" marL="0">
-              <a:buNone/>
-            </a:pPr>
-            <a:r>
-              <a:rPr lang="en-US" sz="900" dirty="0">
-                <a:solidFill>
-                  <a:srgbClr val="F8FAFC"/>
-                </a:solidFill>
-                <a:latin typeface="Calibri" pitchFamily="34" charset="0"/>
-                <a:ea typeface="Calibri" pitchFamily="34" charset="-122"/>
-                <a:cs typeface="Calibri" pitchFamily="34" charset="-120"/>
-              </a:rPr>
-              <a:t>W3</a:t>
-            </a:r>
-            <a:endParaRPr lang="en-US" sz="900" dirty="0"/>
-          </a:p>
-        </p:txBody>
-      </p:sp>
-      <p:sp>
-        <p:nvSpPr>
-          <p:cNvPr id="20" name="Shape 18"/>
-          <p:cNvSpPr/>
-          <p:nvPr/>
-        </p:nvSpPr>
-        <p:spPr>
-          <a:xfrm>
-            <a:off x="7315200" y="1325880"/>
-            <a:ext cx="1371600" cy="502920"/>
+              <a:lnSpc>
+                <a:spcPct val="115000"/>
+              </a:lnSpc>
+              <a:buNone/>
+            </a:pPr>
+            <a:r>
+              <a:rPr lang="en-US" sz="800" b="1" dirty="0">
+                <a:solidFill>
+                  <a:srgbClr val="FFFFFF"/>
+                </a:solidFill>
+                <a:latin typeface="Calibri" pitchFamily="34" charset="0"/>
+                <a:ea typeface="Calibri" pitchFamily="34" charset="-122"/>
+                <a:cs typeface="Calibri" pitchFamily="34" charset="-120"/>
+              </a:rPr>
+              <a:t>(gpt-4o)</a:t>
+            </a:r>
+            <a:endParaRPr lang="en-US" sz="800" dirty="0"/>
+          </a:p>
+        </p:txBody>
+      </p:sp>
+      <p:sp>
+        <p:nvSpPr>
+          <p:cNvPr id="79" name="Shape 77"/>
+          <p:cNvSpPr/>
+          <p:nvPr/>
+        </p:nvSpPr>
+        <p:spPr>
+          <a:xfrm>
+            <a:off x="5852160" y="3840480"/>
+            <a:ext cx="914400" cy="347472"/>
           </a:xfrm>
           <a:prstGeom prst="rect">
             <a:avLst/>
           </a:prstGeom>
           <a:solidFill>
-            <a:srgbClr val="FFFFFF"/>
+            <a:srgbClr val="7C3AED"/>
           </a:solidFill>
           <a:ln/>
-        </p:spPr>
-      </p:sp>
-      <p:sp>
-        <p:nvSpPr>
-          <p:cNvPr id="21" name="Text 19"/>
-          <p:cNvSpPr/>
-          <p:nvPr/>
-        </p:nvSpPr>
-        <p:spPr>
-          <a:xfrm>
-            <a:off x="7315200" y="1344168"/>
-            <a:ext cx="1371600" cy="274320"/>
-          </a:xfrm>
-          <a:prstGeom prst="rect">
-            <a:avLst/>
-          </a:prstGeom>
-          <a:noFill/>
-          <a:ln/>
-        </p:spPr>
-        <p:txBody>
-          <a:bodyPr wrap="square" lIns="0" tIns="0" rIns="0" bIns="0" rtlCol="0" anchor="ctr"/>
-          <a:lstStyle/>
-          <a:p>
-            <a:pPr algn="ctr" indent="0" marL="0">
-              <a:buNone/>
-            </a:pPr>
-            <a:r>
-              <a:rPr lang="en-US" sz="1800" b="1" dirty="0">
-                <a:solidFill>
-                  <a:srgbClr val="0284C7"/>
-                </a:solidFill>
-                <a:latin typeface="Trebuchet MS" pitchFamily="34" charset="0"/>
-                <a:ea typeface="Trebuchet MS" pitchFamily="34" charset="-122"/>
-                <a:cs typeface="Trebuchet MS" pitchFamily="34" charset="-120"/>
-              </a:rPr>
-              <a:t>3 weeks</a:t>
-            </a:r>
-            <a:endParaRPr lang="en-US" sz="1800" dirty="0"/>
-          </a:p>
-        </p:txBody>
-      </p:sp>
-      <p:sp>
-        <p:nvSpPr>
-          <p:cNvPr id="22" name="Text 20"/>
-          <p:cNvSpPr/>
-          <p:nvPr/>
-        </p:nvSpPr>
-        <p:spPr>
-          <a:xfrm>
-            <a:off x="7315200" y="1618488"/>
-            <a:ext cx="1371600" cy="182880"/>
-          </a:xfrm>
-          <a:prstGeom prst="rect">
-            <a:avLst/>
-          </a:prstGeom>
-          <a:noFill/>
-          <a:ln/>
-        </p:spPr>
-        <p:txBody>
-          <a:bodyPr wrap="square" lIns="0" tIns="0" rIns="0" bIns="0" rtlCol="0" anchor="ctr"/>
-          <a:lstStyle/>
-          <a:p>
-            <a:pPr algn="ctr" indent="0" marL="0">
-              <a:buNone/>
-            </a:pPr>
-            <a:r>
-              <a:rPr lang="en-US" sz="1000" dirty="0">
-                <a:solidFill>
-                  <a:srgbClr val="475569"/>
-                </a:solidFill>
-                <a:latin typeface="Calibri" pitchFamily="34" charset="0"/>
-                <a:ea typeface="Calibri" pitchFamily="34" charset="-122"/>
-                <a:cs typeface="Calibri" pitchFamily="34" charset="-120"/>
-              </a:rPr>
-              <a:t>total</a:t>
-            </a:r>
-            <a:endParaRPr lang="en-US" sz="1000" dirty="0"/>
-          </a:p>
-        </p:txBody>
-      </p:sp>
-      <p:sp>
-        <p:nvSpPr>
-          <p:cNvPr id="23" name="Text 21"/>
-          <p:cNvSpPr/>
-          <p:nvPr/>
-        </p:nvSpPr>
-        <p:spPr>
-          <a:xfrm>
-            <a:off x="731520" y="2194560"/>
-            <a:ext cx="3657600" cy="274320"/>
-          </a:xfrm>
-          <a:prstGeom prst="rect">
-            <a:avLst/>
-          </a:prstGeom>
-          <a:noFill/>
-          <a:ln/>
-        </p:spPr>
-        <p:txBody>
-          <a:bodyPr wrap="square" lIns="0" tIns="0" rIns="0" bIns="0" rtlCol="0" anchor="ctr"/>
-          <a:lstStyle/>
-          <a:p>
-            <a:pPr indent="0" marL="0">
-              <a:buNone/>
-            </a:pPr>
-            <a:r>
-              <a:rPr lang="en-US" sz="1200" b="1" dirty="0">
-                <a:solidFill>
-                  <a:srgbClr val="D97706"/>
-                </a:solidFill>
-                <a:latin typeface="Trebuchet MS" pitchFamily="34" charset="0"/>
-                <a:ea typeface="Trebuchet MS" pitchFamily="34" charset="-122"/>
-                <a:cs typeface="Trebuchet MS" pitchFamily="34" charset="-120"/>
-              </a:rPr>
-              <a:t>OPTION 2: MS AGENT FRAMEWORK</a:t>
-            </a:r>
-            <a:endParaRPr lang="en-US" sz="1200" dirty="0"/>
-          </a:p>
-        </p:txBody>
-      </p:sp>
-      <p:sp>
-        <p:nvSpPr>
-          <p:cNvPr id="24" name="Shape 22"/>
-          <p:cNvSpPr/>
-          <p:nvPr/>
-        </p:nvSpPr>
-        <p:spPr>
-          <a:xfrm>
-            <a:off x="457200" y="2606040"/>
-            <a:ext cx="1097280" cy="594360"/>
-          </a:xfrm>
-          <a:prstGeom prst="rect">
-            <a:avLst/>
-          </a:prstGeom>
-          <a:solidFill>
-            <a:srgbClr val="D97706"/>
-          </a:solidFill>
-          <a:ln/>
           <a:effectLst>
-            <a:outerShdw sx="100000" sy="100000" kx="0" ky="0" algn="bl" rotWithShape="0" blurRad="76200" dist="25400" dir="8100000">
+            <a:outerShdw sx="100000" sy="100000" kx="0" ky="0" algn="bl" rotWithShape="0" blurRad="38100" dist="12700" dir="8100000">
               <a:srgbClr val="94A3B8">
-                <a:alpha val="30000"/>
+                <a:alpha val="25000"/>
               </a:srgbClr>
             </a:outerShdw>
           </a:effectLst>
@@ -2910,14 +5189,14 @@
       </p:sp>
       <p:sp>
         <p:nvSpPr>
-          <p:cNvPr id="25" name="Text 23"/>
-          <p:cNvSpPr/>
-          <p:nvPr/>
-        </p:nvSpPr>
-        <p:spPr>
-          <a:xfrm>
-            <a:off x="530352" y="2624328"/>
-            <a:ext cx="950976" cy="292608"/>
+          <p:cNvPr id="80" name="Text 78"/>
+          <p:cNvSpPr/>
+          <p:nvPr/>
+        </p:nvSpPr>
+        <p:spPr>
+          <a:xfrm>
+            <a:off x="5852160" y="3840480"/>
+            <a:ext cx="914400" cy="347472"/>
           </a:xfrm>
           <a:prstGeom prst="rect">
             <a:avLst/>
@@ -2930,10 +5209,13 @@
           <a:lstStyle/>
           <a:p>
             <a:pPr algn="ctr" indent="0" marL="0">
-              <a:buNone/>
-            </a:pPr>
-            <a:r>
-              <a:rPr lang="en-US" sz="1000" b="1" dirty="0">
+              <a:lnSpc>
+                <a:spcPct val="115000"/>
+              </a:lnSpc>
+              <a:buNone/>
+            </a:pPr>
+            <a:r>
+              <a:rPr lang="en-US" sz="800" b="1" dirty="0">
                 <a:solidFill>
                   <a:srgbClr val="FFFFFF"/>
                 </a:solidFill>
@@ -2941,88 +5223,67 @@
                 <a:ea typeface="Calibri" pitchFamily="34" charset="-122"/>
                 <a:cs typeface="Calibri" pitchFamily="34" charset="-120"/>
               </a:rPr>
-              <a:t>Setup &amp; Learn</a:t>
-            </a:r>
-            <a:endParaRPr lang="en-US" sz="1000" dirty="0"/>
-          </a:p>
-        </p:txBody>
-      </p:sp>
-      <p:sp>
-        <p:nvSpPr>
-          <p:cNvPr id="26" name="Text 24"/>
-          <p:cNvSpPr/>
-          <p:nvPr/>
-        </p:nvSpPr>
-        <p:spPr>
-          <a:xfrm>
-            <a:off x="530352" y="2916936"/>
-            <a:ext cx="950976" cy="228600"/>
-          </a:xfrm>
-          <a:prstGeom prst="rect">
-            <a:avLst/>
-          </a:prstGeom>
-          <a:noFill/>
-          <a:ln/>
-        </p:spPr>
-        <p:txBody>
-          <a:bodyPr wrap="square" lIns="0" tIns="0" rIns="0" bIns="0" rtlCol="0" anchor="ctr"/>
-          <a:lstStyle/>
+              <a:t>SQLite</a:t>
+            </a:r>
+            <a:endParaRPr lang="en-US" sz="800" dirty="0"/>
+          </a:p>
           <a:p>
             <a:pPr algn="ctr" indent="0" marL="0">
-              <a:buNone/>
-            </a:pPr>
-            <a:r>
-              <a:rPr lang="en-US" sz="900" dirty="0">
-                <a:solidFill>
-                  <a:srgbClr val="F8FAFC"/>
-                </a:solidFill>
-                <a:latin typeface="Calibri" pitchFamily="34" charset="0"/>
-                <a:ea typeface="Calibri" pitchFamily="34" charset="-122"/>
-                <a:cs typeface="Calibri" pitchFamily="34" charset="-120"/>
-              </a:rPr>
-              <a:t>W1-2</a:t>
-            </a:r>
-            <a:endParaRPr lang="en-US" sz="900" dirty="0"/>
-          </a:p>
-        </p:txBody>
-      </p:sp>
-      <p:sp>
-        <p:nvSpPr>
-          <p:cNvPr id="27" name="Shape 25"/>
-          <p:cNvSpPr/>
-          <p:nvPr/>
-        </p:nvSpPr>
-        <p:spPr>
-          <a:xfrm>
-            <a:off x="1691640" y="2606040"/>
-            <a:ext cx="1737360" cy="594360"/>
+              <a:lnSpc>
+                <a:spcPct val="115000"/>
+              </a:lnSpc>
+              <a:buNone/>
+            </a:pPr>
+            <a:r>
+              <a:rPr lang="en-US" sz="800" b="1" dirty="0">
+                <a:solidFill>
+                  <a:srgbClr val="FFFFFF"/>
+                </a:solidFill>
+                <a:latin typeface="Calibri" pitchFamily="34" charset="0"/>
+                <a:ea typeface="Calibri" pitchFamily="34" charset="-122"/>
+                <a:cs typeface="Calibri" pitchFamily="34" charset="-120"/>
+              </a:rPr>
+              <a:t>(migration.db)</a:t>
+            </a:r>
+            <a:endParaRPr lang="en-US" sz="800" dirty="0"/>
+          </a:p>
+        </p:txBody>
+      </p:sp>
+      <p:sp>
+        <p:nvSpPr>
+          <p:cNvPr id="81" name="Shape 79"/>
+          <p:cNvSpPr/>
+          <p:nvPr/>
+        </p:nvSpPr>
+        <p:spPr>
+          <a:xfrm>
+            <a:off x="6858000" y="3840480"/>
+            <a:ext cx="868680" cy="347472"/>
           </a:xfrm>
           <a:prstGeom prst="rect">
             <a:avLst/>
           </a:prstGeom>
           <a:solidFill>
-            <a:srgbClr val="7C3AED"/>
+            <a:srgbClr val="ECFDF5"/>
           </a:solidFill>
-          <a:ln/>
-          <a:effectLst>
-            <a:outerShdw sx="100000" sy="100000" kx="0" ky="0" algn="bl" rotWithShape="0" blurRad="76200" dist="25400" dir="8100000">
-              <a:srgbClr val="94A3B8">
-                <a:alpha val="30000"/>
-              </a:srgbClr>
-            </a:outerShdw>
-          </a:effectLst>
-        </p:spPr>
-      </p:sp>
-      <p:sp>
-        <p:nvSpPr>
-          <p:cNvPr id="28" name="Text 26"/>
-          <p:cNvSpPr/>
-          <p:nvPr/>
-        </p:nvSpPr>
-        <p:spPr>
-          <a:xfrm>
-            <a:off x="1764792" y="2624328"/>
-            <a:ext cx="1591056" cy="292608"/>
+          <a:ln w="9525">
+            <a:solidFill>
+              <a:srgbClr val="A7F3D0"/>
+            </a:solidFill>
+            <a:prstDash val="solid"/>
+          </a:ln>
+        </p:spPr>
+      </p:sp>
+      <p:sp>
+        <p:nvSpPr>
+          <p:cNvPr id="82" name="Text 80"/>
+          <p:cNvSpPr/>
+          <p:nvPr/>
+        </p:nvSpPr>
+        <p:spPr>
+          <a:xfrm>
+            <a:off x="6858000" y="3840480"/>
+            <a:ext cx="868680" cy="347472"/>
           </a:xfrm>
           <a:prstGeom prst="rect">
             <a:avLst/>
@@ -3035,99 +5296,81 @@
           <a:lstStyle/>
           <a:p>
             <a:pPr algn="ctr" indent="0" marL="0">
-              <a:buNone/>
-            </a:pPr>
-            <a:r>
-              <a:rPr lang="en-US" sz="1000" b="1" dirty="0">
-                <a:solidFill>
-                  <a:srgbClr val="FFFFFF"/>
-                </a:solidFill>
-                <a:latin typeface="Calibri" pitchFamily="34" charset="0"/>
-                <a:ea typeface="Calibri" pitchFamily="34" charset="-122"/>
-                <a:cs typeface="Calibri" pitchFamily="34" charset="-120"/>
-              </a:rPr>
-              <a:t>Adapt Agents</a:t>
-            </a:r>
-            <a:endParaRPr lang="en-US" sz="1000" dirty="0"/>
-          </a:p>
-        </p:txBody>
-      </p:sp>
-      <p:sp>
-        <p:nvSpPr>
-          <p:cNvPr id="29" name="Text 27"/>
-          <p:cNvSpPr/>
-          <p:nvPr/>
-        </p:nvSpPr>
-        <p:spPr>
-          <a:xfrm>
-            <a:off x="1764792" y="2916936"/>
-            <a:ext cx="1591056" cy="228600"/>
-          </a:xfrm>
-          <a:prstGeom prst="rect">
-            <a:avLst/>
-          </a:prstGeom>
-          <a:noFill/>
-          <a:ln/>
-        </p:spPr>
-        <p:txBody>
-          <a:bodyPr wrap="square" lIns="0" tIns="0" rIns="0" bIns="0" rtlCol="0" anchor="ctr"/>
-          <a:lstStyle/>
+              <a:lnSpc>
+                <a:spcPct val="115000"/>
+              </a:lnSpc>
+              <a:buNone/>
+            </a:pPr>
+            <a:r>
+              <a:rPr lang="en-US" sz="700" dirty="0">
+                <a:solidFill>
+                  <a:srgbClr val="059669"/>
+                </a:solidFill>
+                <a:latin typeface="Calibri" pitchFamily="34" charset="0"/>
+                <a:ea typeface="Calibri" pitchFamily="34" charset="-122"/>
+                <a:cs typeface="Calibri" pitchFamily="34" charset="-120"/>
+              </a:rPr>
+              <a:t>Azure Blob</a:t>
+            </a:r>
+            <a:endParaRPr lang="en-US" sz="700" dirty="0"/>
+          </a:p>
           <a:p>
             <a:pPr algn="ctr" indent="0" marL="0">
-              <a:buNone/>
-            </a:pPr>
-            <a:r>
-              <a:rPr lang="en-US" sz="900" dirty="0">
-                <a:solidFill>
-                  <a:srgbClr val="F8FAFC"/>
-                </a:solidFill>
-                <a:latin typeface="Calibri" pitchFamily="34" charset="0"/>
-                <a:ea typeface="Calibri" pitchFamily="34" charset="-122"/>
-                <a:cs typeface="Calibri" pitchFamily="34" charset="-120"/>
-              </a:rPr>
-              <a:t>W3-6</a:t>
-            </a:r>
-            <a:endParaRPr lang="en-US" sz="900" dirty="0"/>
-          </a:p>
-        </p:txBody>
-      </p:sp>
-      <p:sp>
-        <p:nvSpPr>
-          <p:cNvPr id="30" name="Shape 28"/>
-          <p:cNvSpPr/>
-          <p:nvPr/>
-        </p:nvSpPr>
-        <p:spPr>
-          <a:xfrm>
-            <a:off x="3566160" y="2606040"/>
-            <a:ext cx="1005840" cy="594360"/>
+              <a:lnSpc>
+                <a:spcPct val="115000"/>
+              </a:lnSpc>
+              <a:buNone/>
+            </a:pPr>
+            <a:r>
+              <a:rPr lang="en-US" sz="700" dirty="0">
+                <a:solidFill>
+                  <a:srgbClr val="059669"/>
+                </a:solidFill>
+                <a:latin typeface="Calibri" pitchFamily="34" charset="0"/>
+                <a:ea typeface="Calibri" pitchFamily="34" charset="-122"/>
+                <a:cs typeface="Calibri" pitchFamily="34" charset="-120"/>
+              </a:rPr>
+              <a:t>(state sync)</a:t>
+            </a:r>
+            <a:endParaRPr lang="en-US" sz="700" dirty="0"/>
+          </a:p>
+        </p:txBody>
+      </p:sp>
+      <p:sp>
+        <p:nvSpPr>
+          <p:cNvPr id="83" name="Shape 81"/>
+          <p:cNvSpPr/>
+          <p:nvPr/>
+        </p:nvSpPr>
+        <p:spPr>
+          <a:xfrm>
+            <a:off x="7818120" y="3840480"/>
+            <a:ext cx="640080" cy="347472"/>
           </a:xfrm>
           <a:prstGeom prst="rect">
             <a:avLst/>
           </a:prstGeom>
           <a:solidFill>
-            <a:srgbClr val="059669"/>
+            <a:srgbClr val="F1F5F9"/>
           </a:solidFill>
-          <a:ln/>
-          <a:effectLst>
-            <a:outerShdw sx="100000" sy="100000" kx="0" ky="0" algn="bl" rotWithShape="0" blurRad="76200" dist="25400" dir="8100000">
-              <a:srgbClr val="94A3B8">
-                <a:alpha val="30000"/>
-              </a:srgbClr>
-            </a:outerShdw>
-          </a:effectLst>
-        </p:spPr>
-      </p:sp>
-      <p:sp>
-        <p:nvSpPr>
-          <p:cNvPr id="31" name="Text 29"/>
-          <p:cNvSpPr/>
-          <p:nvPr/>
-        </p:nvSpPr>
-        <p:spPr>
-          <a:xfrm>
-            <a:off x="3639312" y="2624328"/>
-            <a:ext cx="859536" cy="292608"/>
+          <a:ln w="9525">
+            <a:solidFill>
+              <a:srgbClr val="CBD5E1"/>
+            </a:solidFill>
+            <a:prstDash val="solid"/>
+          </a:ln>
+        </p:spPr>
+      </p:sp>
+      <p:sp>
+        <p:nvSpPr>
+          <p:cNvPr id="84" name="Text 82"/>
+          <p:cNvSpPr/>
+          <p:nvPr/>
+        </p:nvSpPr>
+        <p:spPr>
+          <a:xfrm>
+            <a:off x="7818120" y="3840480"/>
+            <a:ext cx="640080" cy="347472"/>
           </a:xfrm>
           <a:prstGeom prst="rect">
             <a:avLst/>
@@ -3140,99 +5383,81 @@
           <a:lstStyle/>
           <a:p>
             <a:pPr algn="ctr" indent="0" marL="0">
-              <a:buNone/>
-            </a:pPr>
-            <a:r>
-              <a:rPr lang="en-US" sz="1000" b="1" dirty="0">
-                <a:solidFill>
-                  <a:srgbClr val="FFFFFF"/>
-                </a:solidFill>
-                <a:latin typeface="Calibri" pitchFamily="34" charset="0"/>
-                <a:ea typeface="Calibri" pitchFamily="34" charset="-122"/>
-                <a:cs typeface="Calibri" pitchFamily="34" charset="-120"/>
-              </a:rPr>
-              <a:t>ADO Integ.</a:t>
-            </a:r>
-            <a:endParaRPr lang="en-US" sz="1000" dirty="0"/>
-          </a:p>
-        </p:txBody>
-      </p:sp>
-      <p:sp>
-        <p:nvSpPr>
-          <p:cNvPr id="32" name="Text 30"/>
-          <p:cNvSpPr/>
-          <p:nvPr/>
-        </p:nvSpPr>
-        <p:spPr>
-          <a:xfrm>
-            <a:off x="3639312" y="2916936"/>
-            <a:ext cx="859536" cy="228600"/>
-          </a:xfrm>
-          <a:prstGeom prst="rect">
-            <a:avLst/>
-          </a:prstGeom>
-          <a:noFill/>
-          <a:ln/>
-        </p:spPr>
-        <p:txBody>
-          <a:bodyPr wrap="square" lIns="0" tIns="0" rIns="0" bIns="0" rtlCol="0" anchor="ctr"/>
-          <a:lstStyle/>
+              <a:lnSpc>
+                <a:spcPct val="115000"/>
+              </a:lnSpc>
+              <a:buNone/>
+            </a:pPr>
+            <a:r>
+              <a:rPr lang="en-US" sz="700" dirty="0">
+                <a:solidFill>
+                  <a:srgbClr val="64748B"/>
+                </a:solidFill>
+                <a:latin typeface="Calibri" pitchFamily="34" charset="0"/>
+                <a:ea typeface="Calibri" pitchFamily="34" charset="-122"/>
+                <a:cs typeface="Calibri" pitchFamily="34" charset="-120"/>
+              </a:rPr>
+              <a:t>Managed</a:t>
+            </a:r>
+            <a:endParaRPr lang="en-US" sz="700" dirty="0"/>
+          </a:p>
           <a:p>
             <a:pPr algn="ctr" indent="0" marL="0">
-              <a:buNone/>
-            </a:pPr>
-            <a:r>
-              <a:rPr lang="en-US" sz="900" dirty="0">
-                <a:solidFill>
-                  <a:srgbClr val="F8FAFC"/>
-                </a:solidFill>
-                <a:latin typeface="Calibri" pitchFamily="34" charset="0"/>
-                <a:ea typeface="Calibri" pitchFamily="34" charset="-122"/>
-                <a:cs typeface="Calibri" pitchFamily="34" charset="-120"/>
-              </a:rPr>
-              <a:t>W7-8</a:t>
-            </a:r>
-            <a:endParaRPr lang="en-US" sz="900" dirty="0"/>
-          </a:p>
-        </p:txBody>
-      </p:sp>
-      <p:sp>
-        <p:nvSpPr>
-          <p:cNvPr id="33" name="Shape 31"/>
-          <p:cNvSpPr/>
-          <p:nvPr/>
-        </p:nvSpPr>
-        <p:spPr>
-          <a:xfrm>
-            <a:off x="4709160" y="2606040"/>
-            <a:ext cx="1188720" cy="594360"/>
+              <a:lnSpc>
+                <a:spcPct val="115000"/>
+              </a:lnSpc>
+              <a:buNone/>
+            </a:pPr>
+            <a:r>
+              <a:rPr lang="en-US" sz="700" dirty="0">
+                <a:solidFill>
+                  <a:srgbClr val="64748B"/>
+                </a:solidFill>
+                <a:latin typeface="Calibri" pitchFamily="34" charset="0"/>
+                <a:ea typeface="Calibri" pitchFamily="34" charset="-122"/>
+                <a:cs typeface="Calibri" pitchFamily="34" charset="-120"/>
+              </a:rPr>
+              <a:t>Identity</a:t>
+            </a:r>
+            <a:endParaRPr lang="en-US" sz="700" dirty="0"/>
+          </a:p>
+        </p:txBody>
+      </p:sp>
+      <p:sp>
+        <p:nvSpPr>
+          <p:cNvPr id="85" name="Shape 83"/>
+          <p:cNvSpPr/>
+          <p:nvPr/>
+        </p:nvSpPr>
+        <p:spPr>
+          <a:xfrm>
+            <a:off x="8503920" y="3840480"/>
+            <a:ext cx="365760" cy="347472"/>
           </a:xfrm>
           <a:prstGeom prst="rect">
             <a:avLst/>
           </a:prstGeom>
           <a:solidFill>
-            <a:srgbClr val="0284C7"/>
+            <a:srgbClr val="FEF2F2"/>
           </a:solidFill>
-          <a:ln/>
-          <a:effectLst>
-            <a:outerShdw sx="100000" sy="100000" kx="0" ky="0" algn="bl" rotWithShape="0" blurRad="76200" dist="25400" dir="8100000">
-              <a:srgbClr val="94A3B8">
-                <a:alpha val="30000"/>
-              </a:srgbClr>
-            </a:outerShdw>
-          </a:effectLst>
-        </p:spPr>
-      </p:sp>
-      <p:sp>
-        <p:nvSpPr>
-          <p:cNvPr id="34" name="Text 32"/>
-          <p:cNvSpPr/>
-          <p:nvPr/>
-        </p:nvSpPr>
-        <p:spPr>
-          <a:xfrm>
-            <a:off x="4782312" y="2624328"/>
-            <a:ext cx="1042416" cy="292608"/>
+          <a:ln w="9525">
+            <a:solidFill>
+              <a:srgbClr val="FECACA"/>
+            </a:solidFill>
+            <a:prstDash val="solid"/>
+          </a:ln>
+        </p:spPr>
+      </p:sp>
+      <p:sp>
+        <p:nvSpPr>
+          <p:cNvPr id="86" name="Text 84"/>
+          <p:cNvSpPr/>
+          <p:nvPr/>
+        </p:nvSpPr>
+        <p:spPr>
+          <a:xfrm>
+            <a:off x="8503920" y="3840480"/>
+            <a:ext cx="365760" cy="347472"/>
           </a:xfrm>
           <a:prstGeom prst="rect">
             <a:avLst/>
@@ -3245,99 +5470,56 @@
           <a:lstStyle/>
           <a:p>
             <a:pPr algn="ctr" indent="0" marL="0">
-              <a:buNone/>
-            </a:pPr>
-            <a:r>
-              <a:rPr lang="en-US" sz="1000" b="1" dirty="0">
-                <a:solidFill>
-                  <a:srgbClr val="FFFFFF"/>
-                </a:solidFill>
-                <a:latin typeface="Calibri" pitchFamily="34" charset="0"/>
-                <a:ea typeface="Calibri" pitchFamily="34" charset="-122"/>
-                <a:cs typeface="Calibri" pitchFamily="34" charset="-120"/>
-              </a:rPr>
-              <a:t>Pilot &amp; Debug</a:t>
-            </a:r>
-            <a:endParaRPr lang="en-US" sz="1000" dirty="0"/>
-          </a:p>
-        </p:txBody>
-      </p:sp>
-      <p:sp>
-        <p:nvSpPr>
-          <p:cNvPr id="35" name="Text 33"/>
-          <p:cNvSpPr/>
-          <p:nvPr/>
-        </p:nvSpPr>
-        <p:spPr>
-          <a:xfrm>
-            <a:off x="4782312" y="2916936"/>
-            <a:ext cx="1042416" cy="228600"/>
-          </a:xfrm>
-          <a:prstGeom prst="rect">
-            <a:avLst/>
-          </a:prstGeom>
-          <a:noFill/>
-          <a:ln/>
-        </p:spPr>
-        <p:txBody>
-          <a:bodyPr wrap="square" lIns="0" tIns="0" rIns="0" bIns="0" rtlCol="0" anchor="ctr"/>
-          <a:lstStyle/>
+              <a:lnSpc>
+                <a:spcPct val="115000"/>
+              </a:lnSpc>
+              <a:buNone/>
+            </a:pPr>
+            <a:r>
+              <a:rPr lang="en-US" sz="650" dirty="0">
+                <a:solidFill>
+                  <a:srgbClr val="DC2626"/>
+                </a:solidFill>
+                <a:latin typeface="Calibri" pitchFamily="34" charset="0"/>
+                <a:ea typeface="Calibri" pitchFamily="34" charset="-122"/>
+                <a:cs typeface="Calibri" pitchFamily="34" charset="-120"/>
+              </a:rPr>
+              <a:t>32 pip</a:t>
+            </a:r>
+            <a:endParaRPr lang="en-US" sz="650" dirty="0"/>
+          </a:p>
           <a:p>
             <a:pPr algn="ctr" indent="0" marL="0">
-              <a:buNone/>
-            </a:pPr>
-            <a:r>
-              <a:rPr lang="en-US" sz="900" dirty="0">
-                <a:solidFill>
-                  <a:srgbClr val="F8FAFC"/>
-                </a:solidFill>
-                <a:latin typeface="Calibri" pitchFamily="34" charset="0"/>
-                <a:ea typeface="Calibri" pitchFamily="34" charset="-122"/>
-                <a:cs typeface="Calibri" pitchFamily="34" charset="-120"/>
-              </a:rPr>
-              <a:t>W9-10</a:t>
-            </a:r>
-            <a:endParaRPr lang="en-US" sz="900" dirty="0"/>
-          </a:p>
-        </p:txBody>
-      </p:sp>
-      <p:sp>
-        <p:nvSpPr>
-          <p:cNvPr id="36" name="Shape 34"/>
-          <p:cNvSpPr/>
-          <p:nvPr/>
-        </p:nvSpPr>
-        <p:spPr>
-          <a:xfrm>
-            <a:off x="6035040" y="2606040"/>
-            <a:ext cx="822960" cy="594360"/>
-          </a:xfrm>
-          <a:prstGeom prst="rect">
-            <a:avLst/>
-          </a:prstGeom>
-          <a:solidFill>
-            <a:srgbClr val="D97706"/>
-          </a:solidFill>
-          <a:ln/>
-          <a:effectLst>
-            <a:outerShdw sx="100000" sy="100000" kx="0" ky="0" algn="bl" rotWithShape="0" blurRad="76200" dist="25400" dir="8100000">
-              <a:srgbClr val="94A3B8">
-                <a:alpha val="30000"/>
-              </a:srgbClr>
-            </a:outerShdw>
-          </a:effectLst>
-        </p:spPr>
-      </p:sp>
-      <p:sp>
-        <p:nvSpPr>
-          <p:cNvPr id="37" name="Text 35"/>
-          <p:cNvSpPr/>
-          <p:nvPr/>
-        </p:nvSpPr>
-        <p:spPr>
-          <a:xfrm>
-            <a:off x="6108192" y="2624328"/>
-            <a:ext cx="676656" cy="292608"/>
+              <a:lnSpc>
+                <a:spcPct val="115000"/>
+              </a:lnSpc>
+              <a:buNone/>
+            </a:pPr>
+            <a:r>
+              <a:rPr lang="en-US" sz="650" dirty="0">
+                <a:solidFill>
+                  <a:srgbClr val="DC2626"/>
+                </a:solidFill>
+                <a:latin typeface="Calibri" pitchFamily="34" charset="0"/>
+                <a:ea typeface="Calibri" pitchFamily="34" charset="-122"/>
+                <a:cs typeface="Calibri" pitchFamily="34" charset="-120"/>
+              </a:rPr>
+              <a:t>deps</a:t>
+            </a:r>
+            <a:endParaRPr lang="en-US" sz="650" dirty="0"/>
+          </a:p>
+        </p:txBody>
+      </p:sp>
+      <p:sp>
+        <p:nvSpPr>
+          <p:cNvPr id="87" name="Text 85"/>
+          <p:cNvSpPr/>
+          <p:nvPr/>
+        </p:nvSpPr>
+        <p:spPr>
+          <a:xfrm>
+            <a:off x="4754880" y="4279392"/>
+            <a:ext cx="4114800" cy="164592"/>
           </a:xfrm>
           <a:prstGeom prst="rect">
             <a:avLst/>
@@ -3353,30 +5535,30 @@
               <a:buNone/>
             </a:pPr>
             <a:r>
-              <a:rPr lang="en-US" sz="1000" b="1" dirty="0">
-                <a:solidFill>
-                  <a:srgbClr val="FFFFFF"/>
-                </a:solidFill>
-                <a:latin typeface="Calibri" pitchFamily="34" charset="0"/>
-                <a:ea typeface="Calibri" pitchFamily="34" charset="-122"/>
-                <a:cs typeface="Calibri" pitchFamily="34" charset="-120"/>
-              </a:rPr>
-              <a:t>Refine</a:t>
-            </a:r>
-            <a:endParaRPr lang="en-US" sz="1000" dirty="0"/>
-          </a:p>
-        </p:txBody>
-      </p:sp>
-      <p:sp>
-        <p:nvSpPr>
-          <p:cNvPr id="38" name="Text 36"/>
-          <p:cNvSpPr/>
-          <p:nvPr/>
-        </p:nvSpPr>
-        <p:spPr>
-          <a:xfrm>
-            <a:off x="6108192" y="2916936"/>
-            <a:ext cx="676656" cy="228600"/>
+              <a:rPr lang="en-US" sz="800" b="1" dirty="0">
+                <a:solidFill>
+                  <a:srgbClr val="D97706"/>
+                </a:solidFill>
+                <a:latin typeface="Calibri" pitchFamily="34" charset="0"/>
+                <a:ea typeface="Calibri" pitchFamily="34" charset="-122"/>
+                <a:cs typeface="Calibri" pitchFamily="34" charset="-120"/>
+              </a:rPr>
+              <a:t>Azure dependencies: 3 + SQLite + 32 pip packages</a:t>
+            </a:r>
+            <a:endParaRPr lang="en-US" sz="800" dirty="0"/>
+          </a:p>
+        </p:txBody>
+      </p:sp>
+      <p:sp>
+        <p:nvSpPr>
+          <p:cNvPr id="88" name="Text 86"/>
+          <p:cNvSpPr/>
+          <p:nvPr/>
+        </p:nvSpPr>
+        <p:spPr>
+          <a:xfrm>
+            <a:off x="4754880" y="4434840"/>
+            <a:ext cx="4114800" cy="137160"/>
           </a:xfrm>
           <a:prstGeom prst="rect">
             <a:avLst/>
@@ -3392,862 +5574,17 @@
               <a:buNone/>
             </a:pPr>
             <a:r>
-              <a:rPr lang="en-US" sz="900" dirty="0">
-                <a:solidFill>
-                  <a:srgbClr val="F8FAFC"/>
-                </a:solidFill>
-                <a:latin typeface="Calibri" pitchFamily="34" charset="0"/>
-                <a:ea typeface="Calibri" pitchFamily="34" charset="-122"/>
-                <a:cs typeface="Calibri" pitchFamily="34" charset="-120"/>
-              </a:rPr>
-              <a:t>W11-12</a:t>
-            </a:r>
-            <a:endParaRPr lang="en-US" sz="900" dirty="0"/>
-          </a:p>
-        </p:txBody>
-      </p:sp>
-      <p:sp>
-        <p:nvSpPr>
-          <p:cNvPr id="39" name="Shape 37"/>
-          <p:cNvSpPr/>
-          <p:nvPr/>
-        </p:nvSpPr>
-        <p:spPr>
-          <a:xfrm>
-            <a:off x="7315200" y="2651760"/>
-            <a:ext cx="1371600" cy="502920"/>
-          </a:xfrm>
-          <a:prstGeom prst="rect">
-            <a:avLst/>
-          </a:prstGeom>
-          <a:solidFill>
-            <a:srgbClr val="FFFFFF"/>
-          </a:solidFill>
-          <a:ln/>
-        </p:spPr>
-      </p:sp>
-      <p:sp>
-        <p:nvSpPr>
-          <p:cNvPr id="40" name="Text 38"/>
-          <p:cNvSpPr/>
-          <p:nvPr/>
-        </p:nvSpPr>
-        <p:spPr>
-          <a:xfrm>
-            <a:off x="7315200" y="2670048"/>
-            <a:ext cx="1371600" cy="274320"/>
-          </a:xfrm>
-          <a:prstGeom prst="rect">
-            <a:avLst/>
-          </a:prstGeom>
-          <a:noFill/>
-          <a:ln/>
-        </p:spPr>
-        <p:txBody>
-          <a:bodyPr wrap="square" lIns="0" tIns="0" rIns="0" bIns="0" rtlCol="0" anchor="ctr"/>
-          <a:lstStyle/>
-          <a:p>
-            <a:pPr algn="ctr" indent="0" marL="0">
-              <a:buNone/>
-            </a:pPr>
-            <a:r>
-              <a:rPr lang="en-US" sz="1800" b="1" dirty="0">
-                <a:solidFill>
-                  <a:srgbClr val="D97706"/>
-                </a:solidFill>
-                <a:latin typeface="Trebuchet MS" pitchFamily="34" charset="0"/>
-                <a:ea typeface="Trebuchet MS" pitchFamily="34" charset="-122"/>
-                <a:cs typeface="Trebuchet MS" pitchFamily="34" charset="-120"/>
-              </a:rPr>
-              <a:t>12 weeks</a:t>
-            </a:r>
-            <a:endParaRPr lang="en-US" sz="1800" dirty="0"/>
-          </a:p>
-        </p:txBody>
-      </p:sp>
-      <p:sp>
-        <p:nvSpPr>
-          <p:cNvPr id="41" name="Text 39"/>
-          <p:cNvSpPr/>
-          <p:nvPr/>
-        </p:nvSpPr>
-        <p:spPr>
-          <a:xfrm>
-            <a:off x="7315200" y="2944368"/>
-            <a:ext cx="1371600" cy="182880"/>
-          </a:xfrm>
-          <a:prstGeom prst="rect">
-            <a:avLst/>
-          </a:prstGeom>
-          <a:noFill/>
-          <a:ln/>
-        </p:spPr>
-        <p:txBody>
-          <a:bodyPr wrap="square" lIns="0" tIns="0" rIns="0" bIns="0" rtlCol="0" anchor="ctr"/>
-          <a:lstStyle/>
-          <a:p>
-            <a:pPr algn="ctr" indent="0" marL="0">
-              <a:buNone/>
-            </a:pPr>
-            <a:r>
-              <a:rPr lang="en-US" sz="1000" dirty="0">
-                <a:solidFill>
-                  <a:srgbClr val="475569"/>
-                </a:solidFill>
-                <a:latin typeface="Calibri" pitchFamily="34" charset="0"/>
-                <a:ea typeface="Calibri" pitchFamily="34" charset="-122"/>
-                <a:cs typeface="Calibri" pitchFamily="34" charset="-120"/>
-              </a:rPr>
-              <a:t>total</a:t>
-            </a:r>
-            <a:endParaRPr lang="en-US" sz="1000" dirty="0"/>
-          </a:p>
-        </p:txBody>
-      </p:sp>
-      <p:sp>
-        <p:nvSpPr>
-          <p:cNvPr id="42" name="Text 40"/>
-          <p:cNvSpPr/>
-          <p:nvPr/>
-        </p:nvSpPr>
-        <p:spPr>
-          <a:xfrm>
-            <a:off x="731520" y="3520440"/>
-            <a:ext cx="3657600" cy="274320"/>
-          </a:xfrm>
-          <a:prstGeom prst="rect">
-            <a:avLst/>
-          </a:prstGeom>
-          <a:noFill/>
-          <a:ln/>
-        </p:spPr>
-        <p:txBody>
-          <a:bodyPr wrap="square" lIns="0" tIns="0" rIns="0" bIns="0" rtlCol="0" anchor="ctr"/>
-          <a:lstStyle/>
-          <a:p>
-            <a:pPr indent="0" marL="0">
-              <a:buNone/>
-            </a:pPr>
-            <a:r>
-              <a:rPr lang="en-US" sz="1200" b="1" dirty="0">
-                <a:solidFill>
-                  <a:srgbClr val="0369A1"/>
-                </a:solidFill>
-                <a:latin typeface="Trebuchet MS" pitchFamily="34" charset="0"/>
-                <a:ea typeface="Trebuchet MS" pitchFamily="34" charset="-122"/>
-                <a:cs typeface="Trebuchet MS" pitchFamily="34" charset="-120"/>
-              </a:rPr>
-              <a:t>EFFORT COMPARISON</a:t>
-            </a:r>
-            <a:endParaRPr lang="en-US" sz="1200" dirty="0"/>
-          </a:p>
-        </p:txBody>
-      </p:sp>
-      <p:sp>
-        <p:nvSpPr>
-          <p:cNvPr id="43" name="Shape 41"/>
-          <p:cNvSpPr/>
-          <p:nvPr/>
-        </p:nvSpPr>
-        <p:spPr>
-          <a:xfrm>
-            <a:off x="457200" y="3886200"/>
-            <a:ext cx="2286000" cy="256032"/>
-          </a:xfrm>
-          <a:prstGeom prst="rect">
-            <a:avLst/>
-          </a:prstGeom>
-          <a:solidFill>
-            <a:srgbClr val="E2E8F0"/>
-          </a:solidFill>
-          <a:ln/>
-        </p:spPr>
-      </p:sp>
-      <p:sp>
-        <p:nvSpPr>
-          <p:cNvPr id="44" name="Text 42"/>
-          <p:cNvSpPr/>
-          <p:nvPr/>
-        </p:nvSpPr>
-        <p:spPr>
-          <a:xfrm>
-            <a:off x="548640" y="3886200"/>
-            <a:ext cx="2103120" cy="256032"/>
-          </a:xfrm>
-          <a:prstGeom prst="rect">
-            <a:avLst/>
-          </a:prstGeom>
-          <a:noFill/>
-          <a:ln/>
-        </p:spPr>
-        <p:txBody>
-          <a:bodyPr wrap="square" lIns="0" tIns="0" rIns="0" bIns="0" rtlCol="0" anchor="ctr"/>
-          <a:lstStyle/>
-          <a:p>
-            <a:pPr indent="0" marL="0">
-              <a:buNone/>
-            </a:pPr>
-            <a:r>
-              <a:rPr lang="en-US" sz="1000" b="1" dirty="0">
-                <a:solidFill>
-                  <a:srgbClr val="0F172A"/>
-                </a:solidFill>
-                <a:latin typeface="Calibri" pitchFamily="34" charset="0"/>
-                <a:ea typeface="Calibri" pitchFamily="34" charset="-122"/>
-                <a:cs typeface="Calibri" pitchFamily="34" charset="-120"/>
-              </a:rPr>
-              <a:t>Production Code</a:t>
-            </a:r>
-            <a:endParaRPr lang="en-US" sz="1000" dirty="0"/>
-          </a:p>
-        </p:txBody>
-      </p:sp>
-      <p:sp>
-        <p:nvSpPr>
-          <p:cNvPr id="45" name="Shape 43"/>
-          <p:cNvSpPr/>
-          <p:nvPr/>
-        </p:nvSpPr>
-        <p:spPr>
-          <a:xfrm>
-            <a:off x="2926080" y="3886200"/>
-            <a:ext cx="2926080" cy="256032"/>
-          </a:xfrm>
-          <a:prstGeom prst="rect">
-            <a:avLst/>
-          </a:prstGeom>
-          <a:solidFill>
-            <a:srgbClr val="E0F2FE"/>
-          </a:solidFill>
-          <a:ln/>
-        </p:spPr>
-      </p:sp>
-      <p:sp>
-        <p:nvSpPr>
-          <p:cNvPr id="46" name="Text 44"/>
-          <p:cNvSpPr/>
-          <p:nvPr/>
-        </p:nvSpPr>
-        <p:spPr>
-          <a:xfrm>
-            <a:off x="3017520" y="3886200"/>
-            <a:ext cx="2743200" cy="256032"/>
-          </a:xfrm>
-          <a:prstGeom prst="rect">
-            <a:avLst/>
-          </a:prstGeom>
-          <a:noFill/>
-          <a:ln/>
-        </p:spPr>
-        <p:txBody>
-          <a:bodyPr wrap="square" lIns="0" tIns="0" rIns="0" bIns="0" rtlCol="0" anchor="ctr"/>
-          <a:lstStyle/>
-          <a:p>
-            <a:pPr indent="0" marL="0">
-              <a:buNone/>
-            </a:pPr>
-            <a:r>
-              <a:rPr lang="en-US" sz="1000" dirty="0">
-                <a:solidFill>
-                  <a:srgbClr val="0284C7"/>
-                </a:solidFill>
-                <a:latin typeface="Calibri" pitchFamily="34" charset="0"/>
-                <a:ea typeface="Calibri" pitchFamily="34" charset="-122"/>
-                <a:cs typeface="Calibri" pitchFamily="34" charset="-120"/>
-              </a:rPr>
-              <a:t>888 lines Python + 525 TOML</a:t>
-            </a:r>
-            <a:endParaRPr lang="en-US" sz="1000" dirty="0"/>
-          </a:p>
-        </p:txBody>
-      </p:sp>
-      <p:sp>
-        <p:nvSpPr>
-          <p:cNvPr id="47" name="Shape 45"/>
-          <p:cNvSpPr/>
-          <p:nvPr/>
-        </p:nvSpPr>
-        <p:spPr>
-          <a:xfrm>
-            <a:off x="6035040" y="3886200"/>
-            <a:ext cx="2926080" cy="256032"/>
-          </a:xfrm>
-          <a:prstGeom prst="rect">
-            <a:avLst/>
-          </a:prstGeom>
-          <a:solidFill>
-            <a:srgbClr val="FEF3C7"/>
-          </a:solidFill>
-          <a:ln/>
-        </p:spPr>
-      </p:sp>
-      <p:sp>
-        <p:nvSpPr>
-          <p:cNvPr id="48" name="Text 46"/>
-          <p:cNvSpPr/>
-          <p:nvPr/>
-        </p:nvSpPr>
-        <p:spPr>
-          <a:xfrm>
-            <a:off x="6126480" y="3886200"/>
-            <a:ext cx="2743200" cy="256032"/>
-          </a:xfrm>
-          <a:prstGeom prst="rect">
-            <a:avLst/>
-          </a:prstGeom>
-          <a:noFill/>
-          <a:ln/>
-        </p:spPr>
-        <p:txBody>
-          <a:bodyPr wrap="square" lIns="0" tIns="0" rIns="0" bIns="0" rtlCol="0" anchor="ctr"/>
-          <a:lstStyle/>
-          <a:p>
-            <a:pPr indent="0" marL="0">
-              <a:buNone/>
-            </a:pPr>
-            <a:r>
-              <a:rPr lang="en-US" sz="1000" dirty="0">
-                <a:solidFill>
-                  <a:srgbClr val="D97706"/>
-                </a:solidFill>
-                <a:latin typeface="Calibri" pitchFamily="34" charset="0"/>
-                <a:ea typeface="Calibri" pitchFamily="34" charset="-122"/>
-                <a:cs typeface="Calibri" pitchFamily="34" charset="-120"/>
-              </a:rPr>
-              <a:t>2,394 lines Python</a:t>
-            </a:r>
-            <a:endParaRPr lang="en-US" sz="1000" dirty="0"/>
-          </a:p>
-        </p:txBody>
-      </p:sp>
-      <p:sp>
-        <p:nvSpPr>
-          <p:cNvPr id="49" name="Shape 47"/>
-          <p:cNvSpPr/>
-          <p:nvPr/>
-        </p:nvSpPr>
-        <p:spPr>
-          <a:xfrm>
-            <a:off x="457200" y="4187952"/>
-            <a:ext cx="2286000" cy="256032"/>
-          </a:xfrm>
-          <a:prstGeom prst="rect">
-            <a:avLst/>
-          </a:prstGeom>
-          <a:solidFill>
-            <a:srgbClr val="E2E8F0"/>
-          </a:solidFill>
-          <a:ln/>
-        </p:spPr>
-      </p:sp>
-      <p:sp>
-        <p:nvSpPr>
-          <p:cNvPr id="50" name="Text 48"/>
-          <p:cNvSpPr/>
-          <p:nvPr/>
-        </p:nvSpPr>
-        <p:spPr>
-          <a:xfrm>
-            <a:off x="548640" y="4187952"/>
-            <a:ext cx="2103120" cy="256032"/>
-          </a:xfrm>
-          <a:prstGeom prst="rect">
-            <a:avLst/>
-          </a:prstGeom>
-          <a:noFill/>
-          <a:ln/>
-        </p:spPr>
-        <p:txBody>
-          <a:bodyPr wrap="square" lIns="0" tIns="0" rIns="0" bIns="0" rtlCol="0" anchor="ctr"/>
-          <a:lstStyle/>
-          <a:p>
-            <a:pPr indent="0" marL="0">
-              <a:buNone/>
-            </a:pPr>
-            <a:r>
-              <a:rPr lang="en-US" sz="1000" b="1" dirty="0">
-                <a:solidFill>
-                  <a:srgbClr val="0F172A"/>
-                </a:solidFill>
-                <a:latin typeface="Calibri" pitchFamily="34" charset="0"/>
-                <a:ea typeface="Calibri" pitchFamily="34" charset="-122"/>
-                <a:cs typeface="Calibri" pitchFamily="34" charset="-120"/>
-              </a:rPr>
-              <a:t>Test Suite</a:t>
-            </a:r>
-            <a:endParaRPr lang="en-US" sz="1000" dirty="0"/>
-          </a:p>
-        </p:txBody>
-      </p:sp>
-      <p:sp>
-        <p:nvSpPr>
-          <p:cNvPr id="51" name="Shape 49"/>
-          <p:cNvSpPr/>
-          <p:nvPr/>
-        </p:nvSpPr>
-        <p:spPr>
-          <a:xfrm>
-            <a:off x="2926080" y="4187952"/>
-            <a:ext cx="2926080" cy="256032"/>
-          </a:xfrm>
-          <a:prstGeom prst="rect">
-            <a:avLst/>
-          </a:prstGeom>
-          <a:solidFill>
-            <a:srgbClr val="E0F2FE"/>
-          </a:solidFill>
-          <a:ln/>
-        </p:spPr>
-      </p:sp>
-      <p:sp>
-        <p:nvSpPr>
-          <p:cNvPr id="52" name="Text 50"/>
-          <p:cNvSpPr/>
-          <p:nvPr/>
-        </p:nvSpPr>
-        <p:spPr>
-          <a:xfrm>
-            <a:off x="3017520" y="4187952"/>
-            <a:ext cx="2743200" cy="256032"/>
-          </a:xfrm>
-          <a:prstGeom prst="rect">
-            <a:avLst/>
-          </a:prstGeom>
-          <a:noFill/>
-          <a:ln/>
-        </p:spPr>
-        <p:txBody>
-          <a:bodyPr wrap="square" lIns="0" tIns="0" rIns="0" bIns="0" rtlCol="0" anchor="ctr"/>
-          <a:lstStyle/>
-          <a:p>
-            <a:pPr indent="0" marL="0">
-              <a:buNone/>
-            </a:pPr>
-            <a:r>
-              <a:rPr lang="en-US" sz="1000" dirty="0">
-                <a:solidFill>
-                  <a:srgbClr val="0284C7"/>
-                </a:solidFill>
-                <a:latin typeface="Calibri" pitchFamily="34" charset="0"/>
-                <a:ea typeface="Calibri" pitchFamily="34" charset="-122"/>
-                <a:cs typeface="Calibri" pitchFamily="34" charset="-120"/>
-              </a:rPr>
-              <a:t>359 lines (4 modules)</a:t>
-            </a:r>
-            <a:endParaRPr lang="en-US" sz="1000" dirty="0"/>
-          </a:p>
-        </p:txBody>
-      </p:sp>
-      <p:sp>
-        <p:nvSpPr>
-          <p:cNvPr id="53" name="Shape 51"/>
-          <p:cNvSpPr/>
-          <p:nvPr/>
-        </p:nvSpPr>
-        <p:spPr>
-          <a:xfrm>
-            <a:off x="6035040" y="4187952"/>
-            <a:ext cx="2926080" cy="256032"/>
-          </a:xfrm>
-          <a:prstGeom prst="rect">
-            <a:avLst/>
-          </a:prstGeom>
-          <a:solidFill>
-            <a:srgbClr val="FEF3C7"/>
-          </a:solidFill>
-          <a:ln/>
-        </p:spPr>
-      </p:sp>
-      <p:sp>
-        <p:nvSpPr>
-          <p:cNvPr id="54" name="Text 52"/>
-          <p:cNvSpPr/>
-          <p:nvPr/>
-        </p:nvSpPr>
-        <p:spPr>
-          <a:xfrm>
-            <a:off x="6126480" y="4187952"/>
-            <a:ext cx="2743200" cy="256032"/>
-          </a:xfrm>
-          <a:prstGeom prst="rect">
-            <a:avLst/>
-          </a:prstGeom>
-          <a:noFill/>
-          <a:ln/>
-        </p:spPr>
-        <p:txBody>
-          <a:bodyPr wrap="square" lIns="0" tIns="0" rIns="0" bIns="0" rtlCol="0" anchor="ctr"/>
-          <a:lstStyle/>
-          <a:p>
-            <a:pPr indent="0" marL="0">
-              <a:buNone/>
-            </a:pPr>
-            <a:r>
-              <a:rPr lang="en-US" sz="1000" dirty="0">
-                <a:solidFill>
-                  <a:srgbClr val="D97706"/>
-                </a:solidFill>
-                <a:latin typeface="Calibri" pitchFamily="34" charset="0"/>
-                <a:ea typeface="Calibri" pitchFamily="34" charset="-122"/>
-                <a:cs typeface="Calibri" pitchFamily="34" charset="-120"/>
-              </a:rPr>
-              <a:t>1,119 lines (9 modules)</a:t>
-            </a:r>
-            <a:endParaRPr lang="en-US" sz="1000" dirty="0"/>
-          </a:p>
-        </p:txBody>
-      </p:sp>
-      <p:sp>
-        <p:nvSpPr>
-          <p:cNvPr id="55" name="Shape 53"/>
-          <p:cNvSpPr/>
-          <p:nvPr/>
-        </p:nvSpPr>
-        <p:spPr>
-          <a:xfrm>
-            <a:off x="457200" y="4489704"/>
-            <a:ext cx="2286000" cy="256032"/>
-          </a:xfrm>
-          <a:prstGeom prst="rect">
-            <a:avLst/>
-          </a:prstGeom>
-          <a:solidFill>
-            <a:srgbClr val="E2E8F0"/>
-          </a:solidFill>
-          <a:ln/>
-        </p:spPr>
-      </p:sp>
-      <p:sp>
-        <p:nvSpPr>
-          <p:cNvPr id="56" name="Text 54"/>
-          <p:cNvSpPr/>
-          <p:nvPr/>
-        </p:nvSpPr>
-        <p:spPr>
-          <a:xfrm>
-            <a:off x="548640" y="4489704"/>
-            <a:ext cx="2103120" cy="256032"/>
-          </a:xfrm>
-          <a:prstGeom prst="rect">
-            <a:avLst/>
-          </a:prstGeom>
-          <a:noFill/>
-          <a:ln/>
-        </p:spPr>
-        <p:txBody>
-          <a:bodyPr wrap="square" lIns="0" tIns="0" rIns="0" bIns="0" rtlCol="0" anchor="ctr"/>
-          <a:lstStyle/>
-          <a:p>
-            <a:pPr indent="0" marL="0">
-              <a:buNone/>
-            </a:pPr>
-            <a:r>
-              <a:rPr lang="en-US" sz="1000" b="1" dirty="0">
-                <a:solidFill>
-                  <a:srgbClr val="0F172A"/>
-                </a:solidFill>
-                <a:latin typeface="Calibri" pitchFamily="34" charset="0"/>
-                <a:ea typeface="Calibri" pitchFamily="34" charset="-122"/>
-                <a:cs typeface="Calibri" pitchFamily="34" charset="-120"/>
-              </a:rPr>
-              <a:t>Skills Needed</a:t>
-            </a:r>
-            <a:endParaRPr lang="en-US" sz="1000" dirty="0"/>
-          </a:p>
-        </p:txBody>
-      </p:sp>
-      <p:sp>
-        <p:nvSpPr>
-          <p:cNvPr id="57" name="Shape 55"/>
-          <p:cNvSpPr/>
-          <p:nvPr/>
-        </p:nvSpPr>
-        <p:spPr>
-          <a:xfrm>
-            <a:off x="2926080" y="4489704"/>
-            <a:ext cx="2926080" cy="256032"/>
-          </a:xfrm>
-          <a:prstGeom prst="rect">
-            <a:avLst/>
-          </a:prstGeom>
-          <a:solidFill>
-            <a:srgbClr val="E0F2FE"/>
-          </a:solidFill>
-          <a:ln/>
-        </p:spPr>
-      </p:sp>
-      <p:sp>
-        <p:nvSpPr>
-          <p:cNvPr id="58" name="Text 56"/>
-          <p:cNvSpPr/>
-          <p:nvPr/>
-        </p:nvSpPr>
-        <p:spPr>
-          <a:xfrm>
-            <a:off x="3017520" y="4489704"/>
-            <a:ext cx="2743200" cy="256032"/>
-          </a:xfrm>
-          <a:prstGeom prst="rect">
-            <a:avLst/>
-          </a:prstGeom>
-          <a:noFill/>
-          <a:ln/>
-        </p:spPr>
-        <p:txBody>
-          <a:bodyPr wrap="square" lIns="0" tIns="0" rIns="0" bIns="0" rtlCol="0" anchor="ctr"/>
-          <a:lstStyle/>
-          <a:p>
-            <a:pPr indent="0" marL="0">
-              <a:buNone/>
-            </a:pPr>
-            <a:r>
-              <a:rPr lang="en-US" sz="1000" dirty="0">
-                <a:solidFill>
-                  <a:srgbClr val="0284C7"/>
-                </a:solidFill>
-                <a:latin typeface="Calibri" pitchFamily="34" charset="0"/>
-                <a:ea typeface="Calibri" pitchFamily="34" charset="-122"/>
-                <a:cs typeface="Calibri" pitchFamily="34" charset="-120"/>
-              </a:rPr>
-              <a:t>TOML + Markdown + thin Python</a:t>
-            </a:r>
-            <a:endParaRPr lang="en-US" sz="1000" dirty="0"/>
-          </a:p>
-        </p:txBody>
-      </p:sp>
-      <p:sp>
-        <p:nvSpPr>
-          <p:cNvPr id="59" name="Shape 57"/>
-          <p:cNvSpPr/>
-          <p:nvPr/>
-        </p:nvSpPr>
-        <p:spPr>
-          <a:xfrm>
-            <a:off x="6035040" y="4489704"/>
-            <a:ext cx="2926080" cy="256032"/>
-          </a:xfrm>
-          <a:prstGeom prst="rect">
-            <a:avLst/>
-          </a:prstGeom>
-          <a:solidFill>
-            <a:srgbClr val="FEF3C7"/>
-          </a:solidFill>
-          <a:ln/>
-        </p:spPr>
-      </p:sp>
-      <p:sp>
-        <p:nvSpPr>
-          <p:cNvPr id="60" name="Text 58"/>
-          <p:cNvSpPr/>
-          <p:nvPr/>
-        </p:nvSpPr>
-        <p:spPr>
-          <a:xfrm>
-            <a:off x="6126480" y="4489704"/>
-            <a:ext cx="2743200" cy="256032"/>
-          </a:xfrm>
-          <a:prstGeom prst="rect">
-            <a:avLst/>
-          </a:prstGeom>
-          <a:noFill/>
-          <a:ln/>
-        </p:spPr>
-        <p:txBody>
-          <a:bodyPr wrap="square" lIns="0" tIns="0" rIns="0" bIns="0" rtlCol="0" anchor="ctr"/>
-          <a:lstStyle/>
-          <a:p>
-            <a:pPr indent="0" marL="0">
-              <a:buNone/>
-            </a:pPr>
-            <a:r>
-              <a:rPr lang="en-US" sz="1000" dirty="0">
-                <a:solidFill>
-                  <a:srgbClr val="D97706"/>
-                </a:solidFill>
-                <a:latin typeface="Calibri" pitchFamily="34" charset="0"/>
-                <a:ea typeface="Calibri" pitchFamily="34" charset="-122"/>
-                <a:cs typeface="Calibri" pitchFamily="34" charset="-120"/>
-              </a:rPr>
-              <a:t>Python + context eng. + SQLite</a:t>
-            </a:r>
-            <a:endParaRPr lang="en-US" sz="1000" dirty="0"/>
-          </a:p>
-        </p:txBody>
-      </p:sp>
-      <p:sp>
-        <p:nvSpPr>
-          <p:cNvPr id="61" name="Shape 59"/>
-          <p:cNvSpPr/>
-          <p:nvPr/>
-        </p:nvSpPr>
-        <p:spPr>
-          <a:xfrm>
-            <a:off x="457200" y="4791456"/>
-            <a:ext cx="2286000" cy="256032"/>
-          </a:xfrm>
-          <a:prstGeom prst="rect">
-            <a:avLst/>
-          </a:prstGeom>
-          <a:solidFill>
-            <a:srgbClr val="E2E8F0"/>
-          </a:solidFill>
-          <a:ln/>
-        </p:spPr>
-      </p:sp>
-      <p:sp>
-        <p:nvSpPr>
-          <p:cNvPr id="62" name="Text 60"/>
-          <p:cNvSpPr/>
-          <p:nvPr/>
-        </p:nvSpPr>
-        <p:spPr>
-          <a:xfrm>
-            <a:off x="548640" y="4791456"/>
-            <a:ext cx="2103120" cy="256032"/>
-          </a:xfrm>
-          <a:prstGeom prst="rect">
-            <a:avLst/>
-          </a:prstGeom>
-          <a:noFill/>
-          <a:ln/>
-        </p:spPr>
-        <p:txBody>
-          <a:bodyPr wrap="square" lIns="0" tIns="0" rIns="0" bIns="0" rtlCol="0" anchor="ctr"/>
-          <a:lstStyle/>
-          <a:p>
-            <a:pPr indent="0" marL="0">
-              <a:buNone/>
-            </a:pPr>
-            <a:r>
-              <a:rPr lang="en-US" sz="1000" b="1" dirty="0">
-                <a:solidFill>
-                  <a:srgbClr val="0F172A"/>
-                </a:solidFill>
-                <a:latin typeface="Calibri" pitchFamily="34" charset="0"/>
-                <a:ea typeface="Calibri" pitchFamily="34" charset="-122"/>
-                <a:cs typeface="Calibri" pitchFamily="34" charset="-120"/>
-              </a:rPr>
-              <a:t>Ongoing Maint.</a:t>
-            </a:r>
-            <a:endParaRPr lang="en-US" sz="1000" dirty="0"/>
-          </a:p>
-        </p:txBody>
-      </p:sp>
-      <p:sp>
-        <p:nvSpPr>
-          <p:cNvPr id="63" name="Shape 61"/>
-          <p:cNvSpPr/>
-          <p:nvPr/>
-        </p:nvSpPr>
-        <p:spPr>
-          <a:xfrm>
-            <a:off x="2926080" y="4791456"/>
-            <a:ext cx="2926080" cy="256032"/>
-          </a:xfrm>
-          <a:prstGeom prst="rect">
-            <a:avLst/>
-          </a:prstGeom>
-          <a:solidFill>
-            <a:srgbClr val="E0F2FE"/>
-          </a:solidFill>
-          <a:ln/>
-        </p:spPr>
-      </p:sp>
-      <p:sp>
-        <p:nvSpPr>
-          <p:cNvPr id="64" name="Text 62"/>
-          <p:cNvSpPr/>
-          <p:nvPr/>
-        </p:nvSpPr>
-        <p:spPr>
-          <a:xfrm>
-            <a:off x="3017520" y="4791456"/>
-            <a:ext cx="2743200" cy="256032"/>
-          </a:xfrm>
-          <a:prstGeom prst="rect">
-            <a:avLst/>
-          </a:prstGeom>
-          <a:noFill/>
-          <a:ln/>
-        </p:spPr>
-        <p:txBody>
-          <a:bodyPr wrap="square" lIns="0" tIns="0" rIns="0" bIns="0" rtlCol="0" anchor="ctr"/>
-          <a:lstStyle/>
-          <a:p>
-            <a:pPr indent="0" marL="0">
-              <a:buNone/>
-            </a:pPr>
-            <a:r>
-              <a:rPr lang="en-US" sz="1000" dirty="0">
-                <a:solidFill>
-                  <a:srgbClr val="0284C7"/>
-                </a:solidFill>
-                <a:latin typeface="Calibri" pitchFamily="34" charset="0"/>
-                <a:ea typeface="Calibri" pitchFamily="34" charset="-122"/>
-                <a:cs typeface="Calibri" pitchFamily="34" charset="-120"/>
-              </a:rPr>
-              <a:t>Edit TOML/MD config files</a:t>
-            </a:r>
-            <a:endParaRPr lang="en-US" sz="1000" dirty="0"/>
-          </a:p>
-        </p:txBody>
-      </p:sp>
-      <p:sp>
-        <p:nvSpPr>
-          <p:cNvPr id="65" name="Shape 63"/>
-          <p:cNvSpPr/>
-          <p:nvPr/>
-        </p:nvSpPr>
-        <p:spPr>
-          <a:xfrm>
-            <a:off x="6035040" y="4791456"/>
-            <a:ext cx="2926080" cy="256032"/>
-          </a:xfrm>
-          <a:prstGeom prst="rect">
-            <a:avLst/>
-          </a:prstGeom>
-          <a:solidFill>
-            <a:srgbClr val="FEF3C7"/>
-          </a:solidFill>
-          <a:ln/>
-        </p:spPr>
-      </p:sp>
-      <p:sp>
-        <p:nvSpPr>
-          <p:cNvPr id="66" name="Text 64"/>
-          <p:cNvSpPr/>
-          <p:nvPr/>
-        </p:nvSpPr>
-        <p:spPr>
-          <a:xfrm>
-            <a:off x="6126480" y="4791456"/>
-            <a:ext cx="2743200" cy="256032"/>
-          </a:xfrm>
-          <a:prstGeom prst="rect">
-            <a:avLst/>
-          </a:prstGeom>
-          <a:noFill/>
-          <a:ln/>
-        </p:spPr>
-        <p:txBody>
-          <a:bodyPr wrap="square" lIns="0" tIns="0" rIns="0" bIns="0" rtlCol="0" anchor="ctr"/>
-          <a:lstStyle/>
-          <a:p>
-            <a:pPr indent="0" marL="0">
-              <a:buNone/>
-            </a:pPr>
-            <a:r>
-              <a:rPr lang="en-US" sz="1000" dirty="0">
-                <a:solidFill>
-                  <a:srgbClr val="D97706"/>
-                </a:solidFill>
-                <a:latin typeface="Calibri" pitchFamily="34" charset="0"/>
-                <a:ea typeface="Calibri" pitchFamily="34" charset="-122"/>
-                <a:cs typeface="Calibri" pitchFamily="34" charset="-120"/>
-              </a:rPr>
-              <a:t>Maintain 2,394-line codebase</a:t>
-            </a:r>
-            <a:endParaRPr lang="en-US" sz="1000" dirty="0"/>
+              <a:rPr lang="en-US" sz="700" dirty="0">
+                <a:solidFill>
+                  <a:srgbClr val="64748B"/>
+                </a:solidFill>
+                <a:latin typeface="Calibri" pitchFamily="34" charset="0"/>
+                <a:ea typeface="Calibri" pitchFamily="34" charset="-122"/>
+                <a:cs typeface="Calibri" pitchFamily="34" charset="-120"/>
+              </a:rPr>
+              <a:t>Container App + Azure OpenAI + Blob + SQLite + custom context/tools</a:t>
+            </a:r>
+            <a:endParaRPr lang="en-US" sz="700" dirty="0"/>
           </a:p>
         </p:txBody>
       </p:sp>
@@ -4298,6 +5635,2168 @@
             <a:avLst/>
           </a:prstGeom>
           <a:solidFill>
+            <a:srgbClr val="0369A1"/>
+          </a:solidFill>
+          <a:ln/>
+        </p:spPr>
+      </p:sp>
+      <p:sp>
+        <p:nvSpPr>
+          <p:cNvPr id="3" name="Text 1"/>
+          <p:cNvSpPr/>
+          <p:nvPr/>
+        </p:nvSpPr>
+        <p:spPr>
+          <a:xfrm>
+            <a:off x="731520" y="228600"/>
+            <a:ext cx="7680960" cy="457200"/>
+          </a:xfrm>
+          <a:prstGeom prst="rect">
+            <a:avLst/>
+          </a:prstGeom>
+          <a:noFill/>
+          <a:ln/>
+        </p:spPr>
+        <p:txBody>
+          <a:bodyPr wrap="square" lIns="0" tIns="0" rIns="0" bIns="0" rtlCol="0" anchor="ctr"/>
+          <a:lstStyle/>
+          <a:p>
+            <a:pPr indent="0" marL="0">
+              <a:buNone/>
+            </a:pPr>
+            <a:r>
+              <a:rPr lang="en-US" sz="2800" b="1" dirty="0">
+                <a:solidFill>
+                  <a:srgbClr val="0F172A"/>
+                </a:solidFill>
+                <a:latin typeface="Trebuchet MS" pitchFamily="34" charset="0"/>
+                <a:ea typeface="Trebuchet MS" pitchFamily="34" charset="-122"/>
+                <a:cs typeface="Trebuchet MS" pitchFamily="34" charset="-120"/>
+              </a:rPr>
+              <a:t>Delivery Timeline &amp; Effort</a:t>
+            </a:r>
+            <a:endParaRPr lang="en-US" sz="2800" dirty="0"/>
+          </a:p>
+        </p:txBody>
+      </p:sp>
+      <p:sp>
+        <p:nvSpPr>
+          <p:cNvPr id="4" name="Text 2"/>
+          <p:cNvSpPr/>
+          <p:nvPr/>
+        </p:nvSpPr>
+        <p:spPr>
+          <a:xfrm>
+            <a:off x="731520" y="868680"/>
+            <a:ext cx="3657600" cy="274320"/>
+          </a:xfrm>
+          <a:prstGeom prst="rect">
+            <a:avLst/>
+          </a:prstGeom>
+          <a:noFill/>
+          <a:ln/>
+        </p:spPr>
+        <p:txBody>
+          <a:bodyPr wrap="square" lIns="0" tIns="0" rIns="0" bIns="0" rtlCol="0" anchor="ctr"/>
+          <a:lstStyle/>
+          <a:p>
+            <a:pPr indent="0" marL="0">
+              <a:buNone/>
+            </a:pPr>
+            <a:r>
+              <a:rPr lang="en-US" sz="1200" b="1" dirty="0">
+                <a:solidFill>
+                  <a:srgbClr val="0284C7"/>
+                </a:solidFill>
+                <a:latin typeface="Trebuchet MS" pitchFamily="34" charset="0"/>
+                <a:ea typeface="Trebuchet MS" pitchFamily="34" charset="-122"/>
+                <a:cs typeface="Trebuchet MS" pitchFamily="34" charset="-120"/>
+              </a:rPr>
+              <a:t>OPTION 1: CODEX NATIVE</a:t>
+            </a:r>
+            <a:endParaRPr lang="en-US" sz="1200" dirty="0"/>
+          </a:p>
+        </p:txBody>
+      </p:sp>
+      <p:sp>
+        <p:nvSpPr>
+          <p:cNvPr id="5" name="Shape 3"/>
+          <p:cNvSpPr/>
+          <p:nvPr/>
+        </p:nvSpPr>
+        <p:spPr>
+          <a:xfrm>
+            <a:off x="457200" y="1280160"/>
+            <a:ext cx="1005840" cy="594360"/>
+          </a:xfrm>
+          <a:prstGeom prst="rect">
+            <a:avLst/>
+          </a:prstGeom>
+          <a:solidFill>
+            <a:srgbClr val="0284C7"/>
+          </a:solidFill>
+          <a:ln/>
+          <a:effectLst>
+            <a:outerShdw sx="100000" sy="100000" kx="0" ky="0" algn="bl" rotWithShape="0" blurRad="76200" dist="25400" dir="8100000">
+              <a:srgbClr val="94A3B8">
+                <a:alpha val="30000"/>
+              </a:srgbClr>
+            </a:outerShdw>
+          </a:effectLst>
+        </p:spPr>
+      </p:sp>
+      <p:sp>
+        <p:nvSpPr>
+          <p:cNvPr id="6" name="Text 4"/>
+          <p:cNvSpPr/>
+          <p:nvPr/>
+        </p:nvSpPr>
+        <p:spPr>
+          <a:xfrm>
+            <a:off x="530352" y="1298448"/>
+            <a:ext cx="859536" cy="292608"/>
+          </a:xfrm>
+          <a:prstGeom prst="rect">
+            <a:avLst/>
+          </a:prstGeom>
+          <a:noFill/>
+          <a:ln/>
+        </p:spPr>
+        <p:txBody>
+          <a:bodyPr wrap="square" lIns="0" tIns="0" rIns="0" bIns="0" rtlCol="0" anchor="ctr"/>
+          <a:lstStyle/>
+          <a:p>
+            <a:pPr algn="ctr" indent="0" marL="0">
+              <a:buNone/>
+            </a:pPr>
+            <a:r>
+              <a:rPr lang="en-US" sz="1000" b="1" dirty="0">
+                <a:solidFill>
+                  <a:srgbClr val="FFFFFF"/>
+                </a:solidFill>
+                <a:latin typeface="Calibri" pitchFamily="34" charset="0"/>
+                <a:ea typeface="Calibri" pitchFamily="34" charset="-122"/>
+                <a:cs typeface="Calibri" pitchFamily="34" charset="-120"/>
+              </a:rPr>
+              <a:t>Setup</a:t>
+            </a:r>
+            <a:endParaRPr lang="en-US" sz="1000" dirty="0"/>
+          </a:p>
+        </p:txBody>
+      </p:sp>
+      <p:sp>
+        <p:nvSpPr>
+          <p:cNvPr id="7" name="Text 5"/>
+          <p:cNvSpPr/>
+          <p:nvPr/>
+        </p:nvSpPr>
+        <p:spPr>
+          <a:xfrm>
+            <a:off x="530352" y="1591056"/>
+            <a:ext cx="859536" cy="228600"/>
+          </a:xfrm>
+          <a:prstGeom prst="rect">
+            <a:avLst/>
+          </a:prstGeom>
+          <a:noFill/>
+          <a:ln/>
+        </p:spPr>
+        <p:txBody>
+          <a:bodyPr wrap="square" lIns="0" tIns="0" rIns="0" bIns="0" rtlCol="0" anchor="ctr"/>
+          <a:lstStyle/>
+          <a:p>
+            <a:pPr algn="ctr" indent="0" marL="0">
+              <a:buNone/>
+            </a:pPr>
+            <a:r>
+              <a:rPr lang="en-US" sz="900" dirty="0">
+                <a:solidFill>
+                  <a:srgbClr val="F8FAFC"/>
+                </a:solidFill>
+                <a:latin typeface="Calibri" pitchFamily="34" charset="0"/>
+                <a:ea typeface="Calibri" pitchFamily="34" charset="-122"/>
+                <a:cs typeface="Calibri" pitchFamily="34" charset="-120"/>
+              </a:rPr>
+              <a:t>W1</a:t>
+            </a:r>
+            <a:endParaRPr lang="en-US" sz="900" dirty="0"/>
+          </a:p>
+        </p:txBody>
+      </p:sp>
+      <p:sp>
+        <p:nvSpPr>
+          <p:cNvPr id="8" name="Shape 6"/>
+          <p:cNvSpPr/>
+          <p:nvPr/>
+        </p:nvSpPr>
+        <p:spPr>
+          <a:xfrm>
+            <a:off x="1600200" y="1280160"/>
+            <a:ext cx="1188720" cy="594360"/>
+          </a:xfrm>
+          <a:prstGeom prst="rect">
+            <a:avLst/>
+          </a:prstGeom>
+          <a:solidFill>
+            <a:srgbClr val="7C3AED"/>
+          </a:solidFill>
+          <a:ln/>
+          <a:effectLst>
+            <a:outerShdw sx="100000" sy="100000" kx="0" ky="0" algn="bl" rotWithShape="0" blurRad="76200" dist="25400" dir="8100000">
+              <a:srgbClr val="94A3B8">
+                <a:alpha val="30000"/>
+              </a:srgbClr>
+            </a:outerShdw>
+          </a:effectLst>
+        </p:spPr>
+      </p:sp>
+      <p:sp>
+        <p:nvSpPr>
+          <p:cNvPr id="9" name="Text 7"/>
+          <p:cNvSpPr/>
+          <p:nvPr/>
+        </p:nvSpPr>
+        <p:spPr>
+          <a:xfrm>
+            <a:off x="1673352" y="1298448"/>
+            <a:ext cx="1042416" cy="292608"/>
+          </a:xfrm>
+          <a:prstGeom prst="rect">
+            <a:avLst/>
+          </a:prstGeom>
+          <a:noFill/>
+          <a:ln/>
+        </p:spPr>
+        <p:txBody>
+          <a:bodyPr wrap="square" lIns="0" tIns="0" rIns="0" bIns="0" rtlCol="0" anchor="ctr"/>
+          <a:lstStyle/>
+          <a:p>
+            <a:pPr algn="ctr" indent="0" marL="0">
+              <a:buNone/>
+            </a:pPr>
+            <a:r>
+              <a:rPr lang="en-US" sz="1000" b="1" dirty="0">
+                <a:solidFill>
+                  <a:srgbClr val="FFFFFF"/>
+                </a:solidFill>
+                <a:latin typeface="Calibri" pitchFamily="34" charset="0"/>
+                <a:ea typeface="Calibri" pitchFamily="34" charset="-122"/>
+                <a:cs typeface="Calibri" pitchFamily="34" charset="-120"/>
+              </a:rPr>
+              <a:t>Agent Config</a:t>
+            </a:r>
+            <a:endParaRPr lang="en-US" sz="1000" dirty="0"/>
+          </a:p>
+        </p:txBody>
+      </p:sp>
+      <p:sp>
+        <p:nvSpPr>
+          <p:cNvPr id="10" name="Text 8"/>
+          <p:cNvSpPr/>
+          <p:nvPr/>
+        </p:nvSpPr>
+        <p:spPr>
+          <a:xfrm>
+            <a:off x="1673352" y="1591056"/>
+            <a:ext cx="1042416" cy="228600"/>
+          </a:xfrm>
+          <a:prstGeom prst="rect">
+            <a:avLst/>
+          </a:prstGeom>
+          <a:noFill/>
+          <a:ln/>
+        </p:spPr>
+        <p:txBody>
+          <a:bodyPr wrap="square" lIns="0" tIns="0" rIns="0" bIns="0" rtlCol="0" anchor="ctr"/>
+          <a:lstStyle/>
+          <a:p>
+            <a:pPr algn="ctr" indent="0" marL="0">
+              <a:buNone/>
+            </a:pPr>
+            <a:r>
+              <a:rPr lang="en-US" sz="900" dirty="0">
+                <a:solidFill>
+                  <a:srgbClr val="F8FAFC"/>
+                </a:solidFill>
+                <a:latin typeface="Calibri" pitchFamily="34" charset="0"/>
+                <a:ea typeface="Calibri" pitchFamily="34" charset="-122"/>
+                <a:cs typeface="Calibri" pitchFamily="34" charset="-120"/>
+              </a:rPr>
+              <a:t>W1-2</a:t>
+            </a:r>
+            <a:endParaRPr lang="en-US" sz="900" dirty="0"/>
+          </a:p>
+        </p:txBody>
+      </p:sp>
+      <p:sp>
+        <p:nvSpPr>
+          <p:cNvPr id="11" name="Shape 9"/>
+          <p:cNvSpPr/>
+          <p:nvPr/>
+        </p:nvSpPr>
+        <p:spPr>
+          <a:xfrm>
+            <a:off x="2926080" y="1280160"/>
+            <a:ext cx="822960" cy="594360"/>
+          </a:xfrm>
+          <a:prstGeom prst="rect">
+            <a:avLst/>
+          </a:prstGeom>
+          <a:solidFill>
+            <a:srgbClr val="059669"/>
+          </a:solidFill>
+          <a:ln/>
+          <a:effectLst>
+            <a:outerShdw sx="100000" sy="100000" kx="0" ky="0" algn="bl" rotWithShape="0" blurRad="76200" dist="25400" dir="8100000">
+              <a:srgbClr val="94A3B8">
+                <a:alpha val="30000"/>
+              </a:srgbClr>
+            </a:outerShdw>
+          </a:effectLst>
+        </p:spPr>
+      </p:sp>
+      <p:sp>
+        <p:nvSpPr>
+          <p:cNvPr id="12" name="Text 10"/>
+          <p:cNvSpPr/>
+          <p:nvPr/>
+        </p:nvSpPr>
+        <p:spPr>
+          <a:xfrm>
+            <a:off x="2999232" y="1298448"/>
+            <a:ext cx="676656" cy="292608"/>
+          </a:xfrm>
+          <a:prstGeom prst="rect">
+            <a:avLst/>
+          </a:prstGeom>
+          <a:noFill/>
+          <a:ln/>
+        </p:spPr>
+        <p:txBody>
+          <a:bodyPr wrap="square" lIns="0" tIns="0" rIns="0" bIns="0" rtlCol="0" anchor="ctr"/>
+          <a:lstStyle/>
+          <a:p>
+            <a:pPr algn="ctr" indent="0" marL="0">
+              <a:buNone/>
+            </a:pPr>
+            <a:r>
+              <a:rPr lang="en-US" sz="1000" b="1" dirty="0">
+                <a:solidFill>
+                  <a:srgbClr val="FFFFFF"/>
+                </a:solidFill>
+                <a:latin typeface="Calibri" pitchFamily="34" charset="0"/>
+                <a:ea typeface="Calibri" pitchFamily="34" charset="-122"/>
+                <a:cs typeface="Calibri" pitchFamily="34" charset="-120"/>
+              </a:rPr>
+              <a:t>Trigger</a:t>
+            </a:r>
+            <a:endParaRPr lang="en-US" sz="1000" dirty="0"/>
+          </a:p>
+        </p:txBody>
+      </p:sp>
+      <p:sp>
+        <p:nvSpPr>
+          <p:cNvPr id="13" name="Text 11"/>
+          <p:cNvSpPr/>
+          <p:nvPr/>
+        </p:nvSpPr>
+        <p:spPr>
+          <a:xfrm>
+            <a:off x="2999232" y="1591056"/>
+            <a:ext cx="676656" cy="228600"/>
+          </a:xfrm>
+          <a:prstGeom prst="rect">
+            <a:avLst/>
+          </a:prstGeom>
+          <a:noFill/>
+          <a:ln/>
+        </p:spPr>
+        <p:txBody>
+          <a:bodyPr wrap="square" lIns="0" tIns="0" rIns="0" bIns="0" rtlCol="0" anchor="ctr"/>
+          <a:lstStyle/>
+          <a:p>
+            <a:pPr algn="ctr" indent="0" marL="0">
+              <a:buNone/>
+            </a:pPr>
+            <a:r>
+              <a:rPr lang="en-US" sz="900" dirty="0">
+                <a:solidFill>
+                  <a:srgbClr val="F8FAFC"/>
+                </a:solidFill>
+                <a:latin typeface="Calibri" pitchFamily="34" charset="0"/>
+                <a:ea typeface="Calibri" pitchFamily="34" charset="-122"/>
+                <a:cs typeface="Calibri" pitchFamily="34" charset="-120"/>
+              </a:rPr>
+              <a:t>W2</a:t>
+            </a:r>
+            <a:endParaRPr lang="en-US" sz="900" dirty="0"/>
+          </a:p>
+        </p:txBody>
+      </p:sp>
+      <p:sp>
+        <p:nvSpPr>
+          <p:cNvPr id="14" name="Shape 12"/>
+          <p:cNvSpPr/>
+          <p:nvPr/>
+        </p:nvSpPr>
+        <p:spPr>
+          <a:xfrm>
+            <a:off x="3886200" y="1280160"/>
+            <a:ext cx="1463040" cy="594360"/>
+          </a:xfrm>
+          <a:prstGeom prst="rect">
+            <a:avLst/>
+          </a:prstGeom>
+          <a:solidFill>
+            <a:srgbClr val="D97706"/>
+          </a:solidFill>
+          <a:ln/>
+          <a:effectLst>
+            <a:outerShdw sx="100000" sy="100000" kx="0" ky="0" algn="bl" rotWithShape="0" blurRad="76200" dist="25400" dir="8100000">
+              <a:srgbClr val="94A3B8">
+                <a:alpha val="30000"/>
+              </a:srgbClr>
+            </a:outerShdw>
+          </a:effectLst>
+        </p:spPr>
+      </p:sp>
+      <p:sp>
+        <p:nvSpPr>
+          <p:cNvPr id="15" name="Text 13"/>
+          <p:cNvSpPr/>
+          <p:nvPr/>
+        </p:nvSpPr>
+        <p:spPr>
+          <a:xfrm>
+            <a:off x="3959352" y="1298448"/>
+            <a:ext cx="1316736" cy="292608"/>
+          </a:xfrm>
+          <a:prstGeom prst="rect">
+            <a:avLst/>
+          </a:prstGeom>
+          <a:noFill/>
+          <a:ln/>
+        </p:spPr>
+        <p:txBody>
+          <a:bodyPr wrap="square" lIns="0" tIns="0" rIns="0" bIns="0" rtlCol="0" anchor="ctr"/>
+          <a:lstStyle/>
+          <a:p>
+            <a:pPr algn="ctr" indent="0" marL="0">
+              <a:buNone/>
+            </a:pPr>
+            <a:r>
+              <a:rPr lang="en-US" sz="1000" b="1" dirty="0">
+                <a:solidFill>
+                  <a:srgbClr val="FFFFFF"/>
+                </a:solidFill>
+                <a:latin typeface="Calibri" pitchFamily="34" charset="0"/>
+                <a:ea typeface="Calibri" pitchFamily="34" charset="-122"/>
+                <a:cs typeface="Calibri" pitchFamily="34" charset="-120"/>
+              </a:rPr>
+              <a:t>Pilot</a:t>
+            </a:r>
+            <a:endParaRPr lang="en-US" sz="1000" dirty="0"/>
+          </a:p>
+        </p:txBody>
+      </p:sp>
+      <p:sp>
+        <p:nvSpPr>
+          <p:cNvPr id="16" name="Text 14"/>
+          <p:cNvSpPr/>
+          <p:nvPr/>
+        </p:nvSpPr>
+        <p:spPr>
+          <a:xfrm>
+            <a:off x="3959352" y="1591056"/>
+            <a:ext cx="1316736" cy="228600"/>
+          </a:xfrm>
+          <a:prstGeom prst="rect">
+            <a:avLst/>
+          </a:prstGeom>
+          <a:noFill/>
+          <a:ln/>
+        </p:spPr>
+        <p:txBody>
+          <a:bodyPr wrap="square" lIns="0" tIns="0" rIns="0" bIns="0" rtlCol="0" anchor="ctr"/>
+          <a:lstStyle/>
+          <a:p>
+            <a:pPr algn="ctr" indent="0" marL="0">
+              <a:buNone/>
+            </a:pPr>
+            <a:r>
+              <a:rPr lang="en-US" sz="900" dirty="0">
+                <a:solidFill>
+                  <a:srgbClr val="F8FAFC"/>
+                </a:solidFill>
+                <a:latin typeface="Calibri" pitchFamily="34" charset="0"/>
+                <a:ea typeface="Calibri" pitchFamily="34" charset="-122"/>
+                <a:cs typeface="Calibri" pitchFamily="34" charset="-120"/>
+              </a:rPr>
+              <a:t>W2-3</a:t>
+            </a:r>
+            <a:endParaRPr lang="en-US" sz="900" dirty="0"/>
+          </a:p>
+        </p:txBody>
+      </p:sp>
+      <p:sp>
+        <p:nvSpPr>
+          <p:cNvPr id="17" name="Shape 15"/>
+          <p:cNvSpPr/>
+          <p:nvPr/>
+        </p:nvSpPr>
+        <p:spPr>
+          <a:xfrm>
+            <a:off x="5486400" y="1280160"/>
+            <a:ext cx="1005840" cy="594360"/>
+          </a:xfrm>
+          <a:prstGeom prst="rect">
+            <a:avLst/>
+          </a:prstGeom>
+          <a:solidFill>
+            <a:srgbClr val="0284C7"/>
+          </a:solidFill>
+          <a:ln/>
+          <a:effectLst>
+            <a:outerShdw sx="100000" sy="100000" kx="0" ky="0" algn="bl" rotWithShape="0" blurRad="76200" dist="25400" dir="8100000">
+              <a:srgbClr val="94A3B8">
+                <a:alpha val="30000"/>
+              </a:srgbClr>
+            </a:outerShdw>
+          </a:effectLst>
+        </p:spPr>
+      </p:sp>
+      <p:sp>
+        <p:nvSpPr>
+          <p:cNvPr id="18" name="Text 16"/>
+          <p:cNvSpPr/>
+          <p:nvPr/>
+        </p:nvSpPr>
+        <p:spPr>
+          <a:xfrm>
+            <a:off x="5559552" y="1298448"/>
+            <a:ext cx="859536" cy="292608"/>
+          </a:xfrm>
+          <a:prstGeom prst="rect">
+            <a:avLst/>
+          </a:prstGeom>
+          <a:noFill/>
+          <a:ln/>
+        </p:spPr>
+        <p:txBody>
+          <a:bodyPr wrap="square" lIns="0" tIns="0" rIns="0" bIns="0" rtlCol="0" anchor="ctr"/>
+          <a:lstStyle/>
+          <a:p>
+            <a:pPr algn="ctr" indent="0" marL="0">
+              <a:buNone/>
+            </a:pPr>
+            <a:r>
+              <a:rPr lang="en-US" sz="1000" b="1" dirty="0">
+                <a:solidFill>
+                  <a:srgbClr val="FFFFFF"/>
+                </a:solidFill>
+                <a:latin typeface="Calibri" pitchFamily="34" charset="0"/>
+                <a:ea typeface="Calibri" pitchFamily="34" charset="-122"/>
+                <a:cs typeface="Calibri" pitchFamily="34" charset="-120"/>
+              </a:rPr>
+              <a:t>Refine</a:t>
+            </a:r>
+            <a:endParaRPr lang="en-US" sz="1000" dirty="0"/>
+          </a:p>
+        </p:txBody>
+      </p:sp>
+      <p:sp>
+        <p:nvSpPr>
+          <p:cNvPr id="19" name="Text 17"/>
+          <p:cNvSpPr/>
+          <p:nvPr/>
+        </p:nvSpPr>
+        <p:spPr>
+          <a:xfrm>
+            <a:off x="5559552" y="1591056"/>
+            <a:ext cx="859536" cy="228600"/>
+          </a:xfrm>
+          <a:prstGeom prst="rect">
+            <a:avLst/>
+          </a:prstGeom>
+          <a:noFill/>
+          <a:ln/>
+        </p:spPr>
+        <p:txBody>
+          <a:bodyPr wrap="square" lIns="0" tIns="0" rIns="0" bIns="0" rtlCol="0" anchor="ctr"/>
+          <a:lstStyle/>
+          <a:p>
+            <a:pPr algn="ctr" indent="0" marL="0">
+              <a:buNone/>
+            </a:pPr>
+            <a:r>
+              <a:rPr lang="en-US" sz="900" dirty="0">
+                <a:solidFill>
+                  <a:srgbClr val="F8FAFC"/>
+                </a:solidFill>
+                <a:latin typeface="Calibri" pitchFamily="34" charset="0"/>
+                <a:ea typeface="Calibri" pitchFamily="34" charset="-122"/>
+                <a:cs typeface="Calibri" pitchFamily="34" charset="-120"/>
+              </a:rPr>
+              <a:t>W3</a:t>
+            </a:r>
+            <a:endParaRPr lang="en-US" sz="900" dirty="0"/>
+          </a:p>
+        </p:txBody>
+      </p:sp>
+      <p:sp>
+        <p:nvSpPr>
+          <p:cNvPr id="20" name="Shape 18"/>
+          <p:cNvSpPr/>
+          <p:nvPr/>
+        </p:nvSpPr>
+        <p:spPr>
+          <a:xfrm>
+            <a:off x="7315200" y="1325880"/>
+            <a:ext cx="1371600" cy="502920"/>
+          </a:xfrm>
+          <a:prstGeom prst="rect">
+            <a:avLst/>
+          </a:prstGeom>
+          <a:solidFill>
+            <a:srgbClr val="FFFFFF"/>
+          </a:solidFill>
+          <a:ln/>
+        </p:spPr>
+      </p:sp>
+      <p:sp>
+        <p:nvSpPr>
+          <p:cNvPr id="21" name="Text 19"/>
+          <p:cNvSpPr/>
+          <p:nvPr/>
+        </p:nvSpPr>
+        <p:spPr>
+          <a:xfrm>
+            <a:off x="7315200" y="1344168"/>
+            <a:ext cx="1371600" cy="274320"/>
+          </a:xfrm>
+          <a:prstGeom prst="rect">
+            <a:avLst/>
+          </a:prstGeom>
+          <a:noFill/>
+          <a:ln/>
+        </p:spPr>
+        <p:txBody>
+          <a:bodyPr wrap="square" lIns="0" tIns="0" rIns="0" bIns="0" rtlCol="0" anchor="ctr"/>
+          <a:lstStyle/>
+          <a:p>
+            <a:pPr algn="ctr" indent="0" marL="0">
+              <a:buNone/>
+            </a:pPr>
+            <a:r>
+              <a:rPr lang="en-US" sz="1800" b="1" dirty="0">
+                <a:solidFill>
+                  <a:srgbClr val="0284C7"/>
+                </a:solidFill>
+                <a:latin typeface="Trebuchet MS" pitchFamily="34" charset="0"/>
+                <a:ea typeface="Trebuchet MS" pitchFamily="34" charset="-122"/>
+                <a:cs typeface="Trebuchet MS" pitchFamily="34" charset="-120"/>
+              </a:rPr>
+              <a:t>3 weeks</a:t>
+            </a:r>
+            <a:endParaRPr lang="en-US" sz="1800" dirty="0"/>
+          </a:p>
+        </p:txBody>
+      </p:sp>
+      <p:sp>
+        <p:nvSpPr>
+          <p:cNvPr id="22" name="Text 20"/>
+          <p:cNvSpPr/>
+          <p:nvPr/>
+        </p:nvSpPr>
+        <p:spPr>
+          <a:xfrm>
+            <a:off x="7315200" y="1618488"/>
+            <a:ext cx="1371600" cy="182880"/>
+          </a:xfrm>
+          <a:prstGeom prst="rect">
+            <a:avLst/>
+          </a:prstGeom>
+          <a:noFill/>
+          <a:ln/>
+        </p:spPr>
+        <p:txBody>
+          <a:bodyPr wrap="square" lIns="0" tIns="0" rIns="0" bIns="0" rtlCol="0" anchor="ctr"/>
+          <a:lstStyle/>
+          <a:p>
+            <a:pPr algn="ctr" indent="0" marL="0">
+              <a:buNone/>
+            </a:pPr>
+            <a:r>
+              <a:rPr lang="en-US" sz="1000" dirty="0">
+                <a:solidFill>
+                  <a:srgbClr val="475569"/>
+                </a:solidFill>
+                <a:latin typeface="Calibri" pitchFamily="34" charset="0"/>
+                <a:ea typeface="Calibri" pitchFamily="34" charset="-122"/>
+                <a:cs typeface="Calibri" pitchFamily="34" charset="-120"/>
+              </a:rPr>
+              <a:t>total</a:t>
+            </a:r>
+            <a:endParaRPr lang="en-US" sz="1000" dirty="0"/>
+          </a:p>
+        </p:txBody>
+      </p:sp>
+      <p:sp>
+        <p:nvSpPr>
+          <p:cNvPr id="23" name="Text 21"/>
+          <p:cNvSpPr/>
+          <p:nvPr/>
+        </p:nvSpPr>
+        <p:spPr>
+          <a:xfrm>
+            <a:off x="731520" y="2194560"/>
+            <a:ext cx="3657600" cy="274320"/>
+          </a:xfrm>
+          <a:prstGeom prst="rect">
+            <a:avLst/>
+          </a:prstGeom>
+          <a:noFill/>
+          <a:ln/>
+        </p:spPr>
+        <p:txBody>
+          <a:bodyPr wrap="square" lIns="0" tIns="0" rIns="0" bIns="0" rtlCol="0" anchor="ctr"/>
+          <a:lstStyle/>
+          <a:p>
+            <a:pPr indent="0" marL="0">
+              <a:buNone/>
+            </a:pPr>
+            <a:r>
+              <a:rPr lang="en-US" sz="1200" b="1" dirty="0">
+                <a:solidFill>
+                  <a:srgbClr val="D97706"/>
+                </a:solidFill>
+                <a:latin typeface="Trebuchet MS" pitchFamily="34" charset="0"/>
+                <a:ea typeface="Trebuchet MS" pitchFamily="34" charset="-122"/>
+                <a:cs typeface="Trebuchet MS" pitchFamily="34" charset="-120"/>
+              </a:rPr>
+              <a:t>OPTION 2: MS AGENT FRAMEWORK</a:t>
+            </a:r>
+            <a:endParaRPr lang="en-US" sz="1200" dirty="0"/>
+          </a:p>
+        </p:txBody>
+      </p:sp>
+      <p:sp>
+        <p:nvSpPr>
+          <p:cNvPr id="24" name="Shape 22"/>
+          <p:cNvSpPr/>
+          <p:nvPr/>
+        </p:nvSpPr>
+        <p:spPr>
+          <a:xfrm>
+            <a:off x="457200" y="2606040"/>
+            <a:ext cx="1097280" cy="594360"/>
+          </a:xfrm>
+          <a:prstGeom prst="rect">
+            <a:avLst/>
+          </a:prstGeom>
+          <a:solidFill>
+            <a:srgbClr val="D97706"/>
+          </a:solidFill>
+          <a:ln/>
+          <a:effectLst>
+            <a:outerShdw sx="100000" sy="100000" kx="0" ky="0" algn="bl" rotWithShape="0" blurRad="76200" dist="25400" dir="8100000">
+              <a:srgbClr val="94A3B8">
+                <a:alpha val="30000"/>
+              </a:srgbClr>
+            </a:outerShdw>
+          </a:effectLst>
+        </p:spPr>
+      </p:sp>
+      <p:sp>
+        <p:nvSpPr>
+          <p:cNvPr id="25" name="Text 23"/>
+          <p:cNvSpPr/>
+          <p:nvPr/>
+        </p:nvSpPr>
+        <p:spPr>
+          <a:xfrm>
+            <a:off x="530352" y="2624328"/>
+            <a:ext cx="950976" cy="292608"/>
+          </a:xfrm>
+          <a:prstGeom prst="rect">
+            <a:avLst/>
+          </a:prstGeom>
+          <a:noFill/>
+          <a:ln/>
+        </p:spPr>
+        <p:txBody>
+          <a:bodyPr wrap="square" lIns="0" tIns="0" rIns="0" bIns="0" rtlCol="0" anchor="ctr"/>
+          <a:lstStyle/>
+          <a:p>
+            <a:pPr algn="ctr" indent="0" marL="0">
+              <a:buNone/>
+            </a:pPr>
+            <a:r>
+              <a:rPr lang="en-US" sz="1000" b="1" dirty="0">
+                <a:solidFill>
+                  <a:srgbClr val="FFFFFF"/>
+                </a:solidFill>
+                <a:latin typeface="Calibri" pitchFamily="34" charset="0"/>
+                <a:ea typeface="Calibri" pitchFamily="34" charset="-122"/>
+                <a:cs typeface="Calibri" pitchFamily="34" charset="-120"/>
+              </a:rPr>
+              <a:t>Setup &amp; Learn</a:t>
+            </a:r>
+            <a:endParaRPr lang="en-US" sz="1000" dirty="0"/>
+          </a:p>
+        </p:txBody>
+      </p:sp>
+      <p:sp>
+        <p:nvSpPr>
+          <p:cNvPr id="26" name="Text 24"/>
+          <p:cNvSpPr/>
+          <p:nvPr/>
+        </p:nvSpPr>
+        <p:spPr>
+          <a:xfrm>
+            <a:off x="530352" y="2916936"/>
+            <a:ext cx="950976" cy="228600"/>
+          </a:xfrm>
+          <a:prstGeom prst="rect">
+            <a:avLst/>
+          </a:prstGeom>
+          <a:noFill/>
+          <a:ln/>
+        </p:spPr>
+        <p:txBody>
+          <a:bodyPr wrap="square" lIns="0" tIns="0" rIns="0" bIns="0" rtlCol="0" anchor="ctr"/>
+          <a:lstStyle/>
+          <a:p>
+            <a:pPr algn="ctr" indent="0" marL="0">
+              <a:buNone/>
+            </a:pPr>
+            <a:r>
+              <a:rPr lang="en-US" sz="900" dirty="0">
+                <a:solidFill>
+                  <a:srgbClr val="F8FAFC"/>
+                </a:solidFill>
+                <a:latin typeface="Calibri" pitchFamily="34" charset="0"/>
+                <a:ea typeface="Calibri" pitchFamily="34" charset="-122"/>
+                <a:cs typeface="Calibri" pitchFamily="34" charset="-120"/>
+              </a:rPr>
+              <a:t>W1-2</a:t>
+            </a:r>
+            <a:endParaRPr lang="en-US" sz="900" dirty="0"/>
+          </a:p>
+        </p:txBody>
+      </p:sp>
+      <p:sp>
+        <p:nvSpPr>
+          <p:cNvPr id="27" name="Shape 25"/>
+          <p:cNvSpPr/>
+          <p:nvPr/>
+        </p:nvSpPr>
+        <p:spPr>
+          <a:xfrm>
+            <a:off x="1691640" y="2606040"/>
+            <a:ext cx="1737360" cy="594360"/>
+          </a:xfrm>
+          <a:prstGeom prst="rect">
+            <a:avLst/>
+          </a:prstGeom>
+          <a:solidFill>
+            <a:srgbClr val="7C3AED"/>
+          </a:solidFill>
+          <a:ln/>
+          <a:effectLst>
+            <a:outerShdw sx="100000" sy="100000" kx="0" ky="0" algn="bl" rotWithShape="0" blurRad="76200" dist="25400" dir="8100000">
+              <a:srgbClr val="94A3B8">
+                <a:alpha val="30000"/>
+              </a:srgbClr>
+            </a:outerShdw>
+          </a:effectLst>
+        </p:spPr>
+      </p:sp>
+      <p:sp>
+        <p:nvSpPr>
+          <p:cNvPr id="28" name="Text 26"/>
+          <p:cNvSpPr/>
+          <p:nvPr/>
+        </p:nvSpPr>
+        <p:spPr>
+          <a:xfrm>
+            <a:off x="1764792" y="2624328"/>
+            <a:ext cx="1591056" cy="292608"/>
+          </a:xfrm>
+          <a:prstGeom prst="rect">
+            <a:avLst/>
+          </a:prstGeom>
+          <a:noFill/>
+          <a:ln/>
+        </p:spPr>
+        <p:txBody>
+          <a:bodyPr wrap="square" lIns="0" tIns="0" rIns="0" bIns="0" rtlCol="0" anchor="ctr"/>
+          <a:lstStyle/>
+          <a:p>
+            <a:pPr algn="ctr" indent="0" marL="0">
+              <a:buNone/>
+            </a:pPr>
+            <a:r>
+              <a:rPr lang="en-US" sz="1000" b="1" dirty="0">
+                <a:solidFill>
+                  <a:srgbClr val="FFFFFF"/>
+                </a:solidFill>
+                <a:latin typeface="Calibri" pitchFamily="34" charset="0"/>
+                <a:ea typeface="Calibri" pitchFamily="34" charset="-122"/>
+                <a:cs typeface="Calibri" pitchFamily="34" charset="-120"/>
+              </a:rPr>
+              <a:t>Adapt Agents</a:t>
+            </a:r>
+            <a:endParaRPr lang="en-US" sz="1000" dirty="0"/>
+          </a:p>
+        </p:txBody>
+      </p:sp>
+      <p:sp>
+        <p:nvSpPr>
+          <p:cNvPr id="29" name="Text 27"/>
+          <p:cNvSpPr/>
+          <p:nvPr/>
+        </p:nvSpPr>
+        <p:spPr>
+          <a:xfrm>
+            <a:off x="1764792" y="2916936"/>
+            <a:ext cx="1591056" cy="228600"/>
+          </a:xfrm>
+          <a:prstGeom prst="rect">
+            <a:avLst/>
+          </a:prstGeom>
+          <a:noFill/>
+          <a:ln/>
+        </p:spPr>
+        <p:txBody>
+          <a:bodyPr wrap="square" lIns="0" tIns="0" rIns="0" bIns="0" rtlCol="0" anchor="ctr"/>
+          <a:lstStyle/>
+          <a:p>
+            <a:pPr algn="ctr" indent="0" marL="0">
+              <a:buNone/>
+            </a:pPr>
+            <a:r>
+              <a:rPr lang="en-US" sz="900" dirty="0">
+                <a:solidFill>
+                  <a:srgbClr val="F8FAFC"/>
+                </a:solidFill>
+                <a:latin typeface="Calibri" pitchFamily="34" charset="0"/>
+                <a:ea typeface="Calibri" pitchFamily="34" charset="-122"/>
+                <a:cs typeface="Calibri" pitchFamily="34" charset="-120"/>
+              </a:rPr>
+              <a:t>W3-6</a:t>
+            </a:r>
+            <a:endParaRPr lang="en-US" sz="900" dirty="0"/>
+          </a:p>
+        </p:txBody>
+      </p:sp>
+      <p:sp>
+        <p:nvSpPr>
+          <p:cNvPr id="30" name="Shape 28"/>
+          <p:cNvSpPr/>
+          <p:nvPr/>
+        </p:nvSpPr>
+        <p:spPr>
+          <a:xfrm>
+            <a:off x="3566160" y="2606040"/>
+            <a:ext cx="1005840" cy="594360"/>
+          </a:xfrm>
+          <a:prstGeom prst="rect">
+            <a:avLst/>
+          </a:prstGeom>
+          <a:solidFill>
+            <a:srgbClr val="059669"/>
+          </a:solidFill>
+          <a:ln/>
+          <a:effectLst>
+            <a:outerShdw sx="100000" sy="100000" kx="0" ky="0" algn="bl" rotWithShape="0" blurRad="76200" dist="25400" dir="8100000">
+              <a:srgbClr val="94A3B8">
+                <a:alpha val="30000"/>
+              </a:srgbClr>
+            </a:outerShdw>
+          </a:effectLst>
+        </p:spPr>
+      </p:sp>
+      <p:sp>
+        <p:nvSpPr>
+          <p:cNvPr id="31" name="Text 29"/>
+          <p:cNvSpPr/>
+          <p:nvPr/>
+        </p:nvSpPr>
+        <p:spPr>
+          <a:xfrm>
+            <a:off x="3639312" y="2624328"/>
+            <a:ext cx="859536" cy="292608"/>
+          </a:xfrm>
+          <a:prstGeom prst="rect">
+            <a:avLst/>
+          </a:prstGeom>
+          <a:noFill/>
+          <a:ln/>
+        </p:spPr>
+        <p:txBody>
+          <a:bodyPr wrap="square" lIns="0" tIns="0" rIns="0" bIns="0" rtlCol="0" anchor="ctr"/>
+          <a:lstStyle/>
+          <a:p>
+            <a:pPr algn="ctr" indent="0" marL="0">
+              <a:buNone/>
+            </a:pPr>
+            <a:r>
+              <a:rPr lang="en-US" sz="1000" b="1" dirty="0">
+                <a:solidFill>
+                  <a:srgbClr val="FFFFFF"/>
+                </a:solidFill>
+                <a:latin typeface="Calibri" pitchFamily="34" charset="0"/>
+                <a:ea typeface="Calibri" pitchFamily="34" charset="-122"/>
+                <a:cs typeface="Calibri" pitchFamily="34" charset="-120"/>
+              </a:rPr>
+              <a:t>ADO Integ.</a:t>
+            </a:r>
+            <a:endParaRPr lang="en-US" sz="1000" dirty="0"/>
+          </a:p>
+        </p:txBody>
+      </p:sp>
+      <p:sp>
+        <p:nvSpPr>
+          <p:cNvPr id="32" name="Text 30"/>
+          <p:cNvSpPr/>
+          <p:nvPr/>
+        </p:nvSpPr>
+        <p:spPr>
+          <a:xfrm>
+            <a:off x="3639312" y="2916936"/>
+            <a:ext cx="859536" cy="228600"/>
+          </a:xfrm>
+          <a:prstGeom prst="rect">
+            <a:avLst/>
+          </a:prstGeom>
+          <a:noFill/>
+          <a:ln/>
+        </p:spPr>
+        <p:txBody>
+          <a:bodyPr wrap="square" lIns="0" tIns="0" rIns="0" bIns="0" rtlCol="0" anchor="ctr"/>
+          <a:lstStyle/>
+          <a:p>
+            <a:pPr algn="ctr" indent="0" marL="0">
+              <a:buNone/>
+            </a:pPr>
+            <a:r>
+              <a:rPr lang="en-US" sz="900" dirty="0">
+                <a:solidFill>
+                  <a:srgbClr val="F8FAFC"/>
+                </a:solidFill>
+                <a:latin typeface="Calibri" pitchFamily="34" charset="0"/>
+                <a:ea typeface="Calibri" pitchFamily="34" charset="-122"/>
+                <a:cs typeface="Calibri" pitchFamily="34" charset="-120"/>
+              </a:rPr>
+              <a:t>W7-8</a:t>
+            </a:r>
+            <a:endParaRPr lang="en-US" sz="900" dirty="0"/>
+          </a:p>
+        </p:txBody>
+      </p:sp>
+      <p:sp>
+        <p:nvSpPr>
+          <p:cNvPr id="33" name="Shape 31"/>
+          <p:cNvSpPr/>
+          <p:nvPr/>
+        </p:nvSpPr>
+        <p:spPr>
+          <a:xfrm>
+            <a:off x="4709160" y="2606040"/>
+            <a:ext cx="1188720" cy="594360"/>
+          </a:xfrm>
+          <a:prstGeom prst="rect">
+            <a:avLst/>
+          </a:prstGeom>
+          <a:solidFill>
+            <a:srgbClr val="0284C7"/>
+          </a:solidFill>
+          <a:ln/>
+          <a:effectLst>
+            <a:outerShdw sx="100000" sy="100000" kx="0" ky="0" algn="bl" rotWithShape="0" blurRad="76200" dist="25400" dir="8100000">
+              <a:srgbClr val="94A3B8">
+                <a:alpha val="30000"/>
+              </a:srgbClr>
+            </a:outerShdw>
+          </a:effectLst>
+        </p:spPr>
+      </p:sp>
+      <p:sp>
+        <p:nvSpPr>
+          <p:cNvPr id="34" name="Text 32"/>
+          <p:cNvSpPr/>
+          <p:nvPr/>
+        </p:nvSpPr>
+        <p:spPr>
+          <a:xfrm>
+            <a:off x="4782312" y="2624328"/>
+            <a:ext cx="1042416" cy="292608"/>
+          </a:xfrm>
+          <a:prstGeom prst="rect">
+            <a:avLst/>
+          </a:prstGeom>
+          <a:noFill/>
+          <a:ln/>
+        </p:spPr>
+        <p:txBody>
+          <a:bodyPr wrap="square" lIns="0" tIns="0" rIns="0" bIns="0" rtlCol="0" anchor="ctr"/>
+          <a:lstStyle/>
+          <a:p>
+            <a:pPr algn="ctr" indent="0" marL="0">
+              <a:buNone/>
+            </a:pPr>
+            <a:r>
+              <a:rPr lang="en-US" sz="1000" b="1" dirty="0">
+                <a:solidFill>
+                  <a:srgbClr val="FFFFFF"/>
+                </a:solidFill>
+                <a:latin typeface="Calibri" pitchFamily="34" charset="0"/>
+                <a:ea typeface="Calibri" pitchFamily="34" charset="-122"/>
+                <a:cs typeface="Calibri" pitchFamily="34" charset="-120"/>
+              </a:rPr>
+              <a:t>Pilot &amp; Debug</a:t>
+            </a:r>
+            <a:endParaRPr lang="en-US" sz="1000" dirty="0"/>
+          </a:p>
+        </p:txBody>
+      </p:sp>
+      <p:sp>
+        <p:nvSpPr>
+          <p:cNvPr id="35" name="Text 33"/>
+          <p:cNvSpPr/>
+          <p:nvPr/>
+        </p:nvSpPr>
+        <p:spPr>
+          <a:xfrm>
+            <a:off x="4782312" y="2916936"/>
+            <a:ext cx="1042416" cy="228600"/>
+          </a:xfrm>
+          <a:prstGeom prst="rect">
+            <a:avLst/>
+          </a:prstGeom>
+          <a:noFill/>
+          <a:ln/>
+        </p:spPr>
+        <p:txBody>
+          <a:bodyPr wrap="square" lIns="0" tIns="0" rIns="0" bIns="0" rtlCol="0" anchor="ctr"/>
+          <a:lstStyle/>
+          <a:p>
+            <a:pPr algn="ctr" indent="0" marL="0">
+              <a:buNone/>
+            </a:pPr>
+            <a:r>
+              <a:rPr lang="en-US" sz="900" dirty="0">
+                <a:solidFill>
+                  <a:srgbClr val="F8FAFC"/>
+                </a:solidFill>
+                <a:latin typeface="Calibri" pitchFamily="34" charset="0"/>
+                <a:ea typeface="Calibri" pitchFamily="34" charset="-122"/>
+                <a:cs typeface="Calibri" pitchFamily="34" charset="-120"/>
+              </a:rPr>
+              <a:t>W9-10</a:t>
+            </a:r>
+            <a:endParaRPr lang="en-US" sz="900" dirty="0"/>
+          </a:p>
+        </p:txBody>
+      </p:sp>
+      <p:sp>
+        <p:nvSpPr>
+          <p:cNvPr id="36" name="Shape 34"/>
+          <p:cNvSpPr/>
+          <p:nvPr/>
+        </p:nvSpPr>
+        <p:spPr>
+          <a:xfrm>
+            <a:off x="6035040" y="2606040"/>
+            <a:ext cx="822960" cy="594360"/>
+          </a:xfrm>
+          <a:prstGeom prst="rect">
+            <a:avLst/>
+          </a:prstGeom>
+          <a:solidFill>
+            <a:srgbClr val="D97706"/>
+          </a:solidFill>
+          <a:ln/>
+          <a:effectLst>
+            <a:outerShdw sx="100000" sy="100000" kx="0" ky="0" algn="bl" rotWithShape="0" blurRad="76200" dist="25400" dir="8100000">
+              <a:srgbClr val="94A3B8">
+                <a:alpha val="30000"/>
+              </a:srgbClr>
+            </a:outerShdw>
+          </a:effectLst>
+        </p:spPr>
+      </p:sp>
+      <p:sp>
+        <p:nvSpPr>
+          <p:cNvPr id="37" name="Text 35"/>
+          <p:cNvSpPr/>
+          <p:nvPr/>
+        </p:nvSpPr>
+        <p:spPr>
+          <a:xfrm>
+            <a:off x="6108192" y="2624328"/>
+            <a:ext cx="676656" cy="292608"/>
+          </a:xfrm>
+          <a:prstGeom prst="rect">
+            <a:avLst/>
+          </a:prstGeom>
+          <a:noFill/>
+          <a:ln/>
+        </p:spPr>
+        <p:txBody>
+          <a:bodyPr wrap="square" lIns="0" tIns="0" rIns="0" bIns="0" rtlCol="0" anchor="ctr"/>
+          <a:lstStyle/>
+          <a:p>
+            <a:pPr algn="ctr" indent="0" marL="0">
+              <a:buNone/>
+            </a:pPr>
+            <a:r>
+              <a:rPr lang="en-US" sz="1000" b="1" dirty="0">
+                <a:solidFill>
+                  <a:srgbClr val="FFFFFF"/>
+                </a:solidFill>
+                <a:latin typeface="Calibri" pitchFamily="34" charset="0"/>
+                <a:ea typeface="Calibri" pitchFamily="34" charset="-122"/>
+                <a:cs typeface="Calibri" pitchFamily="34" charset="-120"/>
+              </a:rPr>
+              <a:t>Refine</a:t>
+            </a:r>
+            <a:endParaRPr lang="en-US" sz="1000" dirty="0"/>
+          </a:p>
+        </p:txBody>
+      </p:sp>
+      <p:sp>
+        <p:nvSpPr>
+          <p:cNvPr id="38" name="Text 36"/>
+          <p:cNvSpPr/>
+          <p:nvPr/>
+        </p:nvSpPr>
+        <p:spPr>
+          <a:xfrm>
+            <a:off x="6108192" y="2916936"/>
+            <a:ext cx="676656" cy="228600"/>
+          </a:xfrm>
+          <a:prstGeom prst="rect">
+            <a:avLst/>
+          </a:prstGeom>
+          <a:noFill/>
+          <a:ln/>
+        </p:spPr>
+        <p:txBody>
+          <a:bodyPr wrap="square" lIns="0" tIns="0" rIns="0" bIns="0" rtlCol="0" anchor="ctr"/>
+          <a:lstStyle/>
+          <a:p>
+            <a:pPr algn="ctr" indent="0" marL="0">
+              <a:buNone/>
+            </a:pPr>
+            <a:r>
+              <a:rPr lang="en-US" sz="900" dirty="0">
+                <a:solidFill>
+                  <a:srgbClr val="F8FAFC"/>
+                </a:solidFill>
+                <a:latin typeface="Calibri" pitchFamily="34" charset="0"/>
+                <a:ea typeface="Calibri" pitchFamily="34" charset="-122"/>
+                <a:cs typeface="Calibri" pitchFamily="34" charset="-120"/>
+              </a:rPr>
+              <a:t>W11-12</a:t>
+            </a:r>
+            <a:endParaRPr lang="en-US" sz="900" dirty="0"/>
+          </a:p>
+        </p:txBody>
+      </p:sp>
+      <p:sp>
+        <p:nvSpPr>
+          <p:cNvPr id="39" name="Shape 37"/>
+          <p:cNvSpPr/>
+          <p:nvPr/>
+        </p:nvSpPr>
+        <p:spPr>
+          <a:xfrm>
+            <a:off x="7315200" y="2651760"/>
+            <a:ext cx="1371600" cy="502920"/>
+          </a:xfrm>
+          <a:prstGeom prst="rect">
+            <a:avLst/>
+          </a:prstGeom>
+          <a:solidFill>
+            <a:srgbClr val="FFFFFF"/>
+          </a:solidFill>
+          <a:ln/>
+        </p:spPr>
+      </p:sp>
+      <p:sp>
+        <p:nvSpPr>
+          <p:cNvPr id="40" name="Text 38"/>
+          <p:cNvSpPr/>
+          <p:nvPr/>
+        </p:nvSpPr>
+        <p:spPr>
+          <a:xfrm>
+            <a:off x="7315200" y="2670048"/>
+            <a:ext cx="1371600" cy="274320"/>
+          </a:xfrm>
+          <a:prstGeom prst="rect">
+            <a:avLst/>
+          </a:prstGeom>
+          <a:noFill/>
+          <a:ln/>
+        </p:spPr>
+        <p:txBody>
+          <a:bodyPr wrap="square" lIns="0" tIns="0" rIns="0" bIns="0" rtlCol="0" anchor="ctr"/>
+          <a:lstStyle/>
+          <a:p>
+            <a:pPr algn="ctr" indent="0" marL="0">
+              <a:buNone/>
+            </a:pPr>
+            <a:r>
+              <a:rPr lang="en-US" sz="1800" b="1" dirty="0">
+                <a:solidFill>
+                  <a:srgbClr val="D97706"/>
+                </a:solidFill>
+                <a:latin typeface="Trebuchet MS" pitchFamily="34" charset="0"/>
+                <a:ea typeface="Trebuchet MS" pitchFamily="34" charset="-122"/>
+                <a:cs typeface="Trebuchet MS" pitchFamily="34" charset="-120"/>
+              </a:rPr>
+              <a:t>12 weeks</a:t>
+            </a:r>
+            <a:endParaRPr lang="en-US" sz="1800" dirty="0"/>
+          </a:p>
+        </p:txBody>
+      </p:sp>
+      <p:sp>
+        <p:nvSpPr>
+          <p:cNvPr id="41" name="Text 39"/>
+          <p:cNvSpPr/>
+          <p:nvPr/>
+        </p:nvSpPr>
+        <p:spPr>
+          <a:xfrm>
+            <a:off x="7315200" y="2944368"/>
+            <a:ext cx="1371600" cy="182880"/>
+          </a:xfrm>
+          <a:prstGeom prst="rect">
+            <a:avLst/>
+          </a:prstGeom>
+          <a:noFill/>
+          <a:ln/>
+        </p:spPr>
+        <p:txBody>
+          <a:bodyPr wrap="square" lIns="0" tIns="0" rIns="0" bIns="0" rtlCol="0" anchor="ctr"/>
+          <a:lstStyle/>
+          <a:p>
+            <a:pPr algn="ctr" indent="0" marL="0">
+              <a:buNone/>
+            </a:pPr>
+            <a:r>
+              <a:rPr lang="en-US" sz="1000" dirty="0">
+                <a:solidFill>
+                  <a:srgbClr val="475569"/>
+                </a:solidFill>
+                <a:latin typeface="Calibri" pitchFamily="34" charset="0"/>
+                <a:ea typeface="Calibri" pitchFamily="34" charset="-122"/>
+                <a:cs typeface="Calibri" pitchFamily="34" charset="-120"/>
+              </a:rPr>
+              <a:t>total</a:t>
+            </a:r>
+            <a:endParaRPr lang="en-US" sz="1000" dirty="0"/>
+          </a:p>
+        </p:txBody>
+      </p:sp>
+      <p:sp>
+        <p:nvSpPr>
+          <p:cNvPr id="42" name="Text 40"/>
+          <p:cNvSpPr/>
+          <p:nvPr/>
+        </p:nvSpPr>
+        <p:spPr>
+          <a:xfrm>
+            <a:off x="731520" y="3520440"/>
+            <a:ext cx="3657600" cy="274320"/>
+          </a:xfrm>
+          <a:prstGeom prst="rect">
+            <a:avLst/>
+          </a:prstGeom>
+          <a:noFill/>
+          <a:ln/>
+        </p:spPr>
+        <p:txBody>
+          <a:bodyPr wrap="square" lIns="0" tIns="0" rIns="0" bIns="0" rtlCol="0" anchor="ctr"/>
+          <a:lstStyle/>
+          <a:p>
+            <a:pPr indent="0" marL="0">
+              <a:buNone/>
+            </a:pPr>
+            <a:r>
+              <a:rPr lang="en-US" sz="1200" b="1" dirty="0">
+                <a:solidFill>
+                  <a:srgbClr val="0369A1"/>
+                </a:solidFill>
+                <a:latin typeface="Trebuchet MS" pitchFamily="34" charset="0"/>
+                <a:ea typeface="Trebuchet MS" pitchFamily="34" charset="-122"/>
+                <a:cs typeface="Trebuchet MS" pitchFamily="34" charset="-120"/>
+              </a:rPr>
+              <a:t>EFFORT COMPARISON</a:t>
+            </a:r>
+            <a:endParaRPr lang="en-US" sz="1200" dirty="0"/>
+          </a:p>
+        </p:txBody>
+      </p:sp>
+      <p:sp>
+        <p:nvSpPr>
+          <p:cNvPr id="43" name="Shape 41"/>
+          <p:cNvSpPr/>
+          <p:nvPr/>
+        </p:nvSpPr>
+        <p:spPr>
+          <a:xfrm>
+            <a:off x="457200" y="3886200"/>
+            <a:ext cx="2286000" cy="256032"/>
+          </a:xfrm>
+          <a:prstGeom prst="rect">
+            <a:avLst/>
+          </a:prstGeom>
+          <a:solidFill>
+            <a:srgbClr val="E2E8F0"/>
+          </a:solidFill>
+          <a:ln/>
+        </p:spPr>
+      </p:sp>
+      <p:sp>
+        <p:nvSpPr>
+          <p:cNvPr id="44" name="Text 42"/>
+          <p:cNvSpPr/>
+          <p:nvPr/>
+        </p:nvSpPr>
+        <p:spPr>
+          <a:xfrm>
+            <a:off x="548640" y="3886200"/>
+            <a:ext cx="2103120" cy="256032"/>
+          </a:xfrm>
+          <a:prstGeom prst="rect">
+            <a:avLst/>
+          </a:prstGeom>
+          <a:noFill/>
+          <a:ln/>
+        </p:spPr>
+        <p:txBody>
+          <a:bodyPr wrap="square" lIns="0" tIns="0" rIns="0" bIns="0" rtlCol="0" anchor="ctr"/>
+          <a:lstStyle/>
+          <a:p>
+            <a:pPr indent="0" marL="0">
+              <a:buNone/>
+            </a:pPr>
+            <a:r>
+              <a:rPr lang="en-US" sz="1000" b="1" dirty="0">
+                <a:solidFill>
+                  <a:srgbClr val="0F172A"/>
+                </a:solidFill>
+                <a:latin typeface="Calibri" pitchFamily="34" charset="0"/>
+                <a:ea typeface="Calibri" pitchFamily="34" charset="-122"/>
+                <a:cs typeface="Calibri" pitchFamily="34" charset="-120"/>
+              </a:rPr>
+              <a:t>Production Code</a:t>
+            </a:r>
+            <a:endParaRPr lang="en-US" sz="1000" dirty="0"/>
+          </a:p>
+        </p:txBody>
+      </p:sp>
+      <p:sp>
+        <p:nvSpPr>
+          <p:cNvPr id="45" name="Shape 43"/>
+          <p:cNvSpPr/>
+          <p:nvPr/>
+        </p:nvSpPr>
+        <p:spPr>
+          <a:xfrm>
+            <a:off x="2926080" y="3886200"/>
+            <a:ext cx="2926080" cy="256032"/>
+          </a:xfrm>
+          <a:prstGeom prst="rect">
+            <a:avLst/>
+          </a:prstGeom>
+          <a:solidFill>
+            <a:srgbClr val="E0F2FE"/>
+          </a:solidFill>
+          <a:ln/>
+        </p:spPr>
+      </p:sp>
+      <p:sp>
+        <p:nvSpPr>
+          <p:cNvPr id="46" name="Text 44"/>
+          <p:cNvSpPr/>
+          <p:nvPr/>
+        </p:nvSpPr>
+        <p:spPr>
+          <a:xfrm>
+            <a:off x="3017520" y="3886200"/>
+            <a:ext cx="2743200" cy="256032"/>
+          </a:xfrm>
+          <a:prstGeom prst="rect">
+            <a:avLst/>
+          </a:prstGeom>
+          <a:noFill/>
+          <a:ln/>
+        </p:spPr>
+        <p:txBody>
+          <a:bodyPr wrap="square" lIns="0" tIns="0" rIns="0" bIns="0" rtlCol="0" anchor="ctr"/>
+          <a:lstStyle/>
+          <a:p>
+            <a:pPr indent="0" marL="0">
+              <a:buNone/>
+            </a:pPr>
+            <a:r>
+              <a:rPr lang="en-US" sz="1000" dirty="0">
+                <a:solidFill>
+                  <a:srgbClr val="0284C7"/>
+                </a:solidFill>
+                <a:latin typeface="Calibri" pitchFamily="34" charset="0"/>
+                <a:ea typeface="Calibri" pitchFamily="34" charset="-122"/>
+                <a:cs typeface="Calibri" pitchFamily="34" charset="-120"/>
+              </a:rPr>
+              <a:t>888 lines Python + 525 TOML</a:t>
+            </a:r>
+            <a:endParaRPr lang="en-US" sz="1000" dirty="0"/>
+          </a:p>
+        </p:txBody>
+      </p:sp>
+      <p:sp>
+        <p:nvSpPr>
+          <p:cNvPr id="47" name="Shape 45"/>
+          <p:cNvSpPr/>
+          <p:nvPr/>
+        </p:nvSpPr>
+        <p:spPr>
+          <a:xfrm>
+            <a:off x="6035040" y="3886200"/>
+            <a:ext cx="2926080" cy="256032"/>
+          </a:xfrm>
+          <a:prstGeom prst="rect">
+            <a:avLst/>
+          </a:prstGeom>
+          <a:solidFill>
+            <a:srgbClr val="FEF3C7"/>
+          </a:solidFill>
+          <a:ln/>
+        </p:spPr>
+      </p:sp>
+      <p:sp>
+        <p:nvSpPr>
+          <p:cNvPr id="48" name="Text 46"/>
+          <p:cNvSpPr/>
+          <p:nvPr/>
+        </p:nvSpPr>
+        <p:spPr>
+          <a:xfrm>
+            <a:off x="6126480" y="3886200"/>
+            <a:ext cx="2743200" cy="256032"/>
+          </a:xfrm>
+          <a:prstGeom prst="rect">
+            <a:avLst/>
+          </a:prstGeom>
+          <a:noFill/>
+          <a:ln/>
+        </p:spPr>
+        <p:txBody>
+          <a:bodyPr wrap="square" lIns="0" tIns="0" rIns="0" bIns="0" rtlCol="0" anchor="ctr"/>
+          <a:lstStyle/>
+          <a:p>
+            <a:pPr indent="0" marL="0">
+              <a:buNone/>
+            </a:pPr>
+            <a:r>
+              <a:rPr lang="en-US" sz="1000" dirty="0">
+                <a:solidFill>
+                  <a:srgbClr val="D97706"/>
+                </a:solidFill>
+                <a:latin typeface="Calibri" pitchFamily="34" charset="0"/>
+                <a:ea typeface="Calibri" pitchFamily="34" charset="-122"/>
+                <a:cs typeface="Calibri" pitchFamily="34" charset="-120"/>
+              </a:rPr>
+              <a:t>2,394 lines Python</a:t>
+            </a:r>
+            <a:endParaRPr lang="en-US" sz="1000" dirty="0"/>
+          </a:p>
+        </p:txBody>
+      </p:sp>
+      <p:sp>
+        <p:nvSpPr>
+          <p:cNvPr id="49" name="Shape 47"/>
+          <p:cNvSpPr/>
+          <p:nvPr/>
+        </p:nvSpPr>
+        <p:spPr>
+          <a:xfrm>
+            <a:off x="457200" y="4187952"/>
+            <a:ext cx="2286000" cy="256032"/>
+          </a:xfrm>
+          <a:prstGeom prst="rect">
+            <a:avLst/>
+          </a:prstGeom>
+          <a:solidFill>
+            <a:srgbClr val="E2E8F0"/>
+          </a:solidFill>
+          <a:ln/>
+        </p:spPr>
+      </p:sp>
+      <p:sp>
+        <p:nvSpPr>
+          <p:cNvPr id="50" name="Text 48"/>
+          <p:cNvSpPr/>
+          <p:nvPr/>
+        </p:nvSpPr>
+        <p:spPr>
+          <a:xfrm>
+            <a:off x="548640" y="4187952"/>
+            <a:ext cx="2103120" cy="256032"/>
+          </a:xfrm>
+          <a:prstGeom prst="rect">
+            <a:avLst/>
+          </a:prstGeom>
+          <a:noFill/>
+          <a:ln/>
+        </p:spPr>
+        <p:txBody>
+          <a:bodyPr wrap="square" lIns="0" tIns="0" rIns="0" bIns="0" rtlCol="0" anchor="ctr"/>
+          <a:lstStyle/>
+          <a:p>
+            <a:pPr indent="0" marL="0">
+              <a:buNone/>
+            </a:pPr>
+            <a:r>
+              <a:rPr lang="en-US" sz="1000" b="1" dirty="0">
+                <a:solidFill>
+                  <a:srgbClr val="0F172A"/>
+                </a:solidFill>
+                <a:latin typeface="Calibri" pitchFamily="34" charset="0"/>
+                <a:ea typeface="Calibri" pitchFamily="34" charset="-122"/>
+                <a:cs typeface="Calibri" pitchFamily="34" charset="-120"/>
+              </a:rPr>
+              <a:t>Test Suite</a:t>
+            </a:r>
+            <a:endParaRPr lang="en-US" sz="1000" dirty="0"/>
+          </a:p>
+        </p:txBody>
+      </p:sp>
+      <p:sp>
+        <p:nvSpPr>
+          <p:cNvPr id="51" name="Shape 49"/>
+          <p:cNvSpPr/>
+          <p:nvPr/>
+        </p:nvSpPr>
+        <p:spPr>
+          <a:xfrm>
+            <a:off x="2926080" y="4187952"/>
+            <a:ext cx="2926080" cy="256032"/>
+          </a:xfrm>
+          <a:prstGeom prst="rect">
+            <a:avLst/>
+          </a:prstGeom>
+          <a:solidFill>
+            <a:srgbClr val="E0F2FE"/>
+          </a:solidFill>
+          <a:ln/>
+        </p:spPr>
+      </p:sp>
+      <p:sp>
+        <p:nvSpPr>
+          <p:cNvPr id="52" name="Text 50"/>
+          <p:cNvSpPr/>
+          <p:nvPr/>
+        </p:nvSpPr>
+        <p:spPr>
+          <a:xfrm>
+            <a:off x="3017520" y="4187952"/>
+            <a:ext cx="2743200" cy="256032"/>
+          </a:xfrm>
+          <a:prstGeom prst="rect">
+            <a:avLst/>
+          </a:prstGeom>
+          <a:noFill/>
+          <a:ln/>
+        </p:spPr>
+        <p:txBody>
+          <a:bodyPr wrap="square" lIns="0" tIns="0" rIns="0" bIns="0" rtlCol="0" anchor="ctr"/>
+          <a:lstStyle/>
+          <a:p>
+            <a:pPr indent="0" marL="0">
+              <a:buNone/>
+            </a:pPr>
+            <a:r>
+              <a:rPr lang="en-US" sz="1000" dirty="0">
+                <a:solidFill>
+                  <a:srgbClr val="0284C7"/>
+                </a:solidFill>
+                <a:latin typeface="Calibri" pitchFamily="34" charset="0"/>
+                <a:ea typeface="Calibri" pitchFamily="34" charset="-122"/>
+                <a:cs typeface="Calibri" pitchFamily="34" charset="-120"/>
+              </a:rPr>
+              <a:t>359 lines (4 modules)</a:t>
+            </a:r>
+            <a:endParaRPr lang="en-US" sz="1000" dirty="0"/>
+          </a:p>
+        </p:txBody>
+      </p:sp>
+      <p:sp>
+        <p:nvSpPr>
+          <p:cNvPr id="53" name="Shape 51"/>
+          <p:cNvSpPr/>
+          <p:nvPr/>
+        </p:nvSpPr>
+        <p:spPr>
+          <a:xfrm>
+            <a:off x="6035040" y="4187952"/>
+            <a:ext cx="2926080" cy="256032"/>
+          </a:xfrm>
+          <a:prstGeom prst="rect">
+            <a:avLst/>
+          </a:prstGeom>
+          <a:solidFill>
+            <a:srgbClr val="FEF3C7"/>
+          </a:solidFill>
+          <a:ln/>
+        </p:spPr>
+      </p:sp>
+      <p:sp>
+        <p:nvSpPr>
+          <p:cNvPr id="54" name="Text 52"/>
+          <p:cNvSpPr/>
+          <p:nvPr/>
+        </p:nvSpPr>
+        <p:spPr>
+          <a:xfrm>
+            <a:off x="6126480" y="4187952"/>
+            <a:ext cx="2743200" cy="256032"/>
+          </a:xfrm>
+          <a:prstGeom prst="rect">
+            <a:avLst/>
+          </a:prstGeom>
+          <a:noFill/>
+          <a:ln/>
+        </p:spPr>
+        <p:txBody>
+          <a:bodyPr wrap="square" lIns="0" tIns="0" rIns="0" bIns="0" rtlCol="0" anchor="ctr"/>
+          <a:lstStyle/>
+          <a:p>
+            <a:pPr indent="0" marL="0">
+              <a:buNone/>
+            </a:pPr>
+            <a:r>
+              <a:rPr lang="en-US" sz="1000" dirty="0">
+                <a:solidFill>
+                  <a:srgbClr val="D97706"/>
+                </a:solidFill>
+                <a:latin typeface="Calibri" pitchFamily="34" charset="0"/>
+                <a:ea typeface="Calibri" pitchFamily="34" charset="-122"/>
+                <a:cs typeface="Calibri" pitchFamily="34" charset="-120"/>
+              </a:rPr>
+              <a:t>1,119 lines (9 modules)</a:t>
+            </a:r>
+            <a:endParaRPr lang="en-US" sz="1000" dirty="0"/>
+          </a:p>
+        </p:txBody>
+      </p:sp>
+      <p:sp>
+        <p:nvSpPr>
+          <p:cNvPr id="55" name="Shape 53"/>
+          <p:cNvSpPr/>
+          <p:nvPr/>
+        </p:nvSpPr>
+        <p:spPr>
+          <a:xfrm>
+            <a:off x="457200" y="4489704"/>
+            <a:ext cx="2286000" cy="256032"/>
+          </a:xfrm>
+          <a:prstGeom prst="rect">
+            <a:avLst/>
+          </a:prstGeom>
+          <a:solidFill>
+            <a:srgbClr val="E2E8F0"/>
+          </a:solidFill>
+          <a:ln/>
+        </p:spPr>
+      </p:sp>
+      <p:sp>
+        <p:nvSpPr>
+          <p:cNvPr id="56" name="Text 54"/>
+          <p:cNvSpPr/>
+          <p:nvPr/>
+        </p:nvSpPr>
+        <p:spPr>
+          <a:xfrm>
+            <a:off x="548640" y="4489704"/>
+            <a:ext cx="2103120" cy="256032"/>
+          </a:xfrm>
+          <a:prstGeom prst="rect">
+            <a:avLst/>
+          </a:prstGeom>
+          <a:noFill/>
+          <a:ln/>
+        </p:spPr>
+        <p:txBody>
+          <a:bodyPr wrap="square" lIns="0" tIns="0" rIns="0" bIns="0" rtlCol="0" anchor="ctr"/>
+          <a:lstStyle/>
+          <a:p>
+            <a:pPr indent="0" marL="0">
+              <a:buNone/>
+            </a:pPr>
+            <a:r>
+              <a:rPr lang="en-US" sz="1000" b="1" dirty="0">
+                <a:solidFill>
+                  <a:srgbClr val="0F172A"/>
+                </a:solidFill>
+                <a:latin typeface="Calibri" pitchFamily="34" charset="0"/>
+                <a:ea typeface="Calibri" pitchFamily="34" charset="-122"/>
+                <a:cs typeface="Calibri" pitchFamily="34" charset="-120"/>
+              </a:rPr>
+              <a:t>Skills Needed</a:t>
+            </a:r>
+            <a:endParaRPr lang="en-US" sz="1000" dirty="0"/>
+          </a:p>
+        </p:txBody>
+      </p:sp>
+      <p:sp>
+        <p:nvSpPr>
+          <p:cNvPr id="57" name="Shape 55"/>
+          <p:cNvSpPr/>
+          <p:nvPr/>
+        </p:nvSpPr>
+        <p:spPr>
+          <a:xfrm>
+            <a:off x="2926080" y="4489704"/>
+            <a:ext cx="2926080" cy="256032"/>
+          </a:xfrm>
+          <a:prstGeom prst="rect">
+            <a:avLst/>
+          </a:prstGeom>
+          <a:solidFill>
+            <a:srgbClr val="E0F2FE"/>
+          </a:solidFill>
+          <a:ln/>
+        </p:spPr>
+      </p:sp>
+      <p:sp>
+        <p:nvSpPr>
+          <p:cNvPr id="58" name="Text 56"/>
+          <p:cNvSpPr/>
+          <p:nvPr/>
+        </p:nvSpPr>
+        <p:spPr>
+          <a:xfrm>
+            <a:off x="3017520" y="4489704"/>
+            <a:ext cx="2743200" cy="256032"/>
+          </a:xfrm>
+          <a:prstGeom prst="rect">
+            <a:avLst/>
+          </a:prstGeom>
+          <a:noFill/>
+          <a:ln/>
+        </p:spPr>
+        <p:txBody>
+          <a:bodyPr wrap="square" lIns="0" tIns="0" rIns="0" bIns="0" rtlCol="0" anchor="ctr"/>
+          <a:lstStyle/>
+          <a:p>
+            <a:pPr indent="0" marL="0">
+              <a:buNone/>
+            </a:pPr>
+            <a:r>
+              <a:rPr lang="en-US" sz="1000" dirty="0">
+                <a:solidFill>
+                  <a:srgbClr val="0284C7"/>
+                </a:solidFill>
+                <a:latin typeface="Calibri" pitchFamily="34" charset="0"/>
+                <a:ea typeface="Calibri" pitchFamily="34" charset="-122"/>
+                <a:cs typeface="Calibri" pitchFamily="34" charset="-120"/>
+              </a:rPr>
+              <a:t>TOML + Markdown + thin Python</a:t>
+            </a:r>
+            <a:endParaRPr lang="en-US" sz="1000" dirty="0"/>
+          </a:p>
+        </p:txBody>
+      </p:sp>
+      <p:sp>
+        <p:nvSpPr>
+          <p:cNvPr id="59" name="Shape 57"/>
+          <p:cNvSpPr/>
+          <p:nvPr/>
+        </p:nvSpPr>
+        <p:spPr>
+          <a:xfrm>
+            <a:off x="6035040" y="4489704"/>
+            <a:ext cx="2926080" cy="256032"/>
+          </a:xfrm>
+          <a:prstGeom prst="rect">
+            <a:avLst/>
+          </a:prstGeom>
+          <a:solidFill>
+            <a:srgbClr val="FEF3C7"/>
+          </a:solidFill>
+          <a:ln/>
+        </p:spPr>
+      </p:sp>
+      <p:sp>
+        <p:nvSpPr>
+          <p:cNvPr id="60" name="Text 58"/>
+          <p:cNvSpPr/>
+          <p:nvPr/>
+        </p:nvSpPr>
+        <p:spPr>
+          <a:xfrm>
+            <a:off x="6126480" y="4489704"/>
+            <a:ext cx="2743200" cy="256032"/>
+          </a:xfrm>
+          <a:prstGeom prst="rect">
+            <a:avLst/>
+          </a:prstGeom>
+          <a:noFill/>
+          <a:ln/>
+        </p:spPr>
+        <p:txBody>
+          <a:bodyPr wrap="square" lIns="0" tIns="0" rIns="0" bIns="0" rtlCol="0" anchor="ctr"/>
+          <a:lstStyle/>
+          <a:p>
+            <a:pPr indent="0" marL="0">
+              <a:buNone/>
+            </a:pPr>
+            <a:r>
+              <a:rPr lang="en-US" sz="1000" dirty="0">
+                <a:solidFill>
+                  <a:srgbClr val="D97706"/>
+                </a:solidFill>
+                <a:latin typeface="Calibri" pitchFamily="34" charset="0"/>
+                <a:ea typeface="Calibri" pitchFamily="34" charset="-122"/>
+                <a:cs typeface="Calibri" pitchFamily="34" charset="-120"/>
+              </a:rPr>
+              <a:t>Python + context eng. + SQLite</a:t>
+            </a:r>
+            <a:endParaRPr lang="en-US" sz="1000" dirty="0"/>
+          </a:p>
+        </p:txBody>
+      </p:sp>
+      <p:sp>
+        <p:nvSpPr>
+          <p:cNvPr id="61" name="Shape 59"/>
+          <p:cNvSpPr/>
+          <p:nvPr/>
+        </p:nvSpPr>
+        <p:spPr>
+          <a:xfrm>
+            <a:off x="457200" y="4791456"/>
+            <a:ext cx="2286000" cy="256032"/>
+          </a:xfrm>
+          <a:prstGeom prst="rect">
+            <a:avLst/>
+          </a:prstGeom>
+          <a:solidFill>
+            <a:srgbClr val="E2E8F0"/>
+          </a:solidFill>
+          <a:ln/>
+        </p:spPr>
+      </p:sp>
+      <p:sp>
+        <p:nvSpPr>
+          <p:cNvPr id="62" name="Text 60"/>
+          <p:cNvSpPr/>
+          <p:nvPr/>
+        </p:nvSpPr>
+        <p:spPr>
+          <a:xfrm>
+            <a:off x="548640" y="4791456"/>
+            <a:ext cx="2103120" cy="256032"/>
+          </a:xfrm>
+          <a:prstGeom prst="rect">
+            <a:avLst/>
+          </a:prstGeom>
+          <a:noFill/>
+          <a:ln/>
+        </p:spPr>
+        <p:txBody>
+          <a:bodyPr wrap="square" lIns="0" tIns="0" rIns="0" bIns="0" rtlCol="0" anchor="ctr"/>
+          <a:lstStyle/>
+          <a:p>
+            <a:pPr indent="0" marL="0">
+              <a:buNone/>
+            </a:pPr>
+            <a:r>
+              <a:rPr lang="en-US" sz="1000" b="1" dirty="0">
+                <a:solidFill>
+                  <a:srgbClr val="0F172A"/>
+                </a:solidFill>
+                <a:latin typeface="Calibri" pitchFamily="34" charset="0"/>
+                <a:ea typeface="Calibri" pitchFamily="34" charset="-122"/>
+                <a:cs typeface="Calibri" pitchFamily="34" charset="-120"/>
+              </a:rPr>
+              <a:t>Ongoing Maint.</a:t>
+            </a:r>
+            <a:endParaRPr lang="en-US" sz="1000" dirty="0"/>
+          </a:p>
+        </p:txBody>
+      </p:sp>
+      <p:sp>
+        <p:nvSpPr>
+          <p:cNvPr id="63" name="Shape 61"/>
+          <p:cNvSpPr/>
+          <p:nvPr/>
+        </p:nvSpPr>
+        <p:spPr>
+          <a:xfrm>
+            <a:off x="2926080" y="4791456"/>
+            <a:ext cx="2926080" cy="256032"/>
+          </a:xfrm>
+          <a:prstGeom prst="rect">
+            <a:avLst/>
+          </a:prstGeom>
+          <a:solidFill>
+            <a:srgbClr val="E0F2FE"/>
+          </a:solidFill>
+          <a:ln/>
+        </p:spPr>
+      </p:sp>
+      <p:sp>
+        <p:nvSpPr>
+          <p:cNvPr id="64" name="Text 62"/>
+          <p:cNvSpPr/>
+          <p:nvPr/>
+        </p:nvSpPr>
+        <p:spPr>
+          <a:xfrm>
+            <a:off x="3017520" y="4791456"/>
+            <a:ext cx="2743200" cy="256032"/>
+          </a:xfrm>
+          <a:prstGeom prst="rect">
+            <a:avLst/>
+          </a:prstGeom>
+          <a:noFill/>
+          <a:ln/>
+        </p:spPr>
+        <p:txBody>
+          <a:bodyPr wrap="square" lIns="0" tIns="0" rIns="0" bIns="0" rtlCol="0" anchor="ctr"/>
+          <a:lstStyle/>
+          <a:p>
+            <a:pPr indent="0" marL="0">
+              <a:buNone/>
+            </a:pPr>
+            <a:r>
+              <a:rPr lang="en-US" sz="1000" dirty="0">
+                <a:solidFill>
+                  <a:srgbClr val="0284C7"/>
+                </a:solidFill>
+                <a:latin typeface="Calibri" pitchFamily="34" charset="0"/>
+                <a:ea typeface="Calibri" pitchFamily="34" charset="-122"/>
+                <a:cs typeface="Calibri" pitchFamily="34" charset="-120"/>
+              </a:rPr>
+              <a:t>Edit TOML/MD config files</a:t>
+            </a:r>
+            <a:endParaRPr lang="en-US" sz="1000" dirty="0"/>
+          </a:p>
+        </p:txBody>
+      </p:sp>
+      <p:sp>
+        <p:nvSpPr>
+          <p:cNvPr id="65" name="Shape 63"/>
+          <p:cNvSpPr/>
+          <p:nvPr/>
+        </p:nvSpPr>
+        <p:spPr>
+          <a:xfrm>
+            <a:off x="6035040" y="4791456"/>
+            <a:ext cx="2926080" cy="256032"/>
+          </a:xfrm>
+          <a:prstGeom prst="rect">
+            <a:avLst/>
+          </a:prstGeom>
+          <a:solidFill>
+            <a:srgbClr val="FEF3C7"/>
+          </a:solidFill>
+          <a:ln/>
+        </p:spPr>
+      </p:sp>
+      <p:sp>
+        <p:nvSpPr>
+          <p:cNvPr id="66" name="Text 64"/>
+          <p:cNvSpPr/>
+          <p:nvPr/>
+        </p:nvSpPr>
+        <p:spPr>
+          <a:xfrm>
+            <a:off x="6126480" y="4791456"/>
+            <a:ext cx="2743200" cy="256032"/>
+          </a:xfrm>
+          <a:prstGeom prst="rect">
+            <a:avLst/>
+          </a:prstGeom>
+          <a:noFill/>
+          <a:ln/>
+        </p:spPr>
+        <p:txBody>
+          <a:bodyPr wrap="square" lIns="0" tIns="0" rIns="0" bIns="0" rtlCol="0" anchor="ctr"/>
+          <a:lstStyle/>
+          <a:p>
+            <a:pPr indent="0" marL="0">
+              <a:buNone/>
+            </a:pPr>
+            <a:r>
+              <a:rPr lang="en-US" sz="1000" dirty="0">
+                <a:solidFill>
+                  <a:srgbClr val="D97706"/>
+                </a:solidFill>
+                <a:latin typeface="Calibri" pitchFamily="34" charset="0"/>
+                <a:ea typeface="Calibri" pitchFamily="34" charset="-122"/>
+                <a:cs typeface="Calibri" pitchFamily="34" charset="-120"/>
+              </a:rPr>
+              <a:t>Maintain 2,394-line codebase</a:t>
+            </a:r>
+            <a:endParaRPr lang="en-US" sz="1000" dirty="0"/>
+          </a:p>
+        </p:txBody>
+      </p:sp>
+    </p:spTree>
+  </p:cSld>
+  <p:clrMapOvr>
+    <a:masterClrMapping/>
+  </p:clrMapOvr>
+</p:sld>
+</file>
+
+<file path=ppt/slides/slide12.xml><?xml version="1.0" encoding="utf-8"?>
+<p:sld xmlns:a="http://schemas.openxmlformats.org/drawingml/2006/main" xmlns:r="http://schemas.openxmlformats.org/officeDocument/2006/relationships" xmlns:p="http://schemas.openxmlformats.org/presentationml/2006/main">
+  <p:cSld name="Slide 12">
+    <p:bg>
+      <p:bgPr>
+        <a:solidFill>
+          <a:srgbClr val="F8FAFC"/>
+        </a:solidFill>
+      </p:bgPr>
+    </p:bg>
+    <p:spTree>
+      <p:nvGrpSpPr>
+        <p:cNvPr id="1" name=""/>
+        <p:cNvGrpSpPr/>
+        <p:nvPr/>
+      </p:nvGrpSpPr>
+      <p:grpSpPr>
+        <a:xfrm>
+          <a:off x="0" y="0"/>
+          <a:ext cx="0" cy="0"/>
+          <a:chOff x="0" y="0"/>
+          <a:chExt cx="0" cy="0"/>
+        </a:xfrm>
+      </p:grpSpPr>
+      <p:sp>
+        <p:nvSpPr>
+          <p:cNvPr id="2" name="Shape 0"/>
+          <p:cNvSpPr/>
+          <p:nvPr/>
+        </p:nvSpPr>
+        <p:spPr>
+          <a:xfrm>
+            <a:off x="0" y="0"/>
+            <a:ext cx="9144000" cy="54864"/>
+          </a:xfrm>
+          <a:prstGeom prst="rect">
+            <a:avLst/>
+          </a:prstGeom>
+          <a:solidFill>
             <a:srgbClr val="059669"/>
           </a:solidFill>
           <a:ln/>
@@ -5015,9 +8514,9 @@
 </p:sld>
 </file>
 
-<file path=ppt/slides/slide12.xml><?xml version="1.0" encoding="utf-8"?>
+<file path=ppt/slides/slide13.xml><?xml version="1.0" encoding="utf-8"?>
 <p:sld xmlns:a="http://schemas.openxmlformats.org/drawingml/2006/main" xmlns:r="http://schemas.openxmlformats.org/officeDocument/2006/relationships" xmlns:p="http://schemas.openxmlformats.org/presentationml/2006/main">
-  <p:cSld name="Slide 12">
+  <p:cSld name="Slide 13">
     <p:bg>
       <p:bgPr>
         <a:solidFill>

--- a/Migration-Agent-Architecture-Options.pptx
+++ b/Migration-Agent-Architecture-Options.pptx
@@ -2809,7 +2809,7 @@
                 <a:ea typeface="Calibri" pitchFamily="34" charset="-122"/>
                 <a:cs typeface="Calibri" pitchFamily="34" charset="-120"/>
               </a:rPr>
-              <a:t>api.py (380 lines)</a:t>
+              <a:t>(thin wrapper)</a:t>
             </a:r>
             <a:endParaRPr lang="en-US" sz="750" dirty="0"/>
           </a:p>
@@ -2896,7 +2896,7 @@
                 <a:ea typeface="Calibri" pitchFamily="34" charset="-122"/>
                 <a:cs typeface="Calibri" pitchFamily="34" charset="-120"/>
               </a:rPr>
-              <a:t>codex --full-auto --model o4-mini</a:t>
+              <a:t>codex --full-auto --model gpt-5.3-codex</a:t>
             </a:r>
             <a:endParaRPr lang="en-US" sz="750" dirty="0"/>
           </a:p>
@@ -3602,7 +3602,7 @@
                 <a:ea typeface="Calibri" pitchFamily="34" charset="-122"/>
                 <a:cs typeface="Calibri" pitchFamily="34" charset="-120"/>
               </a:rPr>
-              <a:t>(o4-mini, codex-mini)</a:t>
+              <a:t>(gpt-5.3-codex)</a:t>
             </a:r>
             <a:endParaRPr lang="en-US" sz="800" dirty="0"/>
           </a:p>
@@ -4274,7 +4274,7 @@
                 <a:ea typeface="Calibri" pitchFamily="34" charset="-122"/>
                 <a:cs typeface="Calibri" pitchFamily="34" charset="-120"/>
               </a:rPr>
-              <a:t>api.py (180 lines)</a:t>
+              <a:t>(thin API wrapper)</a:t>
             </a:r>
             <a:endParaRPr lang="en-US" sz="750" dirty="0"/>
           </a:p>
@@ -4341,7 +4341,7 @@
                 <a:ea typeface="Calibri" pitchFamily="34" charset="-122"/>
                 <a:cs typeface="Calibri" pitchFamily="34" charset="-120"/>
               </a:rPr>
-              <a:t>pipeline.py (248 lines)</a:t>
+              <a:t>Custom Pipeline (High effort)</a:t>
             </a:r>
             <a:endParaRPr lang="en-US" sz="750" dirty="0"/>
           </a:p>
@@ -4361,7 +4361,7 @@
                 <a:ea typeface="Calibri" pitchFamily="34" charset="-122"/>
                 <a:cs typeface="Calibri" pitchFamily="34" charset="-120"/>
               </a:rPr>
-              <a:t>Custom 6-gate orchestration</a:t>
+              <a:t>6-gate orchestration</a:t>
             </a:r>
             <a:endParaRPr lang="en-US" sz="750" dirty="0"/>
           </a:p>
@@ -4533,7 +4533,7 @@
                 <a:ea typeface="Calibri" pitchFamily="34" charset="-122"/>
                 <a:cs typeface="Calibri" pitchFamily="34" charset="-120"/>
               </a:rPr>
-              <a:t>(99 lines)</a:t>
+              <a:t>(Custom)</a:t>
             </a:r>
             <a:endParaRPr lang="en-US" sz="800" dirty="0"/>
           </a:p>
@@ -4622,7 +4622,7 @@
                 <a:ea typeface="Calibri" pitchFamily="34" charset="-122"/>
                 <a:cs typeface="Calibri" pitchFamily="34" charset="-120"/>
               </a:rPr>
-              <a:t>(184 lines)</a:t>
+              <a:t>(Custom)</a:t>
             </a:r>
             <a:endParaRPr lang="en-US" sz="800" dirty="0"/>
           </a:p>
@@ -4711,7 +4711,7 @@
                 <a:ea typeface="Calibri" pitchFamily="34" charset="-122"/>
                 <a:cs typeface="Calibri" pitchFamily="34" charset="-120"/>
               </a:rPr>
-              <a:t>(239 lines)</a:t>
+              <a:t>(Custom)</a:t>
             </a:r>
             <a:endParaRPr lang="en-US" sz="800" dirty="0"/>
           </a:p>
@@ -4800,7 +4800,7 @@
                 <a:ea typeface="Calibri" pitchFamily="34" charset="-122"/>
                 <a:cs typeface="Calibri" pitchFamily="34" charset="-120"/>
               </a:rPr>
-              <a:t>(173 lines)</a:t>
+              <a:t>(Custom)</a:t>
             </a:r>
             <a:endParaRPr lang="en-US" sz="800" dirty="0"/>
           </a:p>
@@ -4867,7 +4867,7 @@
                 <a:ea typeface="Calibri" pitchFamily="34" charset="-122"/>
                 <a:cs typeface="Calibri" pitchFamily="34" charset="-120"/>
               </a:rPr>
-              <a:t>Context Engine (419 lines)</a:t>
+              <a:t>Context Engine (High effort)</a:t>
             </a:r>
             <a:endParaRPr lang="en-US" sz="650" dirty="0"/>
           </a:p>
@@ -4954,7 +4954,7 @@
                 <a:ea typeface="Calibri" pitchFamily="34" charset="-122"/>
                 <a:cs typeface="Calibri" pitchFamily="34" charset="-120"/>
               </a:rPr>
-              <a:t>Custom Tools (385 lines)</a:t>
+              <a:t>Custom Tools (High effort)</a:t>
             </a:r>
             <a:endParaRPr lang="en-US" sz="650" dirty="0"/>
           </a:p>
@@ -5154,7 +5154,7 @@
                 <a:ea typeface="Calibri" pitchFamily="34" charset="-122"/>
                 <a:cs typeface="Calibri" pitchFamily="34" charset="-120"/>
               </a:rPr>
-              <a:t>(gpt-4o)</a:t>
+              <a:t>(gpt-4o / gpt-4o-mini)</a:t>
             </a:r>
             <a:endParaRPr lang="en-US" sz="800" dirty="0"/>
           </a:p>
@@ -7154,7 +7154,7 @@
                 <a:ea typeface="Calibri" pitchFamily="34" charset="-122"/>
                 <a:cs typeface="Calibri" pitchFamily="34" charset="-120"/>
               </a:rPr>
-              <a:t>888 lines Python + 525 TOML</a:t>
+              <a:t>Low (thin wrapper + config)</a:t>
             </a:r>
             <a:endParaRPr lang="en-US" sz="1000" dirty="0"/>
           </a:p>
@@ -7213,7 +7213,7 @@
                 <a:ea typeface="Calibri" pitchFamily="34" charset="-122"/>
                 <a:cs typeface="Calibri" pitchFamily="34" charset="-120"/>
               </a:rPr>
-              <a:t>2,394 lines Python</a:t>
+              <a:t>High (all custom Python)</a:t>
             </a:r>
             <a:endParaRPr lang="en-US" sz="1000" dirty="0"/>
           </a:p>
@@ -7331,7 +7331,7 @@
                 <a:ea typeface="Calibri" pitchFamily="34" charset="-122"/>
                 <a:cs typeface="Calibri" pitchFamily="34" charset="-120"/>
               </a:rPr>
-              <a:t>359 lines (4 modules)</a:t>
+              <a:t>Low (4 modules)</a:t>
             </a:r>
             <a:endParaRPr lang="en-US" sz="1000" dirty="0"/>
           </a:p>
@@ -7390,7 +7390,7 @@
                 <a:ea typeface="Calibri" pitchFamily="34" charset="-122"/>
                 <a:cs typeface="Calibri" pitchFamily="34" charset="-120"/>
               </a:rPr>
-              <a:t>1,119 lines (9 modules)</a:t>
+              <a:t>High (9 modules)</a:t>
             </a:r>
             <a:endParaRPr lang="en-US" sz="1000" dirty="0"/>
           </a:p>
@@ -7744,7 +7744,7 @@
                 <a:ea typeface="Calibri" pitchFamily="34" charset="-122"/>
                 <a:cs typeface="Calibri" pitchFamily="34" charset="-120"/>
               </a:rPr>
-              <a:t>Maintain 2,394-line codebase</a:t>
+              <a:t>Maintain large custom codebase</a:t>
             </a:r>
             <a:endParaRPr lang="en-US" sz="1000" dirty="0"/>
           </a:p>
@@ -7968,7 +7968,7 @@
                 <a:ea typeface="Calibri" pitchFamily="34" charset="-122"/>
                 <a:cs typeface="Calibri" pitchFamily="34" charset="-120"/>
               </a:rPr>
-              <a:t>Both approaches were implemented and tested. Codex provides sub-agent runtime, sandboxing, context engine, and tools as platform features — you write config. MS Agent Framework requires hand-building all of these. Codex Harness: 888 lines code + 1,360 config. MS Harness: 2,394 lines code.</a:t>
+              <a:t>Both approaches were implemented and tested. Codex provides sub-agent runtime, sandboxing, context engine, and tools as platform features — you write config. MS Agent Framework requires hand-building all of these. Codex Harness: Low effort (mostly config). MS Harness: High effort (all custom Python).</a:t>
             </a:r>
             <a:endParaRPr lang="en-US" sz="1200" dirty="0"/>
           </a:p>
@@ -8101,7 +8101,7 @@
                 <a:ea typeface="Calibri" pitchFamily="34" charset="-122"/>
                 <a:cs typeface="Calibri" pitchFamily="34" charset="-120"/>
               </a:rPr>
-              <a:t>Codex provides sandboxing, context compaction, tools (ripgrep, tree-sitter), and agent isolation as built-in features. MS Agent FW requires 804 lines of custom code for these same capabilities.</a:t>
+              <a:t>Codex provides sandboxing, context compaction, tools (ripgrep, tree-sitter), and agent isolation as built-in features. MS Agent FW requires high-effort custom code for these same capabilities.</a:t>
             </a:r>
             <a:endParaRPr lang="en-US" sz="1000" dirty="0"/>
           </a:p>
@@ -8192,7 +8192,7 @@
                 <a:ea typeface="Trebuchet MS" pitchFamily="34" charset="-122"/>
                 <a:cs typeface="Trebuchet MS" pitchFamily="34" charset="-120"/>
               </a:rPr>
-              <a:t>2.7x Less Custom Code</a:t>
+              <a:t>Dramatically Less Custom Code</a:t>
             </a:r>
             <a:endParaRPr lang="en-US" sz="1400" dirty="0"/>
           </a:p>
@@ -8234,7 +8234,7 @@
                 <a:ea typeface="Calibri" pitchFamily="34" charset="-122"/>
                 <a:cs typeface="Calibri" pitchFamily="34" charset="-120"/>
               </a:rPr>
-              <a:t>888 lines production Python vs 2,394 lines. Lower defect surface, easier to audit, cheaper to maintain. 36% of Codex codebase is declarative config — not imperative code.</a:t>
+              <a:t>Codex: Low effort (thin wrapper + declarative config). MS Agent FW: High effort (all custom Python). Lower defect surface, easier to audit, cheaper to maintain.</a:t>
             </a:r>
             <a:endParaRPr lang="en-US" sz="1000" dirty="0"/>
           </a:p>
@@ -10896,7 +10896,7 @@
                 <a:ea typeface="Calibri" pitchFamily="34" charset="-122"/>
                 <a:cs typeface="Calibri" pitchFamily="34" charset="-120"/>
               </a:rPr>
-              <a:t>o4 (reasoning)</a:t>
+              <a:t>gpt-5.3-codex</a:t>
             </a:r>
             <a:endParaRPr lang="en-US" sz="900" dirty="0"/>
           </a:p>
@@ -11147,7 +11147,7 @@
                 <a:ea typeface="Calibri" pitchFamily="34" charset="-122"/>
                 <a:cs typeface="Calibri" pitchFamily="34" charset="-120"/>
               </a:rPr>
-              <a:t>codex-mini</a:t>
+              <a:t>gpt-5.3-codex</a:t>
             </a:r>
             <a:endParaRPr lang="en-US" sz="900" dirty="0"/>
           </a:p>
@@ -11398,7 +11398,7 @@
                 <a:ea typeface="Calibri" pitchFamily="34" charset="-122"/>
                 <a:cs typeface="Calibri" pitchFamily="34" charset="-120"/>
               </a:rPr>
-              <a:t>o4-mini</a:t>
+              <a:t>gpt-5.3-codex</a:t>
             </a:r>
             <a:endParaRPr lang="en-US" sz="900" dirty="0"/>
           </a:p>
@@ -11649,7 +11649,7 @@
                 <a:ea typeface="Calibri" pitchFamily="34" charset="-122"/>
                 <a:cs typeface="Calibri" pitchFamily="34" charset="-120"/>
               </a:rPr>
-              <a:t>o4 (reasoning)</a:t>
+              <a:t>gpt-5.3-codex</a:t>
             </a:r>
             <a:endParaRPr lang="en-US" sz="900" dirty="0"/>
           </a:p>
@@ -11809,7 +11809,7 @@
                 <a:ea typeface="Calibri" pitchFamily="34" charset="-122"/>
                 <a:cs typeface="Calibri" pitchFamily="34" charset="-120"/>
               </a:rPr>
-              <a:t>Total: 3,757 lines  |  36% declarative config (TOML/MD)  |  Agents run INSIDE Codex sandboxes</a:t>
+              <a:t>Effort: Low (mostly config)  |  Declarative TOML/MD  |  Agents run INSIDE Codex sandboxes</a:t>
             </a:r>
             <a:endParaRPr lang="en-US" sz="1100" dirty="0"/>
           </a:p>
@@ -12033,7 +12033,7 @@
                 <a:ea typeface="Calibri" pitchFamily="34" charset="-122"/>
                 <a:cs typeface="Calibri" pitchFamily="34" charset="-120"/>
               </a:rPr>
-              <a:t>140-line root AGENTS.md + per-language overrides + program.md steering doc. Codex loads hierarchically. Human can edit program.md mid-run.</a:t>
+              <a:t>Root AGENTS.md + per-language overrides + program.md steering doc. Codex loads hierarchically. Human can edit program.md mid-run.</a:t>
             </a:r>
             <a:endParaRPr lang="en-US" sz="1000" dirty="0"/>
           </a:p>
@@ -12124,7 +12124,7 @@
                 <a:ea typeface="Trebuchet MS" pitchFamily="34" charset="-122"/>
                 <a:cs typeface="Trebuchet MS" pitchFamily="34" charset="-120"/>
               </a:rPr>
-              <a:t>TOML Sub-Agents (525 lines)</a:t>
+              <a:t>TOML Sub-Agents</a:t>
             </a:r>
             <a:endParaRPr lang="en-US" sz="1300" dirty="0"/>
           </a:p>
@@ -12166,7 +12166,7 @@
                 <a:ea typeface="Calibri" pitchFamily="34" charset="-122"/>
                 <a:cs typeface="Calibri" pitchFamily="34" charset="-120"/>
               </a:rPr>
-              <a:t>4 TOML files with detailed instructions, model routing, sandbox modes. Each agent runs in its own Codex sandbox — no custom execution code.</a:t>
+              <a:t>4 TOML files with detailed instructions, model routing (gpt-5.3-codex), sandbox modes. Each agent runs in its own Codex sandbox — no custom execution code.</a:t>
             </a:r>
             <a:endParaRPr lang="en-US" sz="1000" dirty="0"/>
           </a:p>
@@ -12523,7 +12523,7 @@
                 <a:ea typeface="Trebuchet MS" pitchFamily="34" charset="-122"/>
                 <a:cs typeface="Trebuchet MS" pitchFamily="34" charset="-120"/>
               </a:rPr>
-              <a:t>Orchestrator API (888 lines)</a:t>
+              <a:t>Thin Orchestrator API</a:t>
             </a:r>
             <a:endParaRPr lang="en-US" sz="1300" dirty="0"/>
           </a:p>
@@ -12828,7 +12828,7 @@
                 <a:ea typeface="Calibri" pitchFamily="34" charset="-122"/>
                 <a:cs typeface="Calibri" pitchFamily="34" charset="-120"/>
               </a:rPr>
-              <a:t>Python-based agent framework with custom context engine, tools, and persistence</a:t>
+              <a:t>Python SDK for MS Agents with custom context engine, tools, and persistence</a:t>
             </a:r>
             <a:endParaRPr lang="en-US" sz="1300" dirty="0"/>
           </a:p>
@@ -12953,7 +12953,7 @@
                 <a:ea typeface="Calibri" pitchFamily="34" charset="-122"/>
                 <a:cs typeface="Calibri" pitchFamily="34" charset="-120"/>
               </a:rPr>
-              <a:t>MS Agent Framework  |  @tool Decorator  |  FoundryChatClient  |  Speed Profiles</a:t>
+              <a:t>Python SDK for MS Agents  |  @tool Decorator  |  FoundryChatClient  |  Speed Profiles</a:t>
             </a:r>
             <a:endParaRPr lang="en-US" sz="1300" dirty="0"/>
           </a:p>
@@ -13044,7 +13044,7 @@
                 <a:ea typeface="Calibri" pitchFamily="34" charset="-122"/>
                 <a:cs typeface="Calibri" pitchFamily="34" charset="-120"/>
               </a:rPr>
-              <a:t>99 lines Python</a:t>
+              <a:t>Custom Python</a:t>
             </a:r>
             <a:endParaRPr lang="en-US" sz="900" dirty="0"/>
           </a:p>
@@ -13279,7 +13279,7 @@
                 <a:ea typeface="Calibri" pitchFamily="34" charset="-122"/>
                 <a:cs typeface="Calibri" pitchFamily="34" charset="-120"/>
               </a:rPr>
-              <a:t>184 lines Python</a:t>
+              <a:t>Custom Python</a:t>
             </a:r>
             <a:endParaRPr lang="en-US" sz="900" dirty="0"/>
           </a:p>
@@ -13514,7 +13514,7 @@
                 <a:ea typeface="Calibri" pitchFamily="34" charset="-122"/>
                 <a:cs typeface="Calibri" pitchFamily="34" charset="-120"/>
               </a:rPr>
-              <a:t>239 lines Python</a:t>
+              <a:t>Custom Python</a:t>
             </a:r>
             <a:endParaRPr lang="en-US" sz="900" dirty="0"/>
           </a:p>
@@ -13749,7 +13749,7 @@
                 <a:ea typeface="Calibri" pitchFamily="34" charset="-122"/>
                 <a:cs typeface="Calibri" pitchFamily="34" charset="-120"/>
               </a:rPr>
-              <a:t>173 lines Python</a:t>
+              <a:t>Custom Python</a:t>
             </a:r>
             <a:endParaRPr lang="en-US" sz="900" dirty="0"/>
           </a:p>
@@ -13952,7 +13952,7 @@
                 <a:ea typeface="Calibri" pitchFamily="34" charset="-122"/>
                 <a:cs typeface="Calibri" pitchFamily="34" charset="-120"/>
               </a:rPr>
-              <a:t>Total: 2,394 lines Python  |  SQLite persistence  |  Custom context engine (419 lines)  |  Custom tools (385 lines)</a:t>
+              <a:t>Effort: High (all custom Python)  |  SQLite persistence  |  Custom context engine  |  Custom tools</a:t>
             </a:r>
             <a:endParaRPr lang="en-US" sz="1000" dirty="0"/>
           </a:p>
@@ -14134,7 +14134,7 @@
                 <a:ea typeface="Trebuchet MS" pitchFamily="34" charset="-122"/>
                 <a:cs typeface="Trebuchet MS" pitchFamily="34" charset="-120"/>
               </a:rPr>
-              <a:t>Custom Context Engine (419 lines)</a:t>
+              <a:t>Custom Context Engine</a:t>
             </a:r>
             <a:endParaRPr lang="en-US" sz="1300" dirty="0"/>
           </a:p>
@@ -14176,7 +14176,7 @@
                 <a:ea typeface="Calibri" pitchFamily="34" charset="-122"/>
                 <a:cs typeface="Calibri" pitchFamily="34" charset="-120"/>
               </a:rPr>
-              <a:t>Semantic chunker splits at AST boundaries (131 lines). Token estimator with complexity multipliers (56 lines). Progressive compressor: 30% older history (108 lines). Complexity scorer: 12 weighted patterns (124 lines).</a:t>
+              <a:t>Semantic chunker splits at AST boundaries. Token estimator with complexity multipliers. Progressive compressor: 30% older history. Complexity scorer: 12 weighted patterns. Effort: High.</a:t>
             </a:r>
             <a:endParaRPr lang="en-US" sz="1000" dirty="0"/>
           </a:p>
@@ -14267,7 +14267,7 @@
                 <a:ea typeface="Trebuchet MS" pitchFamily="34" charset="-122"/>
                 <a:cs typeface="Trebuchet MS" pitchFamily="34" charset="-120"/>
               </a:rPr>
-              <a:t>Custom Agent Tools (385 lines)</a:t>
+              <a:t>Custom Agent Tools</a:t>
             </a:r>
             <a:endParaRPr lang="en-US" sz="1300" dirty="0"/>
           </a:p>
@@ -14309,7 +14309,7 @@
                 <a:ea typeface="Calibri" pitchFamily="34" charset="-122"/>
                 <a:cs typeface="Calibri" pitchFamily="34" charset="-120"/>
               </a:rPr>
-              <a:t>file_tools.py: read, write, search, list (104 lines). ast_tools.py: regex-based import/function parsing (147 lines). test_runner.py: pytest/jest subprocess + coverage (134 lines). All @tool decorated.</a:t>
+              <a:t>file_tools.py: read, write, search, list. ast_tools.py: regex-based import/function parsing. test_runner.py: pytest/jest subprocess + coverage. All @tool decorated via Python SDK.</a:t>
             </a:r>
             <a:endParaRPr lang="en-US" sz="1000" dirty="0"/>
           </a:p>
@@ -14533,7 +14533,7 @@
                 <a:ea typeface="Trebuchet MS" pitchFamily="34" charset="-122"/>
                 <a:cs typeface="Trebuchet MS" pitchFamily="34" charset="-120"/>
               </a:rPr>
-              <a:t>Pipeline Orchestrator (248 lines)</a:t>
+              <a:t>Pipeline Orchestrator</a:t>
             </a:r>
             <a:endParaRPr lang="en-US" sz="1300" dirty="0"/>
           </a:p>
@@ -14575,7 +14575,7 @@
                 <a:ea typeface="Calibri" pitchFamily="34" charset="-122"/>
                 <a:cs typeface="Calibri" pitchFamily="34" charset="-120"/>
               </a:rPr>
-              <a:t>Sequential 6-gate flow in pipeline.py. Self-healing loop (max 3 attempts). Sprint contract negotiation. State updates + coverage ratchet enforcement. All hand-coded in Python.</a:t>
+              <a:t>Sequential 6-gate flow in pipeline.py. Self-healing loop (max 3 attempts). Sprint contract negotiation. State updates + coverage ratchet enforcement. All hand-coded in Python. Effort: High.</a:t>
             </a:r>
             <a:endParaRPr lang="en-US" sz="1000" dirty="0"/>
           </a:p>
@@ -14666,7 +14666,7 @@
                 <a:ea typeface="Trebuchet MS" pitchFamily="34" charset="-122"/>
                 <a:cs typeface="Trebuchet MS" pitchFamily="34" charset="-120"/>
               </a:rPr>
-              <a:t>SQLite Persistence (326 lines)</a:t>
+              <a:t>SQLite Persistence</a:t>
             </a:r>
             <a:endParaRPr lang="en-US" sz="1300" dirty="0"/>
           </a:p>
@@ -14708,7 +14708,7 @@
                 <a:ea typeface="Calibri" pitchFamily="34" charset="-122"/>
                 <a:cs typeface="Calibri" pitchFamily="34" charset="-120"/>
               </a:rPr>
-              <a:t>4 tables: migration_runs, analysis_cache, chunk_status, dependencies. Checkpoint/resume: find last completed chunk. Optional Azure Blob sync for cloud scaling.</a:t>
+              <a:t>4 tables: migration_runs, analysis_cache, chunk_status, dependencies. Checkpoint/resume: find last completed chunk. Optional Azure Blob sync for cloud scaling. Effort: Medium.</a:t>
             </a:r>
             <a:endParaRPr lang="en-US" sz="1000" dirty="0"/>
           </a:p>
@@ -14841,7 +14841,7 @@
                 <a:ea typeface="Calibri" pitchFamily="34" charset="-122"/>
                 <a:cs typeface="Calibri" pitchFamily="34" charset="-120"/>
               </a:rPr>
-              <a:t>No sandboxing (shared process). No built-in tools (custom file/AST/test tools). No auto-compaction (custom compressor). No agent isolation (shared context). 32 pip dependencies.</a:t>
+              <a:t>No sandboxing (shared process). No built-in tools (custom file/AST/test tools). No auto-compaction (custom compressor). No agent isolation (shared context). Effort: High overall.</a:t>
             </a:r>
             <a:endParaRPr lang="en-US" sz="1000" dirty="0"/>
           </a:p>
@@ -15189,7 +15189,75 @@
                           <a:ea typeface="Calibri" pitchFamily="34" charset="-122"/>
                           <a:cs typeface="Calibri" pitchFamily="34" charset="-120"/>
                         </a:rPr>
-                        <a:t>Total Codebase</a:t>
+                        <a:t>Custom Code Effort</a:t>
+                      </a:r>
+                      <a:endParaRPr lang="en-US" sz="1000" dirty="0">
+                        <a:latin typeface="Calibri" charset="0"/>
+                        <a:ea typeface="Calibri" charset="0"/>
+                        <a:cs typeface="Calibri" charset="0"/>
+                      </a:endParaRPr>
+                    </a:p>
+                  </a:txBody>
+                  <a:tcPr marL="91440" marR="91440" marT="45720" marB="45720">
+                    <a:lnL w="6350" cap="flat" cmpd="sng" algn="ctr">
+                      <a:solidFill>
+                        <a:srgbClr val="CBD5E1"/>
+                      </a:solidFill>
+                      <a:prstDash val="solid"/>
+                      <a:round/>
+                      <a:headEnd type="none" w="med" len="med"/>
+                      <a:tailEnd type="none" w="med" len="med"/>
+                    </a:lnL>
+                    <a:lnR w="6350" cap="flat" cmpd="sng" algn="ctr">
+                      <a:solidFill>
+                        <a:srgbClr val="CBD5E1"/>
+                      </a:solidFill>
+                      <a:prstDash val="solid"/>
+                      <a:round/>
+                      <a:headEnd type="none" w="med" len="med"/>
+                      <a:tailEnd type="none" w="med" len="med"/>
+                    </a:lnR>
+                    <a:lnT w="6350" cap="flat" cmpd="sng" algn="ctr">
+                      <a:solidFill>
+                        <a:srgbClr val="CBD5E1"/>
+                      </a:solidFill>
+                      <a:prstDash val="solid"/>
+                      <a:round/>
+                      <a:headEnd type="none" w="med" len="med"/>
+                      <a:tailEnd type="none" w="med" len="med"/>
+                    </a:lnT>
+                    <a:lnB w="6350" cap="flat" cmpd="sng" algn="ctr">
+                      <a:solidFill>
+                        <a:srgbClr val="CBD5E1"/>
+                      </a:solidFill>
+                      <a:prstDash val="solid"/>
+                      <a:round/>
+                      <a:headEnd type="none" w="med" len="med"/>
+                      <a:tailEnd type="none" w="med" len="med"/>
+                    </a:lnB>
+                    <a:solidFill>
+                      <a:srgbClr val="FFFFFF"/>
+                    </a:solidFill>
+                  </a:tcPr>
+                </a:tc>
+                <a:tc>
+                  <a:txBody>
+                    <a:bodyPr/>
+                    <a:lstStyle/>
+                    <a:p>
+                      <a:pPr algn="ctr" indent="0" marL="0">
+                        <a:buNone/>
+                      </a:pPr>
+                      <a:r>
+                        <a:rPr lang="en-US" sz="1000" dirty="0">
+                          <a:solidFill>
+                            <a:srgbClr val="059669"/>
+                          </a:solidFill>
+                          <a:latin typeface="Calibri" pitchFamily="34" charset="0"/>
+                          <a:ea typeface="Calibri" pitchFamily="34" charset="-122"/>
+                          <a:cs typeface="Calibri" pitchFamily="34" charset="-120"/>
+                        </a:rPr>
+                        <a:t>Low (mostly config)</a:t>
                       </a:r>
                       <a:endParaRPr lang="en-US" sz="1000" dirty="0">
                         <a:latin typeface="Calibri" charset="0"/>
@@ -15257,281 +15325,7 @@
                           <a:ea typeface="Calibri" pitchFamily="34" charset="-122"/>
                           <a:cs typeface="Calibri" pitchFamily="34" charset="-120"/>
                         </a:rPr>
-                        <a:t>3,757 lines (36% config)</a:t>
-                      </a:r>
-                      <a:endParaRPr lang="en-US" sz="1000" dirty="0">
-                        <a:latin typeface="Calibri" charset="0"/>
-                        <a:ea typeface="Calibri" charset="0"/>
-                        <a:cs typeface="Calibri" charset="0"/>
-                      </a:endParaRPr>
-                    </a:p>
-                  </a:txBody>
-                  <a:tcPr marL="91440" marR="91440" marT="45720" marB="45720">
-                    <a:lnL w="6350" cap="flat" cmpd="sng" algn="ctr">
-                      <a:solidFill>
-                        <a:srgbClr val="CBD5E1"/>
-                      </a:solidFill>
-                      <a:prstDash val="solid"/>
-                      <a:round/>
-                      <a:headEnd type="none" w="med" len="med"/>
-                      <a:tailEnd type="none" w="med" len="med"/>
-                    </a:lnL>
-                    <a:lnR w="6350" cap="flat" cmpd="sng" algn="ctr">
-                      <a:solidFill>
-                        <a:srgbClr val="CBD5E1"/>
-                      </a:solidFill>
-                      <a:prstDash val="solid"/>
-                      <a:round/>
-                      <a:headEnd type="none" w="med" len="med"/>
-                      <a:tailEnd type="none" w="med" len="med"/>
-                    </a:lnR>
-                    <a:lnT w="6350" cap="flat" cmpd="sng" algn="ctr">
-                      <a:solidFill>
-                        <a:srgbClr val="CBD5E1"/>
-                      </a:solidFill>
-                      <a:prstDash val="solid"/>
-                      <a:round/>
-                      <a:headEnd type="none" w="med" len="med"/>
-                      <a:tailEnd type="none" w="med" len="med"/>
-                    </a:lnT>
-                    <a:lnB w="6350" cap="flat" cmpd="sng" algn="ctr">
-                      <a:solidFill>
-                        <a:srgbClr val="CBD5E1"/>
-                      </a:solidFill>
-                      <a:prstDash val="solid"/>
-                      <a:round/>
-                      <a:headEnd type="none" w="med" len="med"/>
-                      <a:tailEnd type="none" w="med" len="med"/>
-                    </a:lnB>
-                    <a:solidFill>
-                      <a:srgbClr val="FFFFFF"/>
-                    </a:solidFill>
-                  </a:tcPr>
-                </a:tc>
-                <a:tc>
-                  <a:txBody>
-                    <a:bodyPr/>
-                    <a:lstStyle/>
-                    <a:p>
-                      <a:pPr algn="ctr" indent="0" marL="0">
-                        <a:buNone/>
-                      </a:pPr>
-                      <a:r>
-                        <a:rPr lang="en-US" sz="1000" dirty="0">
-                          <a:solidFill>
-                            <a:srgbClr val="475569"/>
-                          </a:solidFill>
-                          <a:latin typeface="Calibri" pitchFamily="34" charset="0"/>
-                          <a:ea typeface="Calibri" pitchFamily="34" charset="-122"/>
-                          <a:cs typeface="Calibri" pitchFamily="34" charset="-120"/>
-                        </a:rPr>
-                        <a:t>3,513 lines (all Python)</a:t>
-                      </a:r>
-                      <a:endParaRPr lang="en-US" sz="1000" dirty="0">
-                        <a:latin typeface="Calibri" charset="0"/>
-                        <a:ea typeface="Calibri" charset="0"/>
-                        <a:cs typeface="Calibri" charset="0"/>
-                      </a:endParaRPr>
-                    </a:p>
-                  </a:txBody>
-                  <a:tcPr marL="91440" marR="91440" marT="45720" marB="45720">
-                    <a:lnL w="6350" cap="flat" cmpd="sng" algn="ctr">
-                      <a:solidFill>
-                        <a:srgbClr val="CBD5E1"/>
-                      </a:solidFill>
-                      <a:prstDash val="solid"/>
-                      <a:round/>
-                      <a:headEnd type="none" w="med" len="med"/>
-                      <a:tailEnd type="none" w="med" len="med"/>
-                    </a:lnL>
-                    <a:lnR w="6350" cap="flat" cmpd="sng" algn="ctr">
-                      <a:solidFill>
-                        <a:srgbClr val="CBD5E1"/>
-                      </a:solidFill>
-                      <a:prstDash val="solid"/>
-                      <a:round/>
-                      <a:headEnd type="none" w="med" len="med"/>
-                      <a:tailEnd type="none" w="med" len="med"/>
-                    </a:lnR>
-                    <a:lnT w="6350" cap="flat" cmpd="sng" algn="ctr">
-                      <a:solidFill>
-                        <a:srgbClr val="CBD5E1"/>
-                      </a:solidFill>
-                      <a:prstDash val="solid"/>
-                      <a:round/>
-                      <a:headEnd type="none" w="med" len="med"/>
-                      <a:tailEnd type="none" w="med" len="med"/>
-                    </a:lnT>
-                    <a:lnB w="6350" cap="flat" cmpd="sng" algn="ctr">
-                      <a:solidFill>
-                        <a:srgbClr val="CBD5E1"/>
-                      </a:solidFill>
-                      <a:prstDash val="solid"/>
-                      <a:round/>
-                      <a:headEnd type="none" w="med" len="med"/>
-                      <a:tailEnd type="none" w="med" len="med"/>
-                    </a:lnB>
-                    <a:solidFill>
-                      <a:srgbClr val="FFFFFF"/>
-                    </a:solidFill>
-                  </a:tcPr>
-                </a:tc>
-              </a:tr>
-              <a:tr h="292608">
-                <a:tc>
-                  <a:txBody>
-                    <a:bodyPr/>
-                    <a:lstStyle/>
-                    <a:p>
-                      <a:pPr algn="l" indent="0" marL="0">
-                        <a:buNone/>
-                      </a:pPr>
-                      <a:r>
-                        <a:rPr lang="en-US" sz="1000" b="1" dirty="0">
-                          <a:solidFill>
-                            <a:srgbClr val="0F172A"/>
-                          </a:solidFill>
-                          <a:latin typeface="Calibri" pitchFamily="34" charset="0"/>
-                          <a:ea typeface="Calibri" pitchFamily="34" charset="-122"/>
-                          <a:cs typeface="Calibri" pitchFamily="34" charset="-120"/>
-                        </a:rPr>
-                        <a:t>Custom Code (excl. config)</a:t>
-                      </a:r>
-                      <a:endParaRPr lang="en-US" sz="1000" dirty="0">
-                        <a:latin typeface="Calibri" charset="0"/>
-                        <a:ea typeface="Calibri" charset="0"/>
-                        <a:cs typeface="Calibri" charset="0"/>
-                      </a:endParaRPr>
-                    </a:p>
-                  </a:txBody>
-                  <a:tcPr marL="91440" marR="91440" marT="45720" marB="45720">
-                    <a:lnL w="6350" cap="flat" cmpd="sng" algn="ctr">
-                      <a:solidFill>
-                        <a:srgbClr val="CBD5E1"/>
-                      </a:solidFill>
-                      <a:prstDash val="solid"/>
-                      <a:round/>
-                      <a:headEnd type="none" w="med" len="med"/>
-                      <a:tailEnd type="none" w="med" len="med"/>
-                    </a:lnL>
-                    <a:lnR w="6350" cap="flat" cmpd="sng" algn="ctr">
-                      <a:solidFill>
-                        <a:srgbClr val="CBD5E1"/>
-                      </a:solidFill>
-                      <a:prstDash val="solid"/>
-                      <a:round/>
-                      <a:headEnd type="none" w="med" len="med"/>
-                      <a:tailEnd type="none" w="med" len="med"/>
-                    </a:lnR>
-                    <a:lnT w="6350" cap="flat" cmpd="sng" algn="ctr">
-                      <a:solidFill>
-                        <a:srgbClr val="CBD5E1"/>
-                      </a:solidFill>
-                      <a:prstDash val="solid"/>
-                      <a:round/>
-                      <a:headEnd type="none" w="med" len="med"/>
-                      <a:tailEnd type="none" w="med" len="med"/>
-                    </a:lnT>
-                    <a:lnB w="6350" cap="flat" cmpd="sng" algn="ctr">
-                      <a:solidFill>
-                        <a:srgbClr val="CBD5E1"/>
-                      </a:solidFill>
-                      <a:prstDash val="solid"/>
-                      <a:round/>
-                      <a:headEnd type="none" w="med" len="med"/>
-                      <a:tailEnd type="none" w="med" len="med"/>
-                    </a:lnB>
-                    <a:solidFill>
-                      <a:srgbClr val="FFFFFF"/>
-                    </a:solidFill>
-                  </a:tcPr>
-                </a:tc>
-                <a:tc>
-                  <a:txBody>
-                    <a:bodyPr/>
-                    <a:lstStyle/>
-                    <a:p>
-                      <a:pPr algn="ctr" indent="0" marL="0">
-                        <a:buNone/>
-                      </a:pPr>
-                      <a:r>
-                        <a:rPr lang="en-US" sz="1000" dirty="0">
-                          <a:solidFill>
-                            <a:srgbClr val="059669"/>
-                          </a:solidFill>
-                          <a:latin typeface="Calibri" pitchFamily="34" charset="0"/>
-                          <a:ea typeface="Calibri" pitchFamily="34" charset="-122"/>
-                          <a:cs typeface="Calibri" pitchFamily="34" charset="-120"/>
-                        </a:rPr>
-                        <a:t>888 lines Python + 504 bash</a:t>
-                      </a:r>
-                      <a:endParaRPr lang="en-US" sz="1000" dirty="0">
-                        <a:latin typeface="Calibri" charset="0"/>
-                        <a:ea typeface="Calibri" charset="0"/>
-                        <a:cs typeface="Calibri" charset="0"/>
-                      </a:endParaRPr>
-                    </a:p>
-                  </a:txBody>
-                  <a:tcPr marL="91440" marR="91440" marT="45720" marB="45720">
-                    <a:lnL w="6350" cap="flat" cmpd="sng" algn="ctr">
-                      <a:solidFill>
-                        <a:srgbClr val="CBD5E1"/>
-                      </a:solidFill>
-                      <a:prstDash val="solid"/>
-                      <a:round/>
-                      <a:headEnd type="none" w="med" len="med"/>
-                      <a:tailEnd type="none" w="med" len="med"/>
-                    </a:lnL>
-                    <a:lnR w="6350" cap="flat" cmpd="sng" algn="ctr">
-                      <a:solidFill>
-                        <a:srgbClr val="CBD5E1"/>
-                      </a:solidFill>
-                      <a:prstDash val="solid"/>
-                      <a:round/>
-                      <a:headEnd type="none" w="med" len="med"/>
-                      <a:tailEnd type="none" w="med" len="med"/>
-                    </a:lnR>
-                    <a:lnT w="6350" cap="flat" cmpd="sng" algn="ctr">
-                      <a:solidFill>
-                        <a:srgbClr val="CBD5E1"/>
-                      </a:solidFill>
-                      <a:prstDash val="solid"/>
-                      <a:round/>
-                      <a:headEnd type="none" w="med" len="med"/>
-                      <a:tailEnd type="none" w="med" len="med"/>
-                    </a:lnT>
-                    <a:lnB w="6350" cap="flat" cmpd="sng" algn="ctr">
-                      <a:solidFill>
-                        <a:srgbClr val="CBD5E1"/>
-                      </a:solidFill>
-                      <a:prstDash val="solid"/>
-                      <a:round/>
-                      <a:headEnd type="none" w="med" len="med"/>
-                      <a:tailEnd type="none" w="med" len="med"/>
-                    </a:lnB>
-                    <a:solidFill>
-                      <a:srgbClr val="FFFFFF"/>
-                    </a:solidFill>
-                  </a:tcPr>
-                </a:tc>
-                <a:tc>
-                  <a:txBody>
-                    <a:bodyPr/>
-                    <a:lstStyle/>
-                    <a:p>
-                      <a:pPr algn="ctr" indent="0" marL="0">
-                        <a:buNone/>
-                      </a:pPr>
-                      <a:r>
-                        <a:rPr lang="en-US" sz="1000" dirty="0">
-                          <a:solidFill>
-                            <a:srgbClr val="475569"/>
-                          </a:solidFill>
-                          <a:latin typeface="Calibri" pitchFamily="34" charset="0"/>
-                          <a:ea typeface="Calibri" pitchFamily="34" charset="-122"/>
-                          <a:cs typeface="Calibri" pitchFamily="34" charset="-120"/>
-                        </a:rPr>
-                        <a:t>2,394 lines Python</a:t>
+                        <a:t>High (all custom Python)</a:t>
                       </a:r>
                       <a:endParaRPr lang="en-US" sz="1000" dirty="0">
                         <a:latin typeface="Calibri" charset="0"/>
@@ -15669,7 +15463,7 @@
                           <a:ea typeface="Calibri" pitchFamily="34" charset="-122"/>
                           <a:cs typeface="Calibri" pitchFamily="34" charset="-120"/>
                         </a:rPr>
-                        <a:t>525 lines TOML (declarative)</a:t>
+                        <a:t>Low — TOML (declarative)</a:t>
                       </a:r>
                       <a:endParaRPr lang="en-US" sz="1000" dirty="0">
                         <a:latin typeface="Calibri" charset="0"/>
@@ -15737,7 +15531,7 @@
                           <a:ea typeface="Calibri" pitchFamily="34" charset="-122"/>
                           <a:cs typeface="Calibri" pitchFamily="34" charset="-120"/>
                         </a:rPr>
-                        <a:t>695 lines Python (imperative)</a:t>
+                        <a:t>High — Python (imperative)</a:t>
                       </a:r>
                       <a:endParaRPr lang="en-US" sz="1000" dirty="0">
                         <a:latin typeface="Calibri" charset="0"/>
@@ -15943,7 +15737,7 @@
                           <a:ea typeface="Calibri" pitchFamily="34" charset="-122"/>
                           <a:cs typeface="Calibri" pitchFamily="34" charset="-120"/>
                         </a:rPr>
-                        <a:t>419 lines (4 custom modules)</a:t>
+                        <a:t>High (4 custom modules)</a:t>
                       </a:r>
                       <a:endParaRPr lang="en-US" sz="1000" dirty="0">
                         <a:latin typeface="Calibri" charset="0"/>
@@ -16149,7 +15943,7 @@
                           <a:ea typeface="Calibri" pitchFamily="34" charset="-122"/>
                           <a:cs typeface="Calibri" pitchFamily="34" charset="-120"/>
                         </a:rPr>
-                        <a:t>385 lines (3 custom modules)</a:t>
+                        <a:t>High (3 custom modules)</a:t>
                       </a:r>
                       <a:endParaRPr lang="en-US" sz="1000" dirty="0">
                         <a:latin typeface="Calibri" charset="0"/>
@@ -16287,7 +16081,7 @@
                           <a:ea typeface="Calibri" pitchFamily="34" charset="-122"/>
                           <a:cs typeface="Calibri" pitchFamily="34" charset="-120"/>
                         </a:rPr>
-                        <a:t>Blob Storage (192 lines)</a:t>
+                        <a:t>Low — Blob Storage</a:t>
                       </a:r>
                       <a:endParaRPr lang="en-US" sz="1000" dirty="0">
                         <a:latin typeface="Calibri" charset="0"/>
@@ -16355,7 +16149,7 @@
                           <a:ea typeface="Calibri" pitchFamily="34" charset="-122"/>
                           <a:cs typeface="Calibri" pitchFamily="34" charset="-120"/>
                         </a:rPr>
-                        <a:t>SQLite 4-table (326 lines)</a:t>
+                        <a:t>Medium — SQLite 4-table</a:t>
                       </a:r>
                       <a:endParaRPr lang="en-US" sz="1000" dirty="0">
                         <a:latin typeface="Calibri" charset="0"/>
@@ -16767,7 +16561,7 @@
                           <a:ea typeface="Calibri" pitchFamily="34" charset="-122"/>
                           <a:cs typeface="Calibri" pitchFamily="34" charset="-120"/>
                         </a:rPr>
-                        <a:t>pipeline.py (248 lines custom)</a:t>
+                        <a:t>High — custom pipeline.py</a:t>
                       </a:r>
                       <a:endParaRPr lang="en-US" sz="1000" dirty="0">
                         <a:latin typeface="Calibri" charset="0"/>
@@ -16837,7 +16631,7 @@
                           <a:ea typeface="Calibri" pitchFamily="34" charset="-122"/>
                           <a:cs typeface="Calibri" pitchFamily="34" charset="-120"/>
                         </a:rPr>
-                        <a:t>Test Suite</a:t>
+                        <a:t>Test Suite Effort</a:t>
                       </a:r>
                       <a:endParaRPr lang="en-US" sz="1000" dirty="0">
                         <a:latin typeface="Calibri" charset="0"/>
@@ -16905,7 +16699,7 @@
                           <a:ea typeface="Calibri" pitchFamily="34" charset="-122"/>
                           <a:cs typeface="Calibri" pitchFamily="34" charset="-120"/>
                         </a:rPr>
-                        <a:t>359 lines (4 test modules)</a:t>
+                        <a:t>Low (thin orchestrator only)</a:t>
                       </a:r>
                       <a:endParaRPr lang="en-US" sz="1000" dirty="0">
                         <a:latin typeface="Calibri" charset="0"/>
@@ -16973,7 +16767,7 @@
                           <a:ea typeface="Calibri" pitchFamily="34" charset="-122"/>
                           <a:cs typeface="Calibri" pitchFamily="34" charset="-120"/>
                         </a:rPr>
-                        <a:t>1,119 lines (9 test modules)</a:t>
+                        <a:t>High (agents + tools + context)</a:t>
                       </a:r>
                       <a:endParaRPr lang="en-US" sz="1000" dirty="0">
                         <a:latin typeface="Calibri" charset="0"/>
@@ -17317,7 +17111,7 @@
                           <a:ea typeface="Calibri" pitchFamily="34" charset="-122"/>
                           <a:cs typeface="Calibri" pitchFamily="34" charset="-120"/>
                         </a:rPr>
-                        <a:t>npm: pptxgenjs, Codex CLI</a:t>
+                        <a:t>Codex CLI + thin wrapper</a:t>
                       </a:r>
                       <a:endParaRPr lang="en-US" sz="1000" dirty="0">
                         <a:latin typeface="Calibri" charset="0"/>
@@ -17385,7 +17179,7 @@
                           <a:ea typeface="Calibri" pitchFamily="34" charset="-122"/>
                           <a:cs typeface="Calibri" pitchFamily="34" charset="-120"/>
                         </a:rPr>
-                        <a:t>32 pip packages</a:t>
+                        <a:t>Python SDK + 32 pip packages</a:t>
                       </a:r>
                       <a:endParaRPr lang="en-US" sz="1000" dirty="0">
                         <a:latin typeface="Calibri" charset="0"/>
@@ -17643,6 +17437,212 @@
                   </a:tcPr>
                 </a:tc>
               </a:tr>
+              <a:tr h="292608">
+                <a:tc>
+                  <a:txBody>
+                    <a:bodyPr/>
+                    <a:lstStyle/>
+                    <a:p>
+                      <a:pPr algn="l" indent="0" marL="0">
+                        <a:buNone/>
+                      </a:pPr>
+                      <a:r>
+                        <a:rPr lang="en-US" sz="1000" b="1" dirty="0">
+                          <a:solidFill>
+                            <a:srgbClr val="0F172A"/>
+                          </a:solidFill>
+                          <a:latin typeface="Calibri" pitchFamily="34" charset="0"/>
+                          <a:ea typeface="Calibri" pitchFamily="34" charset="-122"/>
+                          <a:cs typeface="Calibri" pitchFamily="34" charset="-120"/>
+                        </a:rPr>
+                        <a:t>Model</a:t>
+                      </a:r>
+                      <a:endParaRPr lang="en-US" sz="1000" dirty="0">
+                        <a:latin typeface="Calibri" charset="0"/>
+                        <a:ea typeface="Calibri" charset="0"/>
+                        <a:cs typeface="Calibri" charset="0"/>
+                      </a:endParaRPr>
+                    </a:p>
+                  </a:txBody>
+                  <a:tcPr marL="91440" marR="91440" marT="45720" marB="45720">
+                    <a:lnL w="6350" cap="flat" cmpd="sng" algn="ctr">
+                      <a:solidFill>
+                        <a:srgbClr val="CBD5E1"/>
+                      </a:solidFill>
+                      <a:prstDash val="solid"/>
+                      <a:round/>
+                      <a:headEnd type="none" w="med" len="med"/>
+                      <a:tailEnd type="none" w="med" len="med"/>
+                    </a:lnL>
+                    <a:lnR w="6350" cap="flat" cmpd="sng" algn="ctr">
+                      <a:solidFill>
+                        <a:srgbClr val="CBD5E1"/>
+                      </a:solidFill>
+                      <a:prstDash val="solid"/>
+                      <a:round/>
+                      <a:headEnd type="none" w="med" len="med"/>
+                      <a:tailEnd type="none" w="med" len="med"/>
+                    </a:lnR>
+                    <a:lnT w="6350" cap="flat" cmpd="sng" algn="ctr">
+                      <a:solidFill>
+                        <a:srgbClr val="CBD5E1"/>
+                      </a:solidFill>
+                      <a:prstDash val="solid"/>
+                      <a:round/>
+                      <a:headEnd type="none" w="med" len="med"/>
+                      <a:tailEnd type="none" w="med" len="med"/>
+                    </a:lnT>
+                    <a:lnB w="6350" cap="flat" cmpd="sng" algn="ctr">
+                      <a:solidFill>
+                        <a:srgbClr val="CBD5E1"/>
+                      </a:solidFill>
+                      <a:prstDash val="solid"/>
+                      <a:round/>
+                      <a:headEnd type="none" w="med" len="med"/>
+                      <a:tailEnd type="none" w="med" len="med"/>
+                    </a:lnB>
+                    <a:solidFill>
+                      <a:srgbClr val="FFFFFF"/>
+                    </a:solidFill>
+                  </a:tcPr>
+                </a:tc>
+                <a:tc>
+                  <a:txBody>
+                    <a:bodyPr/>
+                    <a:lstStyle/>
+                    <a:p>
+                      <a:pPr algn="ctr" indent="0" marL="0">
+                        <a:buNone/>
+                      </a:pPr>
+                      <a:r>
+                        <a:rPr lang="en-US" sz="1000" dirty="0">
+                          <a:solidFill>
+                            <a:srgbClr val="475569"/>
+                          </a:solidFill>
+                          <a:latin typeface="Calibri" pitchFamily="34" charset="0"/>
+                          <a:ea typeface="Calibri" pitchFamily="34" charset="-122"/>
+                          <a:cs typeface="Calibri" pitchFamily="34" charset="-120"/>
+                        </a:rPr>
+                        <a:t>gpt-5.3-codex (all agents)</a:t>
+                      </a:r>
+                      <a:endParaRPr lang="en-US" sz="1000" dirty="0">
+                        <a:latin typeface="Calibri" charset="0"/>
+                        <a:ea typeface="Calibri" charset="0"/>
+                        <a:cs typeface="Calibri" charset="0"/>
+                      </a:endParaRPr>
+                    </a:p>
+                  </a:txBody>
+                  <a:tcPr marL="91440" marR="91440" marT="45720" marB="45720">
+                    <a:lnL w="6350" cap="flat" cmpd="sng" algn="ctr">
+                      <a:solidFill>
+                        <a:srgbClr val="CBD5E1"/>
+                      </a:solidFill>
+                      <a:prstDash val="solid"/>
+                      <a:round/>
+                      <a:headEnd type="none" w="med" len="med"/>
+                      <a:tailEnd type="none" w="med" len="med"/>
+                    </a:lnL>
+                    <a:lnR w="6350" cap="flat" cmpd="sng" algn="ctr">
+                      <a:solidFill>
+                        <a:srgbClr val="CBD5E1"/>
+                      </a:solidFill>
+                      <a:prstDash val="solid"/>
+                      <a:round/>
+                      <a:headEnd type="none" w="med" len="med"/>
+                      <a:tailEnd type="none" w="med" len="med"/>
+                    </a:lnR>
+                    <a:lnT w="6350" cap="flat" cmpd="sng" algn="ctr">
+                      <a:solidFill>
+                        <a:srgbClr val="CBD5E1"/>
+                      </a:solidFill>
+                      <a:prstDash val="solid"/>
+                      <a:round/>
+                      <a:headEnd type="none" w="med" len="med"/>
+                      <a:tailEnd type="none" w="med" len="med"/>
+                    </a:lnT>
+                    <a:lnB w="6350" cap="flat" cmpd="sng" algn="ctr">
+                      <a:solidFill>
+                        <a:srgbClr val="CBD5E1"/>
+                      </a:solidFill>
+                      <a:prstDash val="solid"/>
+                      <a:round/>
+                      <a:headEnd type="none" w="med" len="med"/>
+                      <a:tailEnd type="none" w="med" len="med"/>
+                    </a:lnB>
+                    <a:solidFill>
+                      <a:srgbClr val="FFFFFF"/>
+                    </a:solidFill>
+                  </a:tcPr>
+                </a:tc>
+                <a:tc>
+                  <a:txBody>
+                    <a:bodyPr/>
+                    <a:lstStyle/>
+                    <a:p>
+                      <a:pPr algn="ctr" indent="0" marL="0">
+                        <a:buNone/>
+                      </a:pPr>
+                      <a:r>
+                        <a:rPr lang="en-US" sz="1000" dirty="0">
+                          <a:solidFill>
+                            <a:srgbClr val="475569"/>
+                          </a:solidFill>
+                          <a:latin typeface="Calibri" pitchFamily="34" charset="0"/>
+                          <a:ea typeface="Calibri" pitchFamily="34" charset="-122"/>
+                          <a:cs typeface="Calibri" pitchFamily="34" charset="-120"/>
+                        </a:rPr>
+                        <a:t>gpt-4o / gpt-4o-mini</a:t>
+                      </a:r>
+                      <a:endParaRPr lang="en-US" sz="1000" dirty="0">
+                        <a:latin typeface="Calibri" charset="0"/>
+                        <a:ea typeface="Calibri" charset="0"/>
+                        <a:cs typeface="Calibri" charset="0"/>
+                      </a:endParaRPr>
+                    </a:p>
+                  </a:txBody>
+                  <a:tcPr marL="91440" marR="91440" marT="45720" marB="45720">
+                    <a:lnL w="6350" cap="flat" cmpd="sng" algn="ctr">
+                      <a:solidFill>
+                        <a:srgbClr val="CBD5E1"/>
+                      </a:solidFill>
+                      <a:prstDash val="solid"/>
+                      <a:round/>
+                      <a:headEnd type="none" w="med" len="med"/>
+                      <a:tailEnd type="none" w="med" len="med"/>
+                    </a:lnL>
+                    <a:lnR w="6350" cap="flat" cmpd="sng" algn="ctr">
+                      <a:solidFill>
+                        <a:srgbClr val="CBD5E1"/>
+                      </a:solidFill>
+                      <a:prstDash val="solid"/>
+                      <a:round/>
+                      <a:headEnd type="none" w="med" len="med"/>
+                      <a:tailEnd type="none" w="med" len="med"/>
+                    </a:lnR>
+                    <a:lnT w="6350" cap="flat" cmpd="sng" algn="ctr">
+                      <a:solidFill>
+                        <a:srgbClr val="CBD5E1"/>
+                      </a:solidFill>
+                      <a:prstDash val="solid"/>
+                      <a:round/>
+                      <a:headEnd type="none" w="med" len="med"/>
+                      <a:tailEnd type="none" w="med" len="med"/>
+                    </a:lnT>
+                    <a:lnB w="6350" cap="flat" cmpd="sng" algn="ctr">
+                      <a:solidFill>
+                        <a:srgbClr val="CBD5E1"/>
+                      </a:solidFill>
+                      <a:prstDash val="solid"/>
+                      <a:round/>
+                      <a:headEnd type="none" w="med" len="med"/>
+                      <a:tailEnd type="none" w="med" len="med"/>
+                    </a:lnB>
+                    <a:solidFill>
+                      <a:srgbClr val="FFFFFF"/>
+                    </a:solidFill>
+                  </a:tcPr>
+                </a:tc>
+              </a:tr>
             </a:tbl>
           </a:graphicData>
         </a:graphic>
@@ -18194,7 +18194,7 @@
                 <a:ea typeface="Calibri" pitchFamily="34" charset="-122"/>
                 <a:cs typeface="Calibri" pitchFamily="34" charset="-120"/>
               </a:rPr>
-              <a:t>Effort: 525 lines TOML config</a:t>
+              <a:t>Effort: Low (config only)</a:t>
             </a:r>
             <a:endParaRPr lang="en-US" sz="850" dirty="0"/>
           </a:p>
@@ -18236,7 +18236,7 @@
                 <a:ea typeface="Calibri" pitchFamily="34" charset="-122"/>
                 <a:cs typeface="Calibri" pitchFamily="34" charset="-120"/>
               </a:rPr>
-              <a:t>TDD-first: coder.py (184 lines)</a:t>
+              <a:t>TDD-first: custom coder agent</a:t>
             </a:r>
             <a:endParaRPr lang="en-US" sz="850" dirty="0"/>
           </a:p>
@@ -18256,7 +18256,7 @@
                 <a:ea typeface="Calibri" pitchFamily="34" charset="-122"/>
                 <a:cs typeface="Calibri" pitchFamily="34" charset="-120"/>
               </a:rPr>
-              <a:t>Ratcheting: state_manager.py</a:t>
+              <a:t>Ratcheting: custom state mgr</a:t>
             </a:r>
             <a:endParaRPr lang="en-US" sz="850" dirty="0"/>
           </a:p>
@@ -18276,7 +18276,7 @@
                 <a:ea typeface="Calibri" pitchFamily="34" charset="-122"/>
                 <a:cs typeface="Calibri" pitchFamily="34" charset="-120"/>
               </a:rPr>
-              <a:t>(116 lines custom logic)</a:t>
+              <a:t>Sprint contracts: custom</a:t>
             </a:r>
             <a:endParaRPr lang="en-US" sz="850" dirty="0"/>
           </a:p>
@@ -18296,7 +18296,7 @@
                 <a:ea typeface="Calibri" pitchFamily="34" charset="-122"/>
                 <a:cs typeface="Calibri" pitchFamily="34" charset="-120"/>
               </a:rPr>
-              <a:t>Sprint contracts: pipeline.py</a:t>
+              <a:t>negotiation in pipeline.py</a:t>
             </a:r>
             <a:endParaRPr lang="en-US" sz="850" dirty="0"/>
           </a:p>
@@ -18316,7 +18316,7 @@
                 <a:ea typeface="Calibri" pitchFamily="34" charset="-122"/>
                 <a:cs typeface="Calibri" pitchFamily="34" charset="-120"/>
               </a:rPr>
-              <a:t>negotiation loop (248 lines)</a:t>
+              <a:t>6-gate flow hand-coded</a:t>
             </a:r>
             <a:endParaRPr lang="en-US" sz="850" dirty="0"/>
           </a:p>
@@ -18336,7 +18336,7 @@
                 <a:ea typeface="Calibri" pitchFamily="34" charset="-122"/>
                 <a:cs typeface="Calibri" pitchFamily="34" charset="-120"/>
               </a:rPr>
-              <a:t>6-gate flow hand-coded</a:t>
+              <a:t>Learned rules: custom I/O</a:t>
             </a:r>
             <a:endParaRPr lang="en-US" sz="850" dirty="0"/>
           </a:p>
@@ -18347,17 +18347,6 @@
               </a:lnSpc>
               <a:buNone/>
             </a:pPr>
-            <a:r>
-              <a:rPr lang="en-US" sz="850" dirty="0">
-                <a:solidFill>
-                  <a:srgbClr val="334155"/>
-                </a:solidFill>
-                <a:latin typeface="Calibri" pitchFamily="34" charset="0"/>
-                <a:ea typeface="Calibri" pitchFamily="34" charset="-122"/>
-                <a:cs typeface="Calibri" pitchFamily="34" charset="-120"/>
-              </a:rPr>
-              <a:t>Learned rules: custom I/O</a:t>
-            </a:r>
             <a:endParaRPr lang="en-US" sz="850" dirty="0"/>
           </a:p>
           <a:p>
@@ -18367,15 +18356,6 @@
               </a:lnSpc>
               <a:buNone/>
             </a:pPr>
-            <a:endParaRPr lang="en-US" sz="850" dirty="0"/>
-          </a:p>
-          <a:p>
-            <a:pPr indent="0" marL="0">
-              <a:lnSpc>
-                <a:spcPct val="130000"/>
-              </a:lnSpc>
-              <a:buNone/>
-            </a:pPr>
             <a:r>
               <a:rPr lang="en-US" sz="850" dirty="0">
                 <a:solidFill>
@@ -18385,7 +18365,7 @@
                 <a:ea typeface="Calibri" pitchFamily="34" charset="-122"/>
                 <a:cs typeface="Calibri" pitchFamily="34" charset="-120"/>
               </a:rPr>
-              <a:t>Effort: 695 lines Python code</a:t>
+              <a:t>Effort: High (all custom Python)</a:t>
             </a:r>
             <a:endParaRPr lang="en-US" sz="850" dirty="0"/>
           </a:p>
@@ -18847,7 +18827,7 @@
                 <a:ea typeface="Calibri" pitchFamily="34" charset="-122"/>
                 <a:cs typeface="Calibri" pitchFamily="34" charset="-120"/>
               </a:rPr>
-              <a:t>Effort: Zero custom code</a:t>
+              <a:t>Effort: Zero (platform built-in)</a:t>
             </a:r>
             <a:endParaRPr lang="en-US" sz="850" dirty="0"/>
           </a:p>
@@ -18889,7 +18869,7 @@
                 <a:ea typeface="Calibri" pitchFamily="34" charset="-122"/>
                 <a:cs typeface="Calibri" pitchFamily="34" charset="-120"/>
               </a:rPr>
-              <a:t>chunker.py: 131 lines (AST split)</a:t>
+              <a:t>Custom semantic chunker</a:t>
             </a:r>
             <a:endParaRPr lang="en-US" sz="850" dirty="0"/>
           </a:p>
@@ -18909,7 +18889,7 @@
                 <a:ea typeface="Calibri" pitchFamily="34" charset="-122"/>
                 <a:cs typeface="Calibri" pitchFamily="34" charset="-120"/>
               </a:rPr>
-              <a:t>token_estimator.py: 56 lines</a:t>
+              <a:t>Custom token estimator</a:t>
             </a:r>
             <a:endParaRPr lang="en-US" sz="850" dirty="0"/>
           </a:p>
@@ -18929,7 +18909,7 @@
                 <a:ea typeface="Calibri" pitchFamily="34" charset="-122"/>
                 <a:cs typeface="Calibri" pitchFamily="34" charset="-120"/>
               </a:rPr>
-              <a:t>compressor.py: 108 lines</a:t>
+              <a:t>Custom progressive compressor</a:t>
             </a:r>
             <a:endParaRPr lang="en-US" sz="850" dirty="0"/>
           </a:p>
@@ -18949,7 +18929,7 @@
                 <a:ea typeface="Calibri" pitchFamily="34" charset="-122"/>
                 <a:cs typeface="Calibri" pitchFamily="34" charset="-120"/>
               </a:rPr>
-              <a:t>(30% progressive compression)</a:t>
+              <a:t>(30% older history reduction)</a:t>
             </a:r>
             <a:endParaRPr lang="en-US" sz="850" dirty="0"/>
           </a:p>
@@ -18969,7 +18949,7 @@
                 <a:ea typeface="Calibri" pitchFamily="34" charset="-122"/>
                 <a:cs typeface="Calibri" pitchFamily="34" charset="-120"/>
               </a:rPr>
-              <a:t>complexity_scorer.py: 124 lines</a:t>
+              <a:t>Custom complexity scorer</a:t>
             </a:r>
             <a:endParaRPr lang="en-US" sz="850" dirty="0"/>
           </a:p>
@@ -19038,7 +19018,7 @@
                 <a:ea typeface="Calibri" pitchFamily="34" charset="-122"/>
                 <a:cs typeface="Calibri" pitchFamily="34" charset="-120"/>
               </a:rPr>
-              <a:t>Effort: 419 lines Python code</a:t>
+              <a:t>Effort: High (4 custom modules)</a:t>
             </a:r>
             <a:endParaRPr lang="en-US" sz="850" dirty="0"/>
           </a:p>
@@ -19500,7 +19480,7 @@
                 <a:ea typeface="Calibri" pitchFamily="34" charset="-122"/>
                 <a:cs typeface="Calibri" pitchFamily="34" charset="-120"/>
               </a:rPr>
-              <a:t>Effort: 504 lines bash scripts</a:t>
+              <a:t>Effort: Low (config + scripts)</a:t>
             </a:r>
             <a:endParaRPr lang="en-US" sz="850" dirty="0"/>
           </a:p>
@@ -19691,7 +19671,7 @@
                 <a:ea typeface="Calibri" pitchFamily="34" charset="-122"/>
                 <a:cs typeface="Calibri" pitchFamily="34" charset="-120"/>
               </a:rPr>
-              <a:t>Effort: 326 lines persistence</a:t>
+              <a:t>Effort: Medium (config + code)</a:t>
             </a:r>
             <a:endParaRPr lang="en-US" sz="850" dirty="0"/>
           </a:p>
@@ -20004,7 +19984,7 @@
                 <a:ea typeface="Calibri" pitchFamily="34" charset="-122"/>
                 <a:cs typeface="Calibri" pitchFamily="34" charset="-120"/>
               </a:rPr>
-              <a:t>FastAPI: api.py (380 lines)</a:t>
+              <a:t>FastAPI thin orchestrator</a:t>
             </a:r>
             <a:endParaRPr lang="en-US" sz="850" dirty="0"/>
           </a:p>
@@ -20024,7 +20004,7 @@
                 <a:ea typeface="Calibri" pitchFamily="34" charset="-122"/>
                 <a:cs typeface="Calibri" pitchFamily="34" charset="-120"/>
               </a:rPr>
-              <a:t>Codex CLI wrapper (141 lines)</a:t>
+              <a:t>Codex CLI subprocess wrapper</a:t>
             </a:r>
             <a:endParaRPr lang="en-US" sz="850" dirty="0"/>
           </a:p>
@@ -20044,7 +20024,7 @@
                 <a:ea typeface="Calibri" pitchFamily="34" charset="-122"/>
                 <a:cs typeface="Calibri" pitchFamily="34" charset="-120"/>
               </a:rPr>
-              <a:t>ADO client: ado_client.py</a:t>
+              <a:t>ADO client for PR creation</a:t>
             </a:r>
             <a:endParaRPr lang="en-US" sz="850" dirty="0"/>
           </a:p>
@@ -20064,7 +20044,7 @@
                 <a:ea typeface="Calibri" pitchFamily="34" charset="-122"/>
                 <a:cs typeface="Calibri" pitchFamily="34" charset="-120"/>
               </a:rPr>
-              <a:t>(175 lines — PR + WI update)</a:t>
+              <a:t>and work item updates</a:t>
             </a:r>
             <a:endParaRPr lang="en-US" sz="850" dirty="0"/>
           </a:p>
@@ -20084,7 +20064,7 @@
                 <a:ea typeface="Calibri" pitchFamily="34" charset="-122"/>
                 <a:cs typeface="Calibri" pitchFamily="34" charset="-120"/>
               </a:rPr>
-              <a:t>Blob state sync (192 lines)</a:t>
+              <a:t>Blob state sync for persistence</a:t>
             </a:r>
             <a:endParaRPr lang="en-US" sz="850" dirty="0"/>
           </a:p>
@@ -20153,7 +20133,7 @@
                 <a:ea typeface="Calibri" pitchFamily="34" charset="-122"/>
                 <a:cs typeface="Calibri" pitchFamily="34" charset="-120"/>
               </a:rPr>
-              <a:t>Effort: 888 lines orchestrator</a:t>
+              <a:t>Effort: Low (thin API wrapper)</a:t>
             </a:r>
             <a:endParaRPr lang="en-US" sz="850" dirty="0"/>
           </a:p>
@@ -20195,7 +20175,7 @@
                 <a:ea typeface="Calibri" pitchFamily="34" charset="-122"/>
                 <a:cs typeface="Calibri" pitchFamily="34" charset="-120"/>
               </a:rPr>
-              <a:t>FastAPI: api.py (180 lines)</a:t>
+              <a:t>FastAPI orchestrator API</a:t>
             </a:r>
             <a:endParaRPr lang="en-US" sz="850" dirty="0"/>
           </a:p>
@@ -20215,7 +20195,7 @@
                 <a:ea typeface="Calibri" pitchFamily="34" charset="-122"/>
                 <a:cs typeface="Calibri" pitchFamily="34" charset="-120"/>
               </a:rPr>
-              <a:t>Pipeline: pipeline.py (248 lines)</a:t>
+              <a:t>Custom pipeline orchestrator</a:t>
             </a:r>
             <a:endParaRPr lang="en-US" sz="850" dirty="0"/>
           </a:p>
@@ -20235,7 +20215,7 @@
                 <a:ea typeface="Calibri" pitchFamily="34" charset="-122"/>
                 <a:cs typeface="Calibri" pitchFamily="34" charset="-120"/>
               </a:rPr>
-              <a:t>ADO client: ado_client.py</a:t>
+              <a:t>ADO client for PR creation</a:t>
             </a:r>
             <a:endParaRPr lang="en-US" sz="850" dirty="0"/>
           </a:p>
@@ -20255,7 +20235,7 @@
                 <a:ea typeface="Calibri" pitchFamily="34" charset="-122"/>
                 <a:cs typeface="Calibri" pitchFamily="34" charset="-120"/>
               </a:rPr>
-              <a:t>(175 lines — PR + WI update)</a:t>
+              <a:t>and work item updates</a:t>
             </a:r>
             <a:endParaRPr lang="en-US" sz="850" dirty="0"/>
           </a:p>
@@ -20275,7 +20255,7 @@
                 <a:ea typeface="Calibri" pitchFamily="34" charset="-122"/>
                 <a:cs typeface="Calibri" pitchFamily="34" charset="-120"/>
               </a:rPr>
-              <a:t>Blob state sync (116 lines)</a:t>
+              <a:t>Blob state sync for persistence</a:t>
             </a:r>
             <a:endParaRPr lang="en-US" sz="850" dirty="0"/>
           </a:p>
@@ -20344,7 +20324,7 @@
                 <a:ea typeface="Calibri" pitchFamily="34" charset="-122"/>
                 <a:cs typeface="Calibri" pitchFamily="34" charset="-120"/>
               </a:rPr>
-              <a:t>Effort: 355 lines orchestrator</a:t>
+              <a:t>Effort: Medium (custom pipeline)</a:t>
             </a:r>
             <a:endParaRPr lang="en-US" sz="850" dirty="0"/>
           </a:p>
@@ -20690,7 +20670,7 @@
                 <a:ea typeface="Calibri" pitchFamily="34" charset="-122"/>
                 <a:cs typeface="Calibri" pitchFamily="34" charset="-120"/>
               </a:rPr>
-              <a:t>Custom pipeline.py — 248 lines</a:t>
+              <a:t>Custom pipeline orchestrator (High effort)</a:t>
             </a:r>
             <a:endParaRPr lang="en-US" sz="850" dirty="0"/>
           </a:p>
@@ -20788,7 +20768,7 @@
                 <a:ea typeface="Calibri" pitchFamily="34" charset="-122"/>
                 <a:cs typeface="Calibri" pitchFamily="34" charset="-120"/>
               </a:rPr>
-              <a:t>TOML declarative — 525 lines</a:t>
+              <a:t>TOML declarative (Low effort)</a:t>
             </a:r>
             <a:endParaRPr lang="en-US" sz="850" dirty="0"/>
           </a:p>
@@ -20827,7 +20807,7 @@
                 <a:ea typeface="Calibri" pitchFamily="34" charset="-122"/>
                 <a:cs typeface="Calibri" pitchFamily="34" charset="-120"/>
               </a:rPr>
-              <a:t>Python classes — 695 lines</a:t>
+              <a:t>Python classes (High effort)</a:t>
             </a:r>
             <a:endParaRPr lang="en-US" sz="850" dirty="0"/>
           </a:p>
@@ -20964,7 +20944,7 @@
                 <a:ea typeface="Calibri" pitchFamily="34" charset="-122"/>
                 <a:cs typeface="Calibri" pitchFamily="34" charset="-120"/>
               </a:rPr>
-              <a:t>Custom compressor — 108 lines</a:t>
+              <a:t>Custom compressor (High effort)</a:t>
             </a:r>
             <a:endParaRPr lang="en-US" sz="850" dirty="0"/>
           </a:p>
@@ -21101,7 +21081,7 @@
                 <a:ea typeface="Calibri" pitchFamily="34" charset="-122"/>
                 <a:cs typeface="Calibri" pitchFamily="34" charset="-120"/>
               </a:rPr>
-              <a:t>Custom chunker — 131 lines</a:t>
+              <a:t>Custom chunker (Medium effort)</a:t>
             </a:r>
             <a:endParaRPr lang="en-US" sz="850" dirty="0"/>
           </a:p>
@@ -21238,7 +21218,7 @@
                 <a:ea typeface="Calibri" pitchFamily="34" charset="-122"/>
                 <a:cs typeface="Calibri" pitchFamily="34" charset="-120"/>
               </a:rPr>
-              <a:t>Custom estimator — 56 lines</a:t>
+              <a:t>Custom token estimator (Medium effort)</a:t>
             </a:r>
             <a:endParaRPr lang="en-US" sz="850" dirty="0"/>
           </a:p>
@@ -21375,7 +21355,7 @@
                 <a:ea typeface="Calibri" pitchFamily="34" charset="-122"/>
                 <a:cs typeface="Calibri" pitchFamily="34" charset="-120"/>
               </a:rPr>
-              <a:t>Custom regex AST — 147 lines</a:t>
+              <a:t>Custom regex AST parser (High effort)</a:t>
             </a:r>
             <a:endParaRPr lang="en-US" sz="850" dirty="0"/>
           </a:p>
@@ -21512,7 +21492,7 @@
                 <a:ea typeface="Calibri" pitchFamily="34" charset="-122"/>
                 <a:cs typeface="Calibri" pitchFamily="34" charset="-120"/>
               </a:rPr>
-              <a:t>Custom file_tools — 104 lines</a:t>
+              <a:t>Custom file tools (Medium effort)</a:t>
             </a:r>
             <a:endParaRPr lang="en-US" sz="850" dirty="0"/>
           </a:p>
@@ -21649,7 +21629,7 @@
                 <a:ea typeface="Calibri" pitchFamily="34" charset="-122"/>
                 <a:cs typeface="Calibri" pitchFamily="34" charset="-120"/>
               </a:rPr>
-              <a:t>Custom test_runner — 134 lines</a:t>
+              <a:t>Custom test runner (Medium effort)</a:t>
             </a:r>
             <a:endParaRPr lang="en-US" sz="850" dirty="0"/>
           </a:p>
@@ -21923,7 +21903,7 @@
                 <a:ea typeface="Calibri" pitchFamily="34" charset="-122"/>
                 <a:cs typeface="Calibri" pitchFamily="34" charset="-120"/>
               </a:rPr>
-              <a:t>Custom scorer — 124 lines</a:t>
+              <a:t>Custom scorer (Medium effort)</a:t>
             </a:r>
             <a:endParaRPr lang="en-US" sz="850" dirty="0"/>
           </a:p>
